--- a/01-slides/W04-Requirements-and-Use-Case-Modeling.pptx
+++ b/01-slides/W04-Requirements-and-Use-Case-Modeling.pptx
@@ -581,7 +581,7 @@
   <p:cSld>
     <p:spTree>
       <p:nvGrpSpPr>
-        <p:cNvPr id="1" name="" descr="&lt;Slide style={{ background: '#0E3F8C', padding: 0 }}&gt;&#10;  &lt;Box style={{ flexDirection: 'column', height: '100%', justifyContent: 'center', padding: '0 80px', position: 'relative' }}&gt;&#10;    &lt;Box style={{ position: 'absolute', top: 0, left: 0, right: 0, height: 8, background: '#1E4FA8' }} /&gt;&#10;    &lt;Box style={{ position: 'absolute', top: 8, left: 0, right: 0, height: 2, background: '#3D7BD9' }} /&gt;&#10;    &lt;Box style={{ flexDirection: 'row', alignItems: 'center', gap: 14, marginBottom: 30 }}&gt;&#10;      &lt;Box style={{ padding: '7px 18px', background: '#3D7BD9', borderRadius: 18 }}&gt;&#10;        &lt;Text style={{ fontSize: 16, color: '#FFFFFF', fontWeight: 'bold', letterSpacing: 2 }}&gt;ISAD · WEEK 04&lt;/Text&gt;&#10;      &lt;/Box&gt;&#10;      &lt;Box style={{ width: 56, height: 1, background: '#5B84C4' }} /&gt;&#10;      &lt;Text style={{ fontSize: 16, color: '#7FA2D6', letterSpacing: 1 }}&gt;MODULE B · OO ANALYSIS&lt;/Text&gt;&#10;    &lt;/Box&gt;&#10;    &lt;Text style={{ fontSize: 56, fontWeight: 'bold', color: '#FFFFFF', fontFamily: 'Georgia, serif', lineHeight: 1.12 }}&gt;&#10;      Requirements&#10;      &lt;br /&gt;&#10;      &amp;amp; Use Case Modeling&#10;    &lt;/Text&gt;&#10;    &lt;Box style={{ width: 88, height: 5, background: '#FFC107', marginTop: 28, marginBottom: 22 }} /&gt;&#10;    &lt;Text style={{ fontSize: 26, color: '#B9CDF0', lineHeight: 1.45 }}&gt;&#10;      Where the Requirements Pack Lands on Your Desk — and Becomes a Model&#10;    &lt;/Text&gt;&#10;    &lt;Box style={{ position: 'absolute', bottom: 46, left: 80, right: 80, flexDirection: 'row', justifyContent: 'space-between', alignItems: 'center', borderTop: '1px solid #2B5793', paddingTop: 18 }}&gt;&#10;      &lt;Text style={{ fontSize: 17, color: '#C5D4EA' }}&gt;Ren Zheng · School of Software Engineering&lt;/Text&gt;&#10;      &lt;Text style={{ fontSize: 17, color: '#C5D4EA' }}&gt;Fall 2026&lt;/Text&gt;&#10;    &lt;/Box&gt;&#10;  &lt;/Box&gt;&#10;&lt;/Slide&gt;"/>
+        <p:cNvPr id="1" name=""/>
         <p:cNvGrpSpPr/>
         <p:nvPr/>
       </p:nvGrpSpPr>
@@ -614,7 +614,10 @@
         </p:spPr>
         <p:txBody>
           <a:bodyPr/>
-          <a:p/>
+          <a:p>
+            <a:pPr/>
+            <a:endParaRPr/>
+          </a:p>
         </p:txBody>
       </p:sp>
       <p:sp>
@@ -640,7 +643,10 @@
         </p:spPr>
         <p:txBody>
           <a:bodyPr/>
-          <a:p/>
+          <a:p>
+            <a:pPr/>
+            <a:endParaRPr/>
+          </a:p>
         </p:txBody>
       </p:sp>
       <p:sp>
@@ -699,7 +705,10 @@
         </p:spPr>
         <p:txBody>
           <a:bodyPr/>
-          <a:p/>
+          <a:p>
+            <a:pPr/>
+            <a:endParaRPr/>
+          </a:p>
         </p:txBody>
       </p:sp>
       <p:sp>
@@ -811,7 +820,10 @@
         </p:spPr>
         <p:txBody>
           <a:bodyPr/>
-          <a:p/>
+          <a:p>
+            <a:pPr/>
+            <a:endParaRPr/>
+          </a:p>
         </p:txBody>
       </p:sp>
       <p:sp>
@@ -870,7 +882,10 @@
         </p:spPr>
         <p:txBody>
           <a:bodyPr/>
-          <a:p/>
+          <a:p>
+            <a:pPr/>
+            <a:endParaRPr/>
+          </a:p>
         </p:txBody>
       </p:sp>
       <p:sp>
@@ -894,7 +909,10 @@
         </p:spPr>
         <p:txBody>
           <a:bodyPr/>
-          <a:p/>
+          <a:p>
+            <a:pPr/>
+            <a:endParaRPr/>
+          </a:p>
         </p:txBody>
       </p:sp>
       <p:sp>
@@ -934,7 +952,10 @@
         </p:spPr>
         <p:txBody>
           <a:bodyPr/>
-          <a:p/>
+          <a:p>
+            <a:pPr/>
+            <a:endParaRPr/>
+          </a:p>
         </p:txBody>
       </p:sp>
       <p:sp>
@@ -1017,7 +1038,7 @@
   <p:cSld>
     <p:spTree>
       <p:nvGrpSpPr>
-        <p:cNvPr id="15" name="" descr="&lt;Slide style={{ background: '#FFFFFF', padding: 0 }}&gt;&#10;  &lt;Box style={{ height: 72, background: '#1E4FA8', padding: '0 40px', flexDirection: 'row', alignItems: 'center', justifyContent: 'space-between' }}&gt;&#10;    &lt;Text style={{ fontSize: 15, color: '#B9CDF0', letterSpacing: 1 }}&gt;ISAD · INFORMATION SYSTEMS ANALYSIS &amp;amp; DESIGN&lt;/Text&gt;&#10;    &lt;Text style={{ fontSize: 15, color: '#B9CDF0' }}&gt;W04 · ACTORS &amp;amp; GOALS&lt;/Text&gt;&#10;  &lt;/Box&gt;&#10;  &lt;Box style={{ padding: '12px 40px 0 40px', flexDirection: 'row', alignItems: 'center', justifyContent: 'space-between' }}&gt;&#10;    &lt;Text style={{ fontSize: 30, fontWeight: 'bold', color: '#0E3F8C' }}&gt;A Use Case Is a Goal, Not a Function&lt;/Text&gt;&#10;    &lt;Text style={{ fontSize: 14, color: '#1E4FA8', fontWeight: 'bold' }}&gt;10 / 38&lt;/Text&gt;&#10;  &lt;/Box&gt;&#10;  &lt;Box style={{ flex: 1, padding: '18px 60px 0 60px', flexDirection: 'column', justifyContent: 'center', alignItems: 'center' }}&gt;&#10;    &lt;Box style={{ padding: '0 40px', marginBottom: 8 }}&gt;&#10;      &lt;Text style={{ fontSize: 19, color: '#8B97A8', letterSpacing: 1 }}&gt;THE DEFINITION WE USE THIS SEMESTER&lt;/Text&gt;&#10;    &lt;/Box&gt;&#10;    &lt;Box style={{ width: 940, padding: '34px 46px', background: '#F0F5FC', borderRadius: 12, borderLeft: '6px solid #1E4FA8', alignItems: 'center' }}&gt;&#10;      &lt;Text style={{ fontSize: 27, color: '#0E3F8C', fontWeight: 'bold', lineHeight: 1.42, textAlign: 'center' }}&gt;&#10;        A use case is a set of scenarios whose end is a&#10;        &lt;br /&gt;&#10;        user goal — something the actor walks away saying “done”.&#10;      &lt;/Text&gt;&#10;    &lt;/Box&gt;&#10;    &lt;Box style={{ width: 940, marginTop: 12, marginBottom: 22 }}&gt;&#10;      &lt;Text style={{ fontSize: 13.5, color: '#8B97A8', textAlign: 'center', lineHeight: 1.5 }}&gt;&#10;        Cockburn’s definition. Three words carry the weight: scenarios, end, goal.&#10;      &lt;/Text&gt;&#10;    &lt;/Box&gt;&#10;    &lt;Box style={{ width: 940, flexDirection: 'row', gap: 20 }}&gt;&#10;      &lt;Box style={{ flex: 1, padding: '22px 20px', background: '#FFFFFF', borderRadius: 10, border: '1px solid #D6DCE5' }}&gt;&#10;        &lt;FAIcon name='flag-checkered' style={{ fill: '#1E4FA8', width: 22, height: 22 }} /&gt;&#10;        &lt;Text style={{ fontSize: 17, fontWeight: 'bold', color: '#0E3F8C', marginTop: 10 }}&gt;It ends&lt;/Text&gt;&#10;        &lt;Text style={{ fontSize: 13, color: '#4A5568', lineHeight: 1.55, marginTop: 6 }}&gt;&#10;          There is a state of the world where the actor stops and says “that is it”. If your use case never ends, you have modelled a process, not a goal.&#10;        &lt;/Text&gt;&#10;      &lt;/Box&gt;&#10;      &lt;Box style={{ flex: 1, padding: '22px 20px', background: '#FFFFFF', borderRadius: 10, border: '1px solid #D6DCE5' }}&gt;&#10;        &lt;FAIcon name='users' style={{ fill: '#1E4FA8', width: 22, height: 22 }} /&gt;&#10;        &lt;Text style={{ fontSize: 17, fontWeight: 'bold', color: '#0E3F8C', marginTop: 10 }}&gt;It belongs to one actor&lt;/Text&gt;&#10;        &lt;Text style={{ fontSize: 13, color: '#4A5568', lineHeight: 1.55, marginTop: 6 }}&gt;&#10;          Exactly one primary actor owns the goal. Other actors may help, but only one of them is the reason the use case exists.&#10;        &lt;/Text&gt;&#10;      &lt;/Box&gt;&#10;      &lt;Box style={{ flex: 1, padding: '22px 20px', background: '#FFFFFF', borderRadius: 10, border: '1px solid #D6DCE5' }}&gt;&#10;        &lt;FAIcon name='check-circle' style={{ fill: '#1E4FA8', width: 22, height: 22 }} /&gt;&#10;        &lt;Text style={{ fontSize: 17, fontWeight: 'bold', color: '#0E3F8C', marginTop: 10 }}&gt;It can fail, and still be one&lt;/Text&gt;&#10;        &lt;Text style={{ fontSize: 13, color: '#4A5568', lineHeight: 1.55, marginTop: 6 }}&gt;&#10;          “Pay for order” stays one use case whether the card clears or is declined. Success and failure are scenarios inside it — not separate use cases.&#10;        &lt;/Text&gt;&#10;      &lt;/Box&gt;&#10;    &lt;/Box&gt;&#10;  &lt;/Box&gt;&#10;  &lt;Box style={{ height: 46, background: '#0E3F8C', padding: '0 40px', flexDirection: 'row', alignItems: 'center', justifyContent: 'center' }}&gt;&#10;    &lt;Text style={{ fontSize: 16, color: '#FFFFFF', fontWeight: '600' }}&gt;Ask “what does the actor get out of this?” — if the answer is “nothing yet”, it is not a use case.&lt;/Text&gt;&#10;  &lt;/Box&gt;&#10;&lt;/Slide&gt;"/>
+        <p:cNvPr id="15" name=""/>
         <p:cNvGrpSpPr/>
         <p:nvPr/>
       </p:nvGrpSpPr>
@@ -1050,7 +1071,10 @@
         </p:spPr>
         <p:txBody>
           <a:bodyPr/>
-          <a:p/>
+          <a:p>
+            <a:pPr/>
+            <a:endParaRPr/>
+          </a:p>
         </p:txBody>
       </p:sp>
       <p:sp>
@@ -1074,7 +1098,10 @@
         </p:spPr>
         <p:txBody>
           <a:bodyPr/>
-          <a:p/>
+          <a:p>
+            <a:pPr/>
+            <a:endParaRPr/>
+          </a:p>
         </p:txBody>
       </p:sp>
       <p:sp>
@@ -1275,7 +1302,10 @@
         </p:spPr>
         <p:txBody>
           <a:bodyPr/>
-          <a:p/>
+          <a:p>
+            <a:pPr/>
+            <a:endParaRPr/>
+          </a:p>
         </p:txBody>
       </p:sp>
       <p:sp>
@@ -1332,7 +1362,10 @@
         </p:spPr>
         <p:txBody>
           <a:bodyPr/>
-          <a:p/>
+          <a:p>
+            <a:pPr/>
+            <a:endParaRPr/>
+          </a:p>
         </p:txBody>
       </p:sp>
       <p:sp>
@@ -1451,7 +1484,10 @@
         </p:spPr>
         <p:txBody>
           <a:bodyPr/>
-          <a:p/>
+          <a:p>
+            <a:pPr/>
+            <a:endParaRPr/>
+          </a:p>
         </p:txBody>
       </p:sp>
       <p:pic>
@@ -1585,7 +1621,10 @@
         </p:spPr>
         <p:txBody>
           <a:bodyPr/>
-          <a:p/>
+          <a:p>
+            <a:pPr/>
+            <a:endParaRPr/>
+          </a:p>
         </p:txBody>
       </p:sp>
       <p:pic>
@@ -1719,7 +1758,10 @@
         </p:spPr>
         <p:txBody>
           <a:bodyPr/>
-          <a:p/>
+          <a:p>
+            <a:pPr/>
+            <a:endParaRPr/>
+          </a:p>
         </p:txBody>
       </p:sp>
       <p:pic>
@@ -1846,7 +1888,10 @@
         </p:spPr>
         <p:txBody>
           <a:bodyPr/>
-          <a:p/>
+          <a:p>
+            <a:pPr/>
+            <a:endParaRPr/>
+          </a:p>
         </p:txBody>
       </p:sp>
       <p:sp>
@@ -1894,7 +1939,7 @@
   <p:cSld>
     <p:spTree>
       <p:nvGrpSpPr>
-        <p:cNvPr id="41" name="" descr="&lt;Slide style={{ background: '#FFFFFF', padding: 0 }}&gt;&#10;  &lt;Box style={{ height: 72, background: '#1E4FA8', padding: '0 40px', flexDirection: 'row', alignItems: 'center', justifyContent: 'space-between' }}&gt;&#10;    &lt;Text style={{ fontSize: 15, color: '#B9CDF0', letterSpacing: 1 }}&gt;ISAD · INFORMATION SYSTEMS ANALYSIS &amp;amp; DESIGN&lt;/Text&gt;&#10;    &lt;Text style={{ fontSize: 15, color: '#B9CDF0' }}&gt;W04 · ACTORS &amp;amp; GOALS&lt;/Text&gt;&#10;  &lt;/Box&gt;&#10;  &lt;Box style={{ padding: '14px 40px 0 40px', flexDirection: 'row', alignItems: 'center', justifyContent: 'space-between' }}&gt;&#10;    &lt;Text style={{ fontSize: 29, fontWeight: 'bold', color: '#0E3F8C' }}&gt;The CRUD Trap&lt;/Text&gt;&#10;    &lt;Text style={{ fontSize: 14, color: '#1E4FA8', fontWeight: 'bold' }}&gt;11 / 38&lt;/Text&gt;&#10;  &lt;/Box&gt;&#10;  &lt;Box style={{ flex: 1, padding: '12px 40px 0 40px', flexDirection: 'row', gap: 22 }}&gt;&#10;    &lt;Box style={{ flex: 1, flexDirection: 'column' }}&gt;&#10;      &lt;Box style={{ flexDirection: 'row', alignItems: 'center', gap: 9, marginBottom: 10 }}&gt;&#10;        &lt;FAIcon name='times-circle' style={{ fill: '#D9534F', width: 20, height: 20 }} /&gt;&#10;        &lt;Text style={{ fontSize: 17, fontWeight: 'bold', color: '#D9534F' }}&gt;Data-centred — four “use cases”&lt;/Text&gt;&#10;      &lt;/Box&gt;&#10;      {[&#10;        ['Manage Order', 'Create / Read / Update / Delete, all in one'],&#10;        ['Maintain Menu', 'Who wants this? Nobody gets up for it'],&#10;        ['Maintain Customer', 'No goal. No end. Just a table'],&#10;        ['Administer System', 'A screen name, not a user goal'],&#10;      ].map((r) =&gt; (&#10;        &lt;Box key={r[0]} style={{ padding: '14px 16px', background: '#FDF3F3', borderRadius: 9, borderLeft: '3px solid #D9534F', marginBottom: 9 }}&gt;&#10;          &lt;Text style={{ fontSize: 15, fontWeight: 'bold', color: '#1A2230' }}&gt;{r[0]}&lt;/Text&gt;&#10;          &lt;Text style={{ fontSize: 12.5, color: '#4A5568', lineHeight: 1.5, marginTop: 3 }}&gt;{r[1]}&lt;/Text&gt;&#10;        &lt;/Box&gt;&#10;      ))}&#10;    &lt;/Box&gt;&#10;    &lt;Box style={{ width: 34, justifyContent: 'center', alignItems: 'center' }}&gt;&#10;      &lt;FAIcon name='long-arrow-alt-right' style={{ fill: '#3D7BD9', width: 26, height: 26 }} /&gt;&#10;    &lt;/Box&gt;&#10;    &lt;Box style={{ flex: 1, flexDirection: 'column' }}&gt;&#10;      &lt;Box style={{ flexDirection: 'row', alignItems: 'center', gap: 9, marginBottom: 10 }}&gt;&#10;        &lt;FAIcon name='check-circle' style={{ fill: '#1E4FA8', width: 20, height: 20 }} /&gt;&#10;        &lt;Text style={{ fontSize: 17, fontWeight: 'bold', color: '#1E4FA8' }}&gt;Goal-centred — what people want&lt;/Text&gt;&#10;      &lt;/Box&gt;&#10;      {[&#10;        ['Place Order', 'Student · ends when the order is accepted'],&#10;        ['Cancel Order', 'Student · ends when the refund is issued'],&#10;        ['Manage Today’s Menu', 'Restaurant Manager · ends when the menu is live'],&#10;        ['Dispatch Courier', 'Dispatcher · ends when a rider is assigned'],&#10;      ].map((r) =&gt; (&#10;        &lt;Box key={r[0]} style={{ padding: '14px 16px', background: '#F0F5FC', borderRadius: 9, borderLeft: '3px solid #1E4FA8', marginBottom: 9 }}&gt;&#10;          &lt;Text style={{ fontSize: 15, fontWeight: 'bold', color: '#1A2230' }}&gt;{r[0]}&lt;/Text&gt;&#10;          &lt;Text style={{ fontSize: 12.5, color: '#4A5568', lineHeight: 1.5, marginTop: 3 }}&gt;{r[1]}&lt;/Text&gt;&#10;        &lt;/Box&gt;&#10;      ))}&#10;    &lt;/Box&gt;&#10;  &lt;/Box&gt;&#10;  &lt;Box style={{ height: 46, background: '#0E3F8C', padding: '0 40px', flexDirection: 'row', alignItems: 'center', justifyContent: 'center' }}&gt;&#10;    &lt;Text style={{ fontSize: 16, color: '#FFFFFF', fontWeight: '600' }}&gt;“Manage X” is a database table with a verb glued on. Ask who wakes up wanting it.&lt;/Text&gt;&#10;  &lt;/Box&gt;&#10;&lt;/Slide&gt;"/>
+        <p:cNvPr id="41" name=""/>
         <p:cNvGrpSpPr/>
         <p:nvPr/>
       </p:nvGrpSpPr>
@@ -1927,7 +1972,10 @@
         </p:spPr>
         <p:txBody>
           <a:bodyPr/>
-          <a:p/>
+          <a:p>
+            <a:pPr/>
+            <a:endParaRPr/>
+          </a:p>
         </p:txBody>
       </p:sp>
       <p:sp>
@@ -1951,7 +1999,10 @@
         </p:spPr>
         <p:txBody>
           <a:bodyPr/>
-          <a:p/>
+          <a:p>
+            <a:pPr/>
+            <a:endParaRPr/>
+          </a:p>
         </p:txBody>
       </p:sp>
       <p:sp>
@@ -2183,7 +2234,10 @@
         </p:spPr>
         <p:txBody>
           <a:bodyPr/>
-          <a:p/>
+          <a:p>
+            <a:pPr/>
+            <a:endParaRPr/>
+          </a:p>
         </p:txBody>
       </p:sp>
       <p:sp>
@@ -2240,7 +2294,10 @@
         </p:spPr>
         <p:txBody>
           <a:bodyPr/>
-          <a:p/>
+          <a:p>
+            <a:pPr/>
+            <a:endParaRPr/>
+          </a:p>
         </p:txBody>
       </p:sp>
       <p:sp>
@@ -2336,7 +2393,10 @@
         </p:spPr>
         <p:txBody>
           <a:bodyPr/>
-          <a:p/>
+          <a:p>
+            <a:pPr/>
+            <a:endParaRPr/>
+          </a:p>
         </p:txBody>
       </p:sp>
       <p:sp>
@@ -2393,7 +2453,10 @@
         </p:spPr>
         <p:txBody>
           <a:bodyPr/>
-          <a:p/>
+          <a:p>
+            <a:pPr/>
+            <a:endParaRPr/>
+          </a:p>
         </p:txBody>
       </p:sp>
       <p:sp>
@@ -2489,7 +2552,10 @@
         </p:spPr>
         <p:txBody>
           <a:bodyPr/>
-          <a:p/>
+          <a:p>
+            <a:pPr/>
+            <a:endParaRPr/>
+          </a:p>
         </p:txBody>
       </p:sp>
       <p:sp>
@@ -2546,7 +2612,10 @@
         </p:spPr>
         <p:txBody>
           <a:bodyPr/>
-          <a:p/>
+          <a:p>
+            <a:pPr/>
+            <a:endParaRPr/>
+          </a:p>
         </p:txBody>
       </p:sp>
       <p:sp>
@@ -2642,7 +2711,10 @@
         </p:spPr>
         <p:txBody>
           <a:bodyPr/>
-          <a:p/>
+          <a:p>
+            <a:pPr/>
+            <a:endParaRPr/>
+          </a:p>
         </p:txBody>
       </p:sp>
       <p:sp>
@@ -2699,7 +2771,10 @@
         </p:spPr>
         <p:txBody>
           <a:bodyPr/>
-          <a:p/>
+          <a:p>
+            <a:pPr/>
+            <a:endParaRPr/>
+          </a:p>
         </p:txBody>
       </p:sp>
       <p:sp>
@@ -2892,7 +2967,10 @@
         </p:spPr>
         <p:txBody>
           <a:bodyPr/>
-          <a:p/>
+          <a:p>
+            <a:pPr/>
+            <a:endParaRPr/>
+          </a:p>
         </p:txBody>
       </p:sp>
       <p:sp>
@@ -2949,7 +3027,10 @@
         </p:spPr>
         <p:txBody>
           <a:bodyPr/>
-          <a:p/>
+          <a:p>
+            <a:pPr/>
+            <a:endParaRPr/>
+          </a:p>
         </p:txBody>
       </p:sp>
       <p:sp>
@@ -3045,7 +3126,10 @@
         </p:spPr>
         <p:txBody>
           <a:bodyPr/>
-          <a:p/>
+          <a:p>
+            <a:pPr/>
+            <a:endParaRPr/>
+          </a:p>
         </p:txBody>
       </p:sp>
       <p:sp>
@@ -3102,7 +3186,10 @@
         </p:spPr>
         <p:txBody>
           <a:bodyPr/>
-          <a:p/>
+          <a:p>
+            <a:pPr/>
+            <a:endParaRPr/>
+          </a:p>
         </p:txBody>
       </p:sp>
       <p:sp>
@@ -3198,7 +3285,10 @@
         </p:spPr>
         <p:txBody>
           <a:bodyPr/>
-          <a:p/>
+          <a:p>
+            <a:pPr/>
+            <a:endParaRPr/>
+          </a:p>
         </p:txBody>
       </p:sp>
       <p:sp>
@@ -3255,7 +3345,10 @@
         </p:spPr>
         <p:txBody>
           <a:bodyPr/>
-          <a:p/>
+          <a:p>
+            <a:pPr/>
+            <a:endParaRPr/>
+          </a:p>
         </p:txBody>
       </p:sp>
       <p:sp>
@@ -3351,7 +3444,10 @@
         </p:spPr>
         <p:txBody>
           <a:bodyPr/>
-          <a:p/>
+          <a:p>
+            <a:pPr/>
+            <a:endParaRPr/>
+          </a:p>
         </p:txBody>
       </p:sp>
       <p:sp>
@@ -3408,7 +3504,10 @@
         </p:spPr>
         <p:txBody>
           <a:bodyPr/>
-          <a:p/>
+          <a:p>
+            <a:pPr/>
+            <a:endParaRPr/>
+          </a:p>
         </p:txBody>
       </p:sp>
       <p:sp>
@@ -3502,7 +3601,10 @@
         </p:spPr>
         <p:txBody>
           <a:bodyPr/>
-          <a:p/>
+          <a:p>
+            <a:pPr/>
+            <a:endParaRPr/>
+          </a:p>
         </p:txBody>
       </p:sp>
       <p:sp>
@@ -3550,7 +3652,7 @@
   <p:cSld>
     <p:spTree>
       <p:nvGrpSpPr>
-        <p:cNvPr id="87" name="" descr="&lt;Slide style={{ background: '#FFFFFF', padding: 0 }}&gt;&#10;  &lt;Box style={{ height: 72, background: '#1E4FA8', padding: '0 40px', flexDirection: 'row', alignItems: 'center', justifyContent: 'space-between' }}&gt;&#10;    &lt;Text style={{ fontSize: 15, color: '#B9CDF0', letterSpacing: 1 }}&gt;ISAD · INFORMATION SYSTEMS ANALYSIS &amp;amp; DESIGN&lt;/Text&gt;&#10;    &lt;Text style={{ fontSize: 15, color: '#B9CDF0' }}&gt;W04 · ACTORS &amp;amp; GOALS&lt;/Text&gt;&#10;  &lt;/Box&gt;&#10;  &lt;Box style={{ padding: '12px 40px 0 40px', flexDirection: 'row', alignItems: 'center', justifyContent: 'space-between' }}&gt;&#10;    &lt;Text style={{ fontSize: 29, fontWeight: 'bold', color: '#0E3F8C' }}&gt;Actor Generalization&lt;/Text&gt;&#10;    &lt;Text style={{ fontSize: 14, color: '#1E4FA8', fontWeight: 'bold' }}&gt;12 / 38&lt;/Text&gt;&#10;  &lt;/Box&gt;&#10;  &lt;Box style={{ flex: 1, padding: '8px 40px 0 40px', flexDirection: 'row', gap: 26 }}&gt;&#10;    &lt;Box style={{ width: 560, justifyContent: 'center', alignItems: 'center' }}&gt;&#10;      &lt;svg width={560} height={356} viewBox='0 0 560 356'&gt;&#10;        &lt;text x='6' y='16' fill='#8B97A8' fontSize='12'&gt;The child inherits every use case of the parent&lt;/text&gt;&#10;&#10;        &lt;g transform='translate(18,40)'&gt;&#10;          &lt;circle cx='0' cy='0' r='9' fill='none' stroke='#1E4FA8' strokeWidth='2' /&gt;&#10;          &lt;line x1='0' y1='9' x2='0' y2='30' stroke='#1E4FA8' strokeWidth='2' /&gt;&#10;          &lt;line x1='0' y1='17' x2='-12' y2='28' stroke='#1E4FA8' strokeWidth='2' /&gt;&#10;          &lt;line x1='0' y1='17' x2='12' y2='28' stroke='#1E4FA8' strokeWidth='2' /&gt;&#10;          &lt;line x1='0' y1='30' x2='-11' y2='46' stroke='#1E4FA8' strokeWidth='2' /&gt;&#10;          &lt;line x1='0' y1='30' x2='11' y2='46' stroke='#1E4FA8' strokeWidth='2' /&gt;&#10;          &lt;text x='0' y='62' textAnchor='middle' fill='#0E3F8C' fontSize='13' fontWeight='bold'&gt;User&lt;/text&gt;&#10;          &lt;text x='0' y='78' textAnchor='middle' fill='#8B97A8' fontSize='10.5'&gt;parent actor&lt;/text&gt;&#10;        &lt;/g&gt;&#10;&#10;        &lt;path d='M 90 105 L 90 140 L 26 140 L 26 168' fill='none' stroke='#1E4FA8' strokeWidth='1.6' /&gt;&#10;        &lt;path d='M 90 105 L 90 140 L 154 140 L 154 168' fill='none' stroke='#1E4FA8' strokeWidth='1.6' /&gt;&#10;        &lt;polygon points='90,168 82,150 98,150' fill='#FFFFFF' stroke='#1E4FA8' strokeWidth='1.6' /&gt;&#10;        &lt;text x='104' y='132' fill='#4A5568' fontSize='10.5'&gt;generalization&lt;/text&gt;&#10;        &lt;text x='104' y='148' fill='#8B97A8' fontSize='10'&gt;hollow triangle&lt;/text&gt;&#10;&#10;        &lt;g transform='translate(10,170)'&gt;&#10;          &lt;circle cx='16' cy='12' r='9' fill='none' stroke='#3D7BD9' strokeWidth='2' /&gt;&#10;          &lt;line x1='16' y1='21' x2='16' y2='40' stroke='#3D7BD9' strokeWidth='2' /&gt;&#10;          &lt;line x1='16' y1='28' x2='5' y2='38' stroke='#3D7BD9' strokeWidth='2' /&gt;&#10;          &lt;line x1='16' y1='28' x2='27' y2='38' stroke='#3D7BD9' strokeWidth='2' /&gt;&#10;          &lt;line x1='16' y1='40' x2='6' y2='54' stroke='#3D7BD9' strokeWidth='2' /&gt;&#10;          &lt;line x1='16' y1='40' x2='26' y2='54' stroke='#3D7BD9' strokeWidth='2' /&gt;&#10;          &lt;text x='16' y='70' textAnchor='middle' fill='#0E3F8C' fontSize='12.5' fontWeight='bold'&gt;Student&lt;/text&gt;&#10;        &lt;/g&gt;&#10;&#10;        &lt;g transform='translate(140,170)'&gt;&#10;          &lt;circle cx='18' cy='12' r='9' fill='none' stroke='#3D7BD9' strokeWidth='2' /&gt;&#10;          &lt;line x1='18' y1='21' x2='18' y2='40' stroke='#3D7BD9' strokeWidth='2' /&gt;&#10;          &lt;line x1='18' y1='28' x2='7' y2='38' stroke='#3D7BD9' strokeWidth='2' /&gt;&#10;          &lt;line x1='18' y1='28' x2='29' y2='38' stroke='#3D7BD9' strokeWidth='2' /&gt;&#10;          &lt;line x1='18' y1='40' x2='8' y2='54' stroke='#3D7BD9' strokeWidth='2' /&gt;&#10;          &lt;line x1='18' y1='40' x2='28' y2='54' stroke='#3D7BD9' strokeWidth='2' /&gt;&#10;          &lt;text x='18' y='70' textAnchor='middle' fill='#0E3F8C' fontSize='12.5' fontWeight='bold'&gt;Staff&lt;/text&gt;&#10;        &lt;/g&gt;&#10;&#10;        &lt;rect x='250' y='30' width='300' height='300' rx='8' fill='#F7F9FC' stroke='#1E4FA8' strokeWidth='2' /&gt;&#10;        &lt;text x='400' y='54' textAnchor='middle' fill='#0E3F8C' fontSize='13.5' fontWeight='bold'&gt;CampusBites&lt;/text&gt;&#10;        &lt;text x='400' y='70' textAnchor='middle' fill='#8B97A8' fontSize='10'&gt;system boundary&lt;/text&gt;&#10;&#10;        &lt;ellipse cx='400' cy='112' rx='112' ry='27' fill='#FFFFFF' stroke='#1E4FA8' strokeWidth='1.6' /&gt;&#10;        &lt;text x='400' y='117' textAnchor='middle' fill='#1A2230' fontSize='12.5'&gt;Browse Menu&lt;/text&gt;&#10;&#10;        &lt;ellipse cx='400' cy='164' rx='112' ry='27' fill='#FFFFFF' stroke='#1E4FA8' strokeWidth='1.6' /&gt;&#10;        &lt;text x='400' y='169' textAnchor='middle' fill='#1A2230' fontSize='12.5'&gt;Place Order&lt;/text&gt;&#10;&#10;        &lt;ellipse cx='400' cy='216' rx='112' ry='27' fill='#FFFFFF' stroke='#1E4FA8' strokeWidth='1.6' /&gt;&#10;        &lt;text x='400' y='221' textAnchor='middle' fill='#1A2230' fontSize='12.5'&gt;Track Order&lt;/text&gt;&#10;&#10;        &lt;ellipse cx='400' cy='268' rx='112' ry='27' fill='#FFFFFF' stroke='#3D7BD9' strokeWidth='1.6' strokeDasharray='5 3' /&gt;&#10;        &lt;text x='400' y='273' textAnchor='middle' fill='#3D7BD9' fontSize='12.5'&gt;Order Staff Meal&lt;/text&gt;&#10;        &lt;text x='400' y='294' textAnchor='middle' fill='#8B97A8' fontSize='9.5'&gt;inherited by all; written once&lt;/text&gt;&#10;&#10;        &lt;line x1='28' y1='112' x2='288' y2='112' stroke='#1E4FA8' strokeWidth='1.4' /&gt;&#10;        &lt;line x1='158' y1='164' x2='288' y2='164' stroke='#1E4FA8' strokeWidth='1.4' /&gt;&#10;        &lt;line x1='28' y1='216' x2='288' y2='216' stroke='#1E4FA8' strokeWidth='1.4' /&gt;&#10;        &lt;line x1='158' y1='268' x2='288' y2='268' stroke='#3D7BD9' strokeWidth='1.4' /&gt;&#10;      &lt;/svg&gt;&#10;    &lt;/Box&gt;&#10;    &lt;Box style={{ flex: 1, flexDirection: 'column', justifyContent: 'center', gap: 14 }}&gt;&#10;      &lt;Box style={{ padding: '16px 18px', background: '#F0F5FC', borderRadius: 9, borderLeft: '4px solid #1E4FA8' }}&gt;&#10;        &lt;Text style={{ fontSize: 16, fontWeight: 'bold', color: '#0E3F8C' }}&gt;What the arrow says&lt;/Text&gt;&#10;        &lt;Text style={{ fontSize: 13, color: '#4A5568', lineHeight: 1.6, marginTop: 5 }}&gt;&#10;          A hollow triangle points from the child to the parent. Read it as “Student is a kind of User”. Every use case attached to User is automatically available to Student and Staff.&#10;        &lt;/Text&gt;&#10;      &lt;/Box&gt;&#10;      &lt;Box style={{ padding: '16px 18px', background: '#F7F9FC', borderRadius: 9, borderLeft: '4px solid #3D7BD9' }}&gt;&#10;        &lt;Text style={{ fontSize: 16, fontWeight: 'bold', color: '#0E3F8C' }}&gt;Use it when…&lt;/Text&gt;&#10;        &lt;Text style={{ fontSize: 13, color: '#4A5568', lineHeight: 1.6, marginTop: 5 }}&gt;&#10;          Two actors share most of their goals, and one of them has one or two extra. You then write the shared use cases once, against the parent.&#10;        &lt;/Text&gt;&#10;      &lt;/Box&gt;&#10;      &lt;Box style={{ padding: '16px 18px', background: '#FDF3F3', borderRadius: 9, borderLeft: '4px solid #D9534F' }}&gt;&#10;        &lt;Text style={{ fontSize: 16, fontWeight: 'bold', color: '#D9534F' }}&gt;Do not use it when…&lt;/Text&gt;&#10;        &lt;Text style={{ fontSize: 13, color: '#4A5568', lineHeight: 1.6, marginTop: 5 }}&gt;&#10;          The two roles share almost nothing. A hollow triangle that earns you one line of saving is one more thing the reader must decode — draw two actors instead.&#10;        &lt;/Text&gt;&#10;      &lt;/Box&gt;&#10;      &lt;Box style={{ padding: '12px 16px', background: '#FFFFFF', borderRadius: 8, border: '1px dashed #D6DCE5' }}&gt;&#10;        &lt;Text style={{ fontSize: 12.5, color: '#8B97A8', lineHeight: 1.55 }}&gt;&#10;          Rule of thumb: if you have to explain why the triangle is there, take it out.&#10;        &lt;/Text&gt;&#10;      &lt;/Box&gt;&#10;    &lt;/Box&gt;&#10;  &lt;/Box&gt;&#10;  &lt;Box style={{ height: 34, padding: '0 40px', flexDirection: 'row', alignItems: 'center', justifyContent: 'space-between' }}&gt;&#10;    &lt;Text style={{ fontSize: 13, color: '#8B97A8' }}&gt;ISAD · Fall 2026 · Generalization is a saving, not a decoration&lt;/Text&gt;&#10;    &lt;Text style={{ fontSize: 14, color: '#1E4FA8', fontWeight: 'bold' }}&gt;12 / 38&lt;/Text&gt;&#10;  &lt;/Box&gt;&#10;&lt;/Slide&gt;"/>
+        <p:cNvPr id="87" name=""/>
         <p:cNvGrpSpPr/>
         <p:nvPr/>
       </p:nvGrpSpPr>
@@ -3583,7 +3685,10 @@
         </p:spPr>
         <p:txBody>
           <a:bodyPr/>
-          <a:p/>
+          <a:p>
+            <a:pPr/>
+            <a:endParaRPr/>
+          </a:p>
         </p:txBody>
       </p:sp>
       <p:sp>
@@ -3607,7 +3712,10 @@
         </p:spPr>
         <p:txBody>
           <a:bodyPr/>
-          <a:p/>
+          <a:p>
+            <a:pPr/>
+            <a:endParaRPr/>
+          </a:p>
         </p:txBody>
       </p:sp>
       <p:sp>
@@ -3804,7 +3912,10 @@
         </p:spPr>
         <p:txBody>
           <a:bodyPr/>
-          <a:p/>
+          <a:p>
+            <a:pPr/>
+            <a:endParaRPr/>
+          </a:p>
         </p:txBody>
       </p:sp>
       <p:sp>
@@ -3861,7 +3972,10 @@
         </p:spPr>
         <p:txBody>
           <a:bodyPr/>
-          <a:p/>
+          <a:p>
+            <a:pPr/>
+            <a:endParaRPr/>
+          </a:p>
         </p:txBody>
       </p:sp>
       <p:sp>
@@ -3959,7 +4073,10 @@
         </p:spPr>
         <p:txBody>
           <a:bodyPr/>
-          <a:p/>
+          <a:p>
+            <a:pPr/>
+            <a:endParaRPr/>
+          </a:p>
         </p:txBody>
       </p:sp>
       <p:sp>
@@ -4016,7 +4133,10 @@
         </p:spPr>
         <p:txBody>
           <a:bodyPr/>
-          <a:p/>
+          <a:p>
+            <a:pPr/>
+            <a:endParaRPr/>
+          </a:p>
         </p:txBody>
       </p:sp>
       <p:sp>
@@ -4114,7 +4234,10 @@
         </p:spPr>
         <p:txBody>
           <a:bodyPr/>
-          <a:p/>
+          <a:p>
+            <a:pPr/>
+            <a:endParaRPr/>
+          </a:p>
         </p:txBody>
       </p:sp>
       <p:sp>
@@ -4171,7 +4294,10 @@
         </p:spPr>
         <p:txBody>
           <a:bodyPr/>
-          <a:p/>
+          <a:p>
+            <a:pPr/>
+            <a:endParaRPr/>
+          </a:p>
         </p:txBody>
       </p:sp>
       <p:sp>
@@ -4274,7 +4400,10 @@
         </p:spPr>
         <p:txBody>
           <a:bodyPr/>
-          <a:p/>
+          <a:p>
+            <a:pPr/>
+            <a:endParaRPr/>
+          </a:p>
         </p:txBody>
       </p:sp>
       <p:sp>
@@ -4392,7 +4521,7 @@
   <p:cSld>
     <p:spTree>
       <p:nvGrpSpPr>
-        <p:cNvPr id="111" name="" descr="&lt;Slide style={{ background: '#FFFFFF', padding: 0 }}&gt;&#10;  &lt;Box style={{ height: 72, background: '#1E4FA8', padding: '0 40px', flexDirection: 'row', alignItems: 'center', justifyContent: 'space-between' }}&gt;&#10;    &lt;Text style={{ fontSize: 15, color: '#B9CDF0', letterSpacing: 1 }}&gt;ISAD · INFORMATION SYSTEMS ANALYSIS &amp;amp; DESIGN&lt;/Text&gt;&#10;    &lt;Text style={{ fontSize: 15, color: '#B9CDF0' }}&gt;W04 · ACTORS &amp;amp; GOALS&lt;/Text&gt;&#10;  &lt;/Box&gt;&#10;  &lt;Box style={{ padding: '14px 40px 0 40px', flexDirection: 'row', alignItems: 'center', justifyContent: 'space-between' }}&gt;&#10;    &lt;Text style={{ fontSize: 29, fontWeight: 'bold', color: '#0E3F8C' }}&gt;Naming a Use Case&lt;/Text&gt;&#10;    &lt;Text style={{ fontSize: 14, color: '#1E4FA8', fontWeight: 'bold' }}&gt;13 / 38&lt;/Text&gt;&#10;  &lt;/Box&gt;&#10;  &lt;Box style={{ flex: 1, padding: '12px 40px 0 40px', flexDirection: 'row', gap: 24 }}&gt;&#10;    &lt;Box style={{ width: 310, flexDirection: 'column', gap: 12, justifyContent: 'center' }}&gt;&#10;      &lt;Box style={{ padding: '18px 18px', background: '#F0F5FC', borderRadius: 10, borderTop: '4px solid #1E4FA8' }}&gt;&#10;        &lt;Text style={{ fontSize: 17, fontWeight: 'bold', color: '#0E3F8C' }}&gt;Verb + object&lt;/Text&gt;&#10;        &lt;Text style={{ fontSize: 13, color: '#4A5568', lineHeight: 1.6, marginTop: 6 }}&gt;&#10;          Two or three words. An active verb, then the thing the actor cares about.&#10;        &lt;/Text&gt;&#10;      &lt;/Box&gt;&#10;      &lt;Box style={{ padding: '18px 18px', background: '#F7F9FC', borderRadius: 10, borderTop: '4px solid #3D7BD9' }}&gt;&#10;        &lt;Text style={{ fontSize: 17, fontWeight: 'bold', color: '#0E3F8C' }}&gt;Business words&lt;/Text&gt;&#10;        &lt;Text style={{ fontSize: 13, color: '#4A5568', lineHeight: 1.6, marginTop: 6 }}&gt;&#10;          Say “Place Order”, not “Insert Row”. A manager must be able to read the diagram without a developer next to them.&#10;        &lt;/Text&gt;&#10;      &lt;/Box&gt;&#10;      &lt;Box style={{ padding: '18px 18px', background: '#FDF3F3', borderRadius: 10, borderTop: '4px solid #D9534F' }}&gt;&#10;        &lt;Text style={{ fontSize: 17, fontWeight: 'bold', color: '#D9534F' }}&gt;Never a step&lt;/Text&gt;&#10;        &lt;Text style={{ fontSize: 13, color: '#4A5568', lineHeight: 1.6, marginTop: 6 }}&gt;&#10;          If the name is something the actor does on the way, it belongs inside a use case, not on the diagram.&#10;        &lt;/Text&gt;&#10;      &lt;/Box&gt;&#10;    &lt;/Box&gt;&#10;    &lt;Box style={{ flex: 1, flexDirection: 'column', justifyContent: 'center', gap: 10 }}&gt;&#10;      {[&#10;        ['Order Processing', 'Place Order', 'A noun phrase describes a topic, not a goal'],&#10;        ['Validate Credit Card', 'Pay for Order', 'A single step. The actor wants the order paid, not a check'],&#10;        ['Order Management System', 'Manage Today’s Menu', 'You named the software, or the table — not the goal'],&#10;        ['User Logs In and Then Browses', 'Browse Menu', 'Two goals glued together. Split them; log in is an include'],&#10;      ].map((r) =&gt; (&#10;        &lt;Box key={r[0]} style={{ flexDirection: 'row', alignItems: 'stretch', gap: 12 }}&gt;&#10;          &lt;Box style={{ flex: 1, padding: '13px 15px', background: '#FDF3F3', borderRadius: 8, borderLeft: '3px solid #D9534F', justifyContent: 'center' }}&gt;&#10;            &lt;Text style={{ fontSize: 11, color: '#8B97A8', marginBottom: 2 }}&gt;WEAK&lt;/Text&gt;&#10;            &lt;Text style={{ fontSize: 15, color: '#1A2230', fontWeight: '600' }}&gt;{r[0]}&lt;/Text&gt;&#10;          &lt;/Box&gt;&#10;          &lt;Box style={{ width: 30, justifyContent: 'center', alignItems: 'center' }}&gt;&#10;            &lt;FAIcon name='long-arrow-alt-right' style={{ fill: '#1E4FA8', width: 20, height: 20 }} /&gt;&#10;          &lt;/Box&gt;&#10;          &lt;Box style={{ flex: 1, padding: '13px 15px', background: '#F0F5FC', borderRadius: 8, borderLeft: '3px solid #1E4FA8', justifyContent: 'center' }}&gt;&#10;            &lt;Text style={{ fontSize: 11, color: '#8B97A8', marginBottom: 2 }}&gt;BETTER&lt;/Text&gt;&#10;            &lt;Text style={{ fontSize: 15, color: '#0E3F8C', fontWeight: 'bold' }}&gt;{r[1]}&lt;/Text&gt;&#10;          &lt;/Box&gt;&#10;          &lt;Box style={{ width: 300, padding: '13px 15px', background: '#FFFFFF', borderRadius: 8, border: '1px solid #D6DCE5', justifyContent: 'center' }}&gt;&#10;            &lt;Text style={{ fontSize: 12, color: '#4A5568', lineHeight: 1.5 }}&gt;{r[2]}&lt;/Text&gt;&#10;          &lt;/Box&gt;&#10;        &lt;/Box&gt;&#10;      ))}&#10;    &lt;/Box&gt;&#10;  &lt;/Box&gt;&#10;  &lt;Box style={{ height: 46, background: '#0E3F8C', padding: '0 40px', flexDirection: 'row', alignItems: 'center', justifyContent: 'center' }}&gt;&#10;    &lt;Text style={{ fontSize: 16, color: '#FFFFFF', fontWeight: '600' }}&gt;Read your names aloud to the actor. If it sounds like a screen label, try again.&lt;/Text&gt;&#10;  &lt;/Box&gt;&#10;&lt;/Slide&gt;"/>
+        <p:cNvPr id="111" name=""/>
         <p:cNvGrpSpPr/>
         <p:nvPr/>
       </p:nvGrpSpPr>
@@ -4425,7 +4554,10 @@
         </p:spPr>
         <p:txBody>
           <a:bodyPr/>
-          <a:p/>
+          <a:p>
+            <a:pPr/>
+            <a:endParaRPr/>
+          </a:p>
         </p:txBody>
       </p:sp>
       <p:sp>
@@ -4449,7 +4581,10 @@
         </p:spPr>
         <p:txBody>
           <a:bodyPr/>
-          <a:p/>
+          <a:p>
+            <a:pPr/>
+            <a:endParaRPr/>
+          </a:p>
         </p:txBody>
       </p:sp>
       <p:sp>
@@ -4615,7 +4750,10 @@
         </p:spPr>
         <p:txBody>
           <a:bodyPr/>
-          <a:p/>
+          <a:p>
+            <a:pPr/>
+            <a:endParaRPr/>
+          </a:p>
         </p:txBody>
       </p:sp>
       <p:sp>
@@ -4672,7 +4810,10 @@
         </p:spPr>
         <p:txBody>
           <a:bodyPr/>
-          <a:p/>
+          <a:p>
+            <a:pPr/>
+            <a:endParaRPr/>
+          </a:p>
         </p:txBody>
       </p:sp>
       <p:sp>
@@ -4770,7 +4911,10 @@
         </p:spPr>
         <p:txBody>
           <a:bodyPr/>
-          <a:p/>
+          <a:p>
+            <a:pPr/>
+            <a:endParaRPr/>
+          </a:p>
         </p:txBody>
       </p:sp>
       <p:sp>
@@ -4827,7 +4971,10 @@
         </p:spPr>
         <p:txBody>
           <a:bodyPr/>
-          <a:p/>
+          <a:p>
+            <a:pPr/>
+            <a:endParaRPr/>
+          </a:p>
         </p:txBody>
       </p:sp>
       <p:sp>
@@ -4925,7 +5072,10 @@
         </p:spPr>
         <p:txBody>
           <a:bodyPr/>
-          <a:p/>
+          <a:p>
+            <a:pPr/>
+            <a:endParaRPr/>
+          </a:p>
         </p:txBody>
       </p:sp>
       <p:sp>
@@ -4982,7 +5132,10 @@
         </p:spPr>
         <p:txBody>
           <a:bodyPr/>
-          <a:p/>
+          <a:p>
+            <a:pPr/>
+            <a:endParaRPr/>
+          </a:p>
         </p:txBody>
       </p:sp>
       <p:sp>
@@ -5080,7 +5233,10 @@
         </p:spPr>
         <p:txBody>
           <a:bodyPr/>
-          <a:p/>
+          <a:p>
+            <a:pPr/>
+            <a:endParaRPr/>
+          </a:p>
         </p:txBody>
       </p:sp>
       <p:sp>
@@ -5137,7 +5293,10 @@
         </p:spPr>
         <p:txBody>
           <a:bodyPr/>
-          <a:p/>
+          <a:p>
+            <a:pPr/>
+            <a:endParaRPr/>
+          </a:p>
         </p:txBody>
       </p:sp>
       <p:sp>
@@ -5264,7 +5423,10 @@
         </p:spPr>
         <p:txBody>
           <a:bodyPr/>
-          <a:p/>
+          <a:p>
+            <a:pPr/>
+            <a:endParaRPr/>
+          </a:p>
         </p:txBody>
       </p:sp>
       <p:sp>
@@ -5321,7 +5483,10 @@
         </p:spPr>
         <p:txBody>
           <a:bodyPr/>
-          <a:p/>
+          <a:p>
+            <a:pPr/>
+            <a:endParaRPr/>
+          </a:p>
         </p:txBody>
       </p:sp>
       <p:sp>
@@ -5422,7 +5587,10 @@
         </p:spPr>
         <p:txBody>
           <a:bodyPr/>
-          <a:p/>
+          <a:p>
+            <a:pPr/>
+            <a:endParaRPr/>
+          </a:p>
         </p:txBody>
       </p:sp>
       <p:sp>
@@ -5483,7 +5651,10 @@
         </p:spPr>
         <p:txBody>
           <a:bodyPr/>
-          <a:p/>
+          <a:p>
+            <a:pPr/>
+            <a:endParaRPr/>
+          </a:p>
         </p:txBody>
       </p:sp>
       <p:sp>
@@ -5540,7 +5711,10 @@
         </p:spPr>
         <p:txBody>
           <a:bodyPr/>
-          <a:p/>
+          <a:p>
+            <a:pPr/>
+            <a:endParaRPr/>
+          </a:p>
         </p:txBody>
       </p:sp>
       <p:sp>
@@ -5667,7 +5841,10 @@
         </p:spPr>
         <p:txBody>
           <a:bodyPr/>
-          <a:p/>
+          <a:p>
+            <a:pPr/>
+            <a:endParaRPr/>
+          </a:p>
         </p:txBody>
       </p:sp>
       <p:sp>
@@ -5724,7 +5901,10 @@
         </p:spPr>
         <p:txBody>
           <a:bodyPr/>
-          <a:p/>
+          <a:p>
+            <a:pPr/>
+            <a:endParaRPr/>
+          </a:p>
         </p:txBody>
       </p:sp>
       <p:sp>
@@ -5825,7 +6005,10 @@
         </p:spPr>
         <p:txBody>
           <a:bodyPr/>
-          <a:p/>
+          <a:p>
+            <a:pPr/>
+            <a:endParaRPr/>
+          </a:p>
         </p:txBody>
       </p:sp>
       <p:sp>
@@ -5888,7 +6071,10 @@
         </p:spPr>
         <p:txBody>
           <a:bodyPr/>
-          <a:p/>
+          <a:p>
+            <a:pPr/>
+            <a:endParaRPr/>
+          </a:p>
         </p:txBody>
       </p:sp>
       <p:sp>
@@ -5945,7 +6131,10 @@
         </p:spPr>
         <p:txBody>
           <a:bodyPr/>
-          <a:p/>
+          <a:p>
+            <a:pPr/>
+            <a:endParaRPr/>
+          </a:p>
         </p:txBody>
       </p:sp>
       <p:sp>
@@ -6072,7 +6261,10 @@
         </p:spPr>
         <p:txBody>
           <a:bodyPr/>
-          <a:p/>
+          <a:p>
+            <a:pPr/>
+            <a:endParaRPr/>
+          </a:p>
         </p:txBody>
       </p:sp>
       <p:sp>
@@ -6129,7 +6321,10 @@
         </p:spPr>
         <p:txBody>
           <a:bodyPr/>
-          <a:p/>
+          <a:p>
+            <a:pPr/>
+            <a:endParaRPr/>
+          </a:p>
         </p:txBody>
       </p:sp>
       <p:sp>
@@ -6230,7 +6425,10 @@
         </p:spPr>
         <p:txBody>
           <a:bodyPr/>
-          <a:p/>
+          <a:p>
+            <a:pPr/>
+            <a:endParaRPr/>
+          </a:p>
         </p:txBody>
       </p:sp>
       <p:sp>
@@ -6293,7 +6491,10 @@
         </p:spPr>
         <p:txBody>
           <a:bodyPr/>
-          <a:p/>
+          <a:p>
+            <a:pPr/>
+            <a:endParaRPr/>
+          </a:p>
         </p:txBody>
       </p:sp>
       <p:sp>
@@ -6350,7 +6551,10 @@
         </p:spPr>
         <p:txBody>
           <a:bodyPr/>
-          <a:p/>
+          <a:p>
+            <a:pPr/>
+            <a:endParaRPr/>
+          </a:p>
         </p:txBody>
       </p:sp>
       <p:sp>
@@ -6479,7 +6683,10 @@
         </p:spPr>
         <p:txBody>
           <a:bodyPr/>
-          <a:p/>
+          <a:p>
+            <a:pPr/>
+            <a:endParaRPr/>
+          </a:p>
         </p:txBody>
       </p:sp>
       <p:sp>
@@ -6536,7 +6743,10 @@
         </p:spPr>
         <p:txBody>
           <a:bodyPr/>
-          <a:p/>
+          <a:p>
+            <a:pPr/>
+            <a:endParaRPr/>
+          </a:p>
         </p:txBody>
       </p:sp>
       <p:sp>
@@ -6637,7 +6847,10 @@
         </p:spPr>
         <p:txBody>
           <a:bodyPr/>
-          <a:p/>
+          <a:p>
+            <a:pPr/>
+            <a:endParaRPr/>
+          </a:p>
         </p:txBody>
       </p:sp>
       <p:sp>
@@ -6698,7 +6911,10 @@
         </p:spPr>
         <p:txBody>
           <a:bodyPr/>
-          <a:p/>
+          <a:p>
+            <a:pPr/>
+            <a:endParaRPr/>
+          </a:p>
         </p:txBody>
       </p:sp>
       <p:sp>
@@ -6746,7 +6962,7 @@
   <p:cSld>
     <p:spTree>
       <p:nvGrpSpPr>
-        <p:cNvPr id="176" name="" descr="&lt;Slide style={{ background: '#0E3F8C', padding: 0 }}&gt;&#10;  &lt;Box style={{ flexDirection: 'row', height: '100%', position: 'relative' }}&gt;&#10;    &lt;Box style={{ position: 'absolute', top: 0, left: 0, right: 0, height: 8, background: '#1E4FA8' }} /&gt;&#10;    &lt;Box style={{ width: 300, justifyContent: 'center', alignItems: 'center', borderRight: '1px solid #2B5793' }}&gt;&#10;      &lt;Text style={{ fontSize: 220, fontWeight: 'bold', color: '#3D7BD9', fontFamily: 'Georgia, serif', lineHeight: 1 }}&gt;03&lt;/Text&gt;&#10;    &lt;/Box&gt;&#10;    &lt;Box style={{ flex: 1, padding: '70px 64px', flexDirection: 'column', justifyContent: 'center' }}&gt;&#10;      &lt;Text style={{ fontSize: 15, color: '#7FA2D6', letterSpacing: 2, marginBottom: 18 }}&gt;PART 1 · LECTURE&lt;/Text&gt;&#10;      &lt;Text style={{ fontSize: 46, fontWeight: 'bold', color: '#FFFFFF', lineHeight: 1.18 }}&gt;The Use Case&lt;br /&gt;Diagram&lt;/Text&gt;&#10;      &lt;Box style={{ width: 64, height: 4, background: '#FFC107', marginTop: 26, marginBottom: 26 }} /&gt;&#10;      &lt;Box style={{ flexDirection: 'column', gap: 12 }}&gt;&#10;        {[&#10;          'Six symbols, and how to read each one aloud',&#10;          'The boundary decides what is yours to build',&#10;          'Three mistakes almost everyone makes first',&#10;        ].map((t) =&gt; (&#10;          &lt;Box key={t} style={{ flexDirection: 'row', alignItems: 'center', gap: 12 }}&gt;&#10;            &lt;Box style={{ width: 8, height: 8, borderRadius: 4, background: '#3D7BD9' }} /&gt;&#10;            &lt;Text style={{ fontSize: 20, color: '#C5D4EA' }}&gt;{t}&lt;/Text&gt;&#10;          &lt;/Box&gt;&#10;        ))}&#10;      &lt;/Box&gt;&#10;    &lt;/Box&gt;&#10;  &lt;/Box&gt;&#10;&lt;/Slide&gt;"/>
+        <p:cNvPr id="176" name=""/>
         <p:cNvGrpSpPr/>
         <p:nvPr/>
       </p:nvGrpSpPr>
@@ -6779,7 +6995,10 @@
         </p:spPr>
         <p:txBody>
           <a:bodyPr/>
-          <a:p/>
+          <a:p>
+            <a:pPr/>
+            <a:endParaRPr/>
+          </a:p>
         </p:txBody>
       </p:sp>
       <p:sp>
@@ -6819,7 +7038,10 @@
         </p:spPr>
         <p:txBody>
           <a:bodyPr/>
-          <a:p/>
+          <a:p>
+            <a:pPr/>
+            <a:endParaRPr/>
+          </a:p>
         </p:txBody>
       </p:sp>
       <p:sp>
@@ -6966,7 +7188,10 @@
         </p:spPr>
         <p:txBody>
           <a:bodyPr/>
-          <a:p/>
+          <a:p>
+            <a:pPr/>
+            <a:endParaRPr/>
+          </a:p>
         </p:txBody>
       </p:sp>
       <p:sp>
@@ -6992,7 +7217,10 @@
         </p:spPr>
         <p:txBody>
           <a:bodyPr/>
-          <a:p/>
+          <a:p>
+            <a:pPr/>
+            <a:endParaRPr/>
+          </a:p>
         </p:txBody>
       </p:sp>
       <p:sp>
@@ -7053,7 +7281,10 @@
         </p:spPr>
         <p:txBody>
           <a:bodyPr/>
-          <a:p/>
+          <a:p>
+            <a:pPr/>
+            <a:endParaRPr/>
+          </a:p>
         </p:txBody>
       </p:sp>
       <p:sp>
@@ -7114,7 +7345,10 @@
         </p:spPr>
         <p:txBody>
           <a:bodyPr/>
-          <a:p/>
+          <a:p>
+            <a:pPr/>
+            <a:endParaRPr/>
+          </a:p>
         </p:txBody>
       </p:sp>
       <p:sp>
@@ -7173,7 +7407,10 @@
         </p:spPr>
         <p:txBody>
           <a:bodyPr/>
-          <a:p/>
+          <a:p>
+            <a:pPr/>
+            <a:endParaRPr/>
+          </a:p>
         </p:txBody>
       </p:sp>
     </p:spTree>
@@ -7186,7 +7423,7 @@
   <p:cSld>
     <p:spTree>
       <p:nvGrpSpPr>
-        <p:cNvPr id="190" name="" descr="&lt;Slide style={{ background: '#FFFFFF', padding: 0 }}&gt;&#10;  &lt;Box style={{ height: 72, background: '#1E4FA8', padding: '0 40px', flexDirection: 'row', alignItems: 'center', justifyContent: 'space-between' }}&gt;&#10;    &lt;Text style={{ fontSize: 15, color: '#B9CDF0', letterSpacing: 1 }}&gt;ISAD · INFORMATION SYSTEMS ANALYSIS &amp;amp; DESIGN&lt;/Text&gt;&#10;    &lt;Text style={{ fontSize: 15, color: '#B9CDF0' }}&gt;W04 · THE USE CASE DIAGRAM&lt;/Text&gt;&#10;  &lt;/Box&gt;&#10;  &lt;Box style={{ padding: '12px 40px 0 40px', flexDirection: 'row', alignItems: 'center', justifyContent: 'space-between' }}&gt;&#10;    &lt;Text style={{ fontSize: 30, fontWeight: 'bold', color: '#0E3F8C' }}&gt;Anatomy of a Use Case Diagram&lt;/Text&gt;&#10;    &lt;Text style={{ fontSize: 14, color: '#1E4FA8', fontWeight: 'bold' }}&gt;15 / 38&lt;/Text&gt;&#10;  &lt;/Box&gt;&#10;  &lt;Box style={{ flex: 1, padding: '2px 40px 0 40px', justifyContent: 'center', alignItems: 'center' }}&gt;&#10;    &lt;svg width={1180} height={386} viewBox='0 0 1180 386'&gt;&#10;      &lt;text x='10' y='16' fill='#8B97A8' fontSize='13'&gt;Six symbols. If you can read all six aloud, you can read — and draw — any use case diagram.&lt;/text&gt;&#10;&#10;      &lt;g transform='translate(14,34)'&gt;&#10;        &lt;rect x='0' y='0' width='636' height='348' rx='8' fill='#F7F9FC' stroke='#1E4FA8' strokeWidth='2' /&gt;&#10;        &lt;text x='14' y='24' fill='#0E3F8C' fontSize='13.5' fontWeight='bold'&gt;the diagram&lt;/text&gt;&#10;&#10;        &lt;rect x='132' y='44' width='410' height='278' rx='6' fill='#FFFFFF' stroke='#1E4FA8' strokeWidth='1.6' /&gt;&#10;        &lt;text x='337' y='64' textAnchor='middle' fill='#1E4FA8' fontSize='13' fontWeight='bold'&gt;CampusBites&lt;/text&gt;&#10;&#10;        &lt;ellipse cx='337' cy='112' rx='132' ry='28' fill='#FFFFFF' stroke='#1E4FA8' strokeWidth='1.6' /&gt;&#10;        &lt;text x='337' y='117' textAnchor='middle' fill='#1A2230' fontSize='13'&gt;Place Order&lt;/text&gt;&#10;&#10;        &lt;ellipse cx='337' cy='182' rx='132' ry='28' fill='#FFFFFF' stroke='#1E4FA8' strokeWidth='1.6' /&gt;&#10;        &lt;text x='337' y='187' textAnchor='middle' fill='#1A2230' fontSize='13'&gt;Authenticate&lt;/text&gt;&#10;&#10;        &lt;ellipse cx='337' cy='252' rx='132' ry='28' fill='#FFFFFF' stroke='#3D7BD9' strokeWidth='1.6' /&gt;&#10;        &lt;text x='337' y='257' textAnchor='middle' fill='#1A2230' fontSize='13'&gt;Apply Coupon&lt;/text&gt;&#10;&#10;        &lt;g transform='translate(40,96)'&gt;&#10;          &lt;circle cx='16' cy='16' r='10' fill='none' stroke='#0E3F8C' strokeWidth='2' /&gt;&#10;          &lt;line x1='16' y1='26' x2='16' y2='52' stroke='#0E3F8C' strokeWidth='2' /&gt;&#10;          &lt;line x1='16' y1='34' x2='2' y2='48' stroke='#0E3F8C' strokeWidth='2' /&gt;&#10;          &lt;line x1='16' y1='34' x2='30' y2='48' stroke='#0E3F8C' strokeWidth='2' /&gt;&#10;          &lt;line x1='16' y1='52' x2='4' y2='70' stroke='#0E3F8C' strokeWidth='2' /&gt;&#10;          &lt;line x1='16' y1='52' x2='28' y2='70' stroke='#0E3F8C' strokeWidth='2' /&gt;&#10;          &lt;text x='16' y='88' textAnchor='middle' fill='#0E3F8C' fontSize='12.5' fontWeight='bold'&gt;Customer&lt;/text&gt;&#10;        &lt;/g&gt;&#10;&#10;        &lt;g transform='translate(556,182)'&gt;&#10;          &lt;circle cx='16' cy='16' r='10' fill='none' stroke='#8B97A8' strokeWidth='2' /&gt;&#10;          &lt;line x1='16' y1='26' x2='16' y2='52' stroke='#8B97A8' strokeWidth='2' /&gt;&#10;          &lt;line x1='16' y1='34' x2='2' y2='48' stroke='#8B97A8' strokeWidth='2' /&gt;&#10;          &lt;line x1='16' y1='34' x2='30' y2='48' stroke='#8B97A8' strokeWidth='2' /&gt;&#10;          &lt;line x1='16' y1='52' x2='4' y2='70' stroke='#8B97A8' strokeWidth='2' /&gt;&#10;          &lt;line x1='16' y1='52' x2='28' y2='70' stroke='#8B97A8' strokeWidth='2' /&gt;&#10;          &lt;text x='16' y='88' textAnchor='middle' fill='#8B97A8' fontSize='12.5' fontWeight='bold'&gt;Payment&lt;/text&gt;&#10;          &lt;text x='16' y='104' textAnchor='middle' fill='#8B97A8' fontSize='12.5' fontWeight='bold'&gt;Provider&lt;/text&gt;&#10;          &lt;text x='16' y='120' textAnchor='middle' fill='#4A5568' fontSize='10'&gt;outside the box&lt;/text&gt;&#10;        &lt;/g&gt;&#10;&#10;        &lt;line x1='56' y1='140' x2='212' y2='120' stroke='#1E4FA8' strokeWidth='1.6' /&gt;&#10;        &lt;line x1='270' y1='132' x2='542' y2='190' stroke='#8B97A8' strokeWidth='1.4' /&gt;&#10;&#10;        &lt;line x1='290' y1='134' x2='256' y2='158' stroke='#1E4FA8' strokeWidth='1.5' strokeDasharray='6 4' /&gt;&#10;        &lt;polygon points='252,161 264,158 256,148' fill='#1E4FA8' /&gt;&#10;        &lt;text x='196' y='148' fill='#1E4FA8' fontSize='11' fontWeight='bold'&gt;«include»&lt;/text&gt;&#10;&#10;        &lt;line x1='290' y1='232' x2='320' y2='166' stroke='#3D7BD9' strokeWidth='1.5' strokeDasharray='6 4' /&gt;&#10;        &lt;polygon points='322,162 310,168 320,176' fill='#3D7BD9' /&gt;&#10;        &lt;text x='240' y='220' fill='#3D7BD9' fontSize='11' fontWeight='bold'&gt;«extend»&lt;/text&gt;&#10;      &lt;/g&gt;&#10;&#10;      &lt;g transform='translate(672,34)'&gt;&#10;        &lt;text x='0' y='12' fill='#8B97A8' fontSize='12.5'&gt;read them in this order&lt;/text&gt;&#10;&#10;        &lt;g transform='translate(0,30)'&gt;&#10;          &lt;rect x='0' y='0' width='486' height='50' rx='6' fill='#F0F5FC' stroke='#1E4FA8' strokeWidth='1' /&gt;&#10;          &lt;circle cx='24' cy='25' r='15' fill='#1E4FA8' /&gt;&#10;          &lt;text x='24' y='31' textAnchor='middle' fill='#FFFFFF' fontSize='13' fontWeight='bold'&gt;1&lt;/text&gt;&#10;          &lt;text x='50' y='21' fill='#0E3F8C' fontSize='13.5' fontWeight='bold'&gt;System boundary — the box&lt;/text&gt;&#10;          &lt;text x='50' y='39' fill='#4A5568' fontSize='11.5'&gt;What you are building. Everything else is outside and belongs to someone else.&lt;/text&gt;&#10;        &lt;/g&gt;&#10;&#10;        &lt;g transform='translate(0,86)'&gt;&#10;          &lt;rect x='0' y='0' width='486' height='50' rx='6' fill='#FFFFFF' stroke='#D6DCE5' strokeWidth='1' /&gt;&#10;          &lt;circle cx='24' cy='25' r='15' fill='#3D7BD9' /&gt;&#10;          &lt;text x='24' y='31' textAnchor='middle' fill='#FFFFFF' fontSize='13' fontWeight='bold'&gt;2&lt;/text&gt;&#10;          &lt;text x='50' y='21' fill='#0E3F8C' fontSize='13.5' fontWeight='bold'&gt;Use case — the ellipse&lt;/text&gt;&#10;          &lt;text x='50' y='39' fill='#4A5568' fontSize='11.5'&gt;One user goal. Named verb plus object. An ellipse, never a box.&lt;/text&gt;&#10;        &lt;/g&gt;&#10;&#10;        &lt;g transform='translate(0,142)'&gt;&#10;          &lt;rect x='0' y='0' width='486' height='50' rx='6' fill='#FFFFFF' stroke='#D6DCE5' strokeWidth='1' /&gt;&#10;          &lt;circle cx='24' cy='25' r='15' fill='#3D7BD9' /&gt;&#10;          &lt;text x='24' y='31' textAnchor='middle' fill='#FFFFFF' fontSize='13' fontWeight='bold'&gt;3&lt;/text&gt;&#10;          &lt;text x='50' y='21' fill='#0E3F8C' fontSize='13.5' fontWeight='bold'&gt;Actor — the stick figure&lt;/text&gt;&#10;          &lt;text x='50' y='39' fill='#4A5568' fontSize='11.5'&gt;A role outside the box. Primary actors stand on the left; supporting actors on the right.&lt;/text&gt;&#10;        &lt;/g&gt;&#10;&#10;        &lt;g transform='translate(0,198)'&gt;&#10;          &lt;rect x='0' y='0' width='486' height='50' rx='6' fill='#FFFFFF' stroke='#D6DCE5' strokeWidth='1' /&gt;&#10;          &lt;circle cx='24' cy='25' r='15' fill='#3D7BD9' /&gt;&#10;          &lt;text x='24' y='31' textAnchor='middle' fill='#FFFFFF' fontSize='13' fontWeight='bold'&gt;4&lt;/text&gt;&#10;          &lt;text x='50' y='21' fill='#0E3F8C' fontSize='13.5' fontWeight='bold'&gt;Association — the solid line&lt;/text&gt;&#10;          &lt;text x='50' y='39' fill='#4A5568' fontSize='11.5'&gt;An actor talks to a use case. No arrowhead: information flows both ways.&lt;/text&gt;&#10;        &lt;/g&gt;&#10;&#10;        &lt;g transform='translate(0,254)'&gt;&#10;          &lt;rect x='0' y='0' width='486' height='50' rx='6' fill='#F0F5FC' stroke='#1E4FA8' strokeWidth='1' /&gt;&#10;          &lt;circle cx='24' cy='25' r='15' fill='#1E4FA8' /&gt;&#10;          &lt;text x='24' y='31' textAnchor='middle' fill='#FFFFFF' fontSize='13' fontWeight='bold'&gt;5&lt;/text&gt;&#10;          &lt;text x='50' y='21' fill='#0E3F8C' fontSize='13.5' fontWeight='bold'&gt;«include» — dashed, always happens&lt;/text&gt;&#10;          &lt;text x='50' y='39' fill='#4A5568' fontSize='11.5'&gt;Arrow from the base use case to the one it always pulls in.&lt;/text&gt;&#10;        &lt;/g&gt;&#10;&#10;        &lt;g transform='translate(0,310)'&gt;&#10;          &lt;rect x='0' y='0' width='486' height='50' rx='6' fill='#FFFFFF' stroke='#3D7BD9' strokeWidth='1' /&gt;&#10;          &lt;circle cx='24' cy='25' r='15' fill='#3D7BD9' /&gt;&#10;          &lt;text x='24' y='31' textAnchor='middle' fill='#FFFFFF' fontSize='13' fontWeight='bold'&gt;6&lt;/text&gt;&#10;          &lt;text x='50' y='21' fill='#0E3F8C' fontSize='13.5' fontWeight='bold'&gt;«extend» — dashed, may happen&lt;/text&gt;&#10;          &lt;text x='50' y='39' fill='#4A5568' fontSize='11.5'&gt;Arrow from the extra use case back to the base. Watch the direction.&lt;/text&gt;&#10;        &lt;/g&gt;&#10;      &lt;/g&gt;&#10;    &lt;/svg&gt;&#10;  &lt;/Box&gt;&#10;  &lt;Box style={{ height: 34, padding: '0 40px', flexDirection: 'row', alignItems: 'center', justifyContent: 'space-between' }}&gt;&#10;    &lt;Text style={{ fontSize: 13, color: '#8B97A8' }}&gt;ISAD · Fall 2026 · The diagram is a table of contents — the value is in the text you write for each ellipse (Week 05)&lt;/Text&gt;&#10;    &lt;Text style={{ fontSize: 14, color: '#1E4FA8', fontWeight: 'bold' }}&gt;15 / 38&lt;/Text&gt;&#10;  &lt;/Box&gt;&#10;&lt;/Slide&gt;"/>
+        <p:cNvPr id="190" name=""/>
         <p:cNvGrpSpPr/>
         <p:nvPr/>
       </p:nvGrpSpPr>
@@ -7219,7 +7456,10 @@
         </p:spPr>
         <p:txBody>
           <a:bodyPr/>
-          <a:p/>
+          <a:p>
+            <a:pPr/>
+            <a:endParaRPr/>
+          </a:p>
         </p:txBody>
       </p:sp>
       <p:sp>
@@ -7243,7 +7483,10 @@
         </p:spPr>
         <p:txBody>
           <a:bodyPr/>
-          <a:p/>
+          <a:p>
+            <a:pPr/>
+            <a:endParaRPr/>
+          </a:p>
         </p:txBody>
       </p:sp>
       <p:sp>
@@ -7497,7 +7740,7 @@
   <p:cSld>
     <p:spTree>
       <p:nvGrpSpPr>
-        <p:cNvPr id="200" name="" descr="&lt;Slide style={{ background: '#FFFFFF', padding: 0 }}&gt;&#10;  &lt;Box style={{ height: 72, background: '#1E4FA8', padding: '0 40px', flexDirection: 'row', alignItems: 'center', justifyContent: 'space-between' }}&gt;&#10;    &lt;Text style={{ fontSize: 15, color: '#B9CDF0', letterSpacing: 1 }}&gt;ISAD · INFORMATION SYSTEMS ANALYSIS &amp;amp; DESIGN&lt;/Text&gt;&#10;    &lt;Text style={{ fontSize: 15, color: '#B9CDF0' }}&gt;W04 · THE USE CASE DIAGRAM&lt;/Text&gt;&#10;  &lt;/Box&gt;&#10;  &lt;Box style={{ padding: '12px 40px 0 40px', flexDirection: 'row', alignItems: 'center', justifyContent: 'space-between' }}&gt;&#10;    &lt;Text style={{ fontSize: 29, fontWeight: 'bold', color: '#0E3F8C' }}&gt;The System Boundary&lt;/Text&gt;&#10;    &lt;Text style={{ fontSize: 14, color: '#1E4FA8', fontWeight: 'bold' }}&gt;16 / 38&lt;/Text&gt;&#10;  &lt;/Box&gt;&#10;  &lt;Box style={{ flex: 1, padding: '8px 40px 0 40px', flexDirection: 'row', gap: 26 }}&gt;&#10;    &lt;Box style={{ width: 600, justifyContent: 'center', alignItems: 'center' }}&gt;&#10;      &lt;svg width={600} height={358} viewBox='0 0 600 358'&gt;&#10;        &lt;text x='6' y='16' fill='#8B97A8' fontSize='12'&gt;The box is a promise: inside is what you build, outside is what you call&lt;/text&gt;&#10;&#10;        &lt;rect x='150' y='36' width='290' height='286' rx='6' fill='#FFFFFF' stroke='#1E4FA8' strokeWidth='2' /&gt;&#10;        &lt;text x='295' y='58' textAnchor='middle' fill='#0E3F8C' fontSize='13.5' fontWeight='bold'&gt;CampusBites&lt;/text&gt;&#10;&#10;        &lt;ellipse cx='295' cy='98' rx='110' ry='24' fill='#F0F5FC' stroke='#1E4FA8' strokeWidth='1.5' /&gt;&#10;        &lt;text x='295' y='103' textAnchor='middle' fill='#1A2230' fontSize='12'&gt;Place Order&lt;/text&gt;&#10;&#10;        &lt;ellipse cx='295' cy='158' rx='110' ry='24' fill='#F0F5FC' stroke='#1E4FA8' strokeWidth='1.5' /&gt;&#10;        &lt;text x='295' y='163' textAnchor='middle' fill='#1A2230' fontSize='12'&gt;Pay for Order&lt;/text&gt;&#10;&#10;        &lt;ellipse cx='295' cy='218' rx='110' ry='24' fill='#F0F5FC' stroke='#1E4FA8' strokeWidth='1.5' /&gt;&#10;        &lt;text x='295' y='223' textAnchor='middle' fill='#1A2230' fontSize='12'&gt;Send Notification&lt;/text&gt;&#10;&#10;        &lt;ellipse cx='295' cy='278' rx='110' ry='24' fill='#F0F5FC' stroke='#1E4FA8' strokeWidth='1.5' /&gt;&#10;        &lt;text x='295' y='283' textAnchor='middle' fill='#1A2230' fontSize='12'&gt;Track Order&lt;/text&gt;&#10;&#10;        &lt;g transform='translate(24,86)'&gt;&#10;          &lt;circle cx='16' cy='16' r='9' fill='none' stroke='#0E3F8C' strokeWidth='2' /&gt;&#10;          &lt;line x1='16' y1='25' x2='16' y2='48' stroke='#0E3F8C' strokeWidth='2' /&gt;&#10;          &lt;line x1='16' y1='33' x2='4' y2='45' stroke='#0E3F8C' strokeWidth='2' /&gt;&#10;          &lt;line x1='16' y1='33' x2='28' y2='45' stroke='#0E3F8C' strokeWidth='2' /&gt;&#10;          &lt;line x1='16' y1='48' x2='5' y2='64' stroke='#0E3F8C' strokeWidth='2' /&gt;&#10;          &lt;line x1='16' y1='48' x2='27' y2='64' stroke='#0E3F8C' strokeWidth='2' /&gt;&#10;          &lt;text x='16' y='80' textAnchor='middle' fill='#0E3F8C' fontSize='12' fontWeight='bold'&gt;Student&lt;/text&gt;&#10;        &lt;/g&gt;&#10;&#10;        &lt;g transform='translate(24,200)'&gt;&#10;          &lt;circle cx='16' cy='16' r='9' fill='none' stroke='#0E3F8C' strokeWidth='2' /&gt;&#10;          &lt;line x1='16' y1='25' x2='16' y2='48' stroke='#0E3F8C' strokeWidth='2' /&gt;&#10;          &lt;line x1='16' y1='33' x2='4' y2='45' stroke='#0E3F8C' strokeWidth='2' /&gt;&#10;          &lt;line x1='16' y1='33' x2='28' y2='45' stroke='#0E3F8C' strokeWidth='2' /&gt;&#10;          &lt;line x1='16' y1='48' x2='5' y2='64' stroke='#0E3F8C' strokeWidth='2' /&gt;&#10;          &lt;line x1='16' y1='48' x2='27' y2='64' stroke='#0E3F8C' strokeWidth='2' /&gt;&#10;          &lt;text x='16' y='80' textAnchor='middle' fill='#0E3F8C' fontSize='12' fontWeight='bold'&gt;Manager&lt;/text&gt;&#10;        &lt;/g&gt;&#10;&#10;        &lt;line x1='56' y1='152' x2='186' y2='104' stroke='#1E4FA8' strokeWidth='1.4' /&gt;&#10;        &lt;line x1='186' y1='218' x2='56' y2='256' stroke='#1E4FA8' strokeWidth='1.4' /&gt;&#10;&#10;        &lt;g transform='translate(462,86)'&gt;&#10;          &lt;rect x='0' y='0' width='120' height='46' rx='4' fill='#F7F9FC' stroke='#8B97A8' strokeWidth='1.6' /&gt;&#10;          &lt;text x='60' y='21' textAnchor='middle' fill='#4A5568' fontSize='11.5' fontWeight='bold'&gt;Payment&lt;/text&gt;&#10;          &lt;text x='60' y='37' textAnchor='middle' fill='#4A5568' fontSize='11.5' fontWeight='bold'&gt;Centre&lt;/text&gt;&#10;        &lt;/g&gt;&#10;        &lt;g transform='translate(462,186)'&gt;&#10;          &lt;rect x='0' y='0' width='120' height='46' rx='4' fill='#F7F9FC' stroke='#8B97A8' strokeWidth='1.6' /&gt;&#10;          &lt;text x='60' y='21' textAnchor='middle' fill='#4A5568' fontSize='11.5' fontWeight='bold'&gt;SMS&lt;/text&gt;&#10;          &lt;text x='60' y='37' textAnchor='middle' fill='#4A5568' fontSize='11.5' fontWeight='bold'&gt;Gateway&lt;/text&gt;&#10;        &lt;/g&gt;&#10;        &lt;g transform='translate(462,286)'&gt;&#10;          &lt;rect x='0' y='0' width='120' height='46' rx='4' fill='#F7F9FC' stroke='#8B97A8' strokeWidth='1.6' /&gt;&#10;          &lt;text x='60' y='21' textAnchor='middle' fill='#4A5568' fontSize='11.5' fontWeight='bold'&gt;Campus Card&lt;/text&gt;&#10;          &lt;text x='60' y='37' textAnchor='middle' fill='#4A5568' fontSize='11.5' fontWeight='bold'&gt;System&lt;/text&gt;&#10;        &lt;/g&gt;&#10;&#10;        &lt;line x1='440' y1='158' x2='490' y2='120' stroke='#8B97A8' strokeWidth='1.4' strokeDasharray='6 4' /&gt;&#10;        &lt;line x1='440' y1='218' x2='490' y2='206' stroke='#8B97A8' strokeWidth='1.4' strokeDasharray='6 4' /&gt;&#10;        &lt;line x1='440' y1='158' x2='490' y2='300' stroke='#8B97A8' strokeWidth='1.4' strokeDasharray='6 4' /&gt;&#10;&#10;        &lt;text x='150' y='340' fill='#1E4FA8' fontSize='11.5' fontWeight='bold'&gt;INSIDE — ours to design, ours to test&lt;/text&gt;&#10;        &lt;text x='462' y='340' fill='#8B97A8' fontSize='11.5' fontWeight='bold'&gt;OUTSIDE&lt;/text&gt;&#10;      &lt;/svg&gt;&#10;    &lt;/Box&gt;&#10;    &lt;Box style={{ flex: 1, flexDirection: 'column', justifyContent: 'center', gap: 13 }}&gt;&#10;      &lt;Box style={{ padding: '15px 17px', background: '#F0F5FC', borderRadius: 9, borderLeft: '4px solid #1E4FA8' }}&gt;&#10;        &lt;Text style={{ fontSize: 16, fontWeight: 'bold', color: '#0E3F8C' }}&gt;The box draws the contract&lt;/Text&gt;&#10;        &lt;Text style={{ fontSize: 13, color: '#4A5568', lineHeight: 1.6, marginTop: 5 }}&gt;&#10;          Everything inside the rectangle is a use case you will design, build and test. Everything outside is a thing you call, obey, or wait for.&#10;        &lt;/Text&gt;&#10;      &lt;/Box&gt;&#10;      &lt;Box style={{ padding: '15px 17px', background: '#FFFFFF', borderRadius: 9, border: '1px solid #D6DCE5' }}&gt;&#10;        &lt;Text style={{ fontSize: 16, fontWeight: 'bold', color: '#0E3F8C' }}&gt;“Send Notification” stays inside&lt;/Text&gt;&#10;        &lt;Text style={{ fontSize: 13, color: '#4A5568', lineHeight: 1.6, marginTop: 5 }}&gt;&#10;          The goal is ours even though the SMS is not. The gateway is the actor that serves us — it never becomes a use case of its own.&#10;        &lt;/Text&gt;&#10;      &lt;/Box&gt;&#10;      &lt;Box style={{ padding: '15px 17px', background: '#FDF3F3', borderRadius: 9, borderLeft: '4px solid #D9534F' }}&gt;&#10;        &lt;Text style={{ fontSize: 16, fontWeight: 'bold', color: '#D9534F' }}&gt;The usual mistake&lt;/Text&gt;&#10;        &lt;Text style={{ fontSize: 13, color: '#4A5568', lineHeight: 1.6, marginTop: 5 }}&gt;&#10;          Drawing “Process Payment” as a use case when it is really a call to the payment centre. If you cannot change how it behaves, it is not your use case.&#10;        &lt;/Text&gt;&#10;      &lt;/Box&gt;&#10;      &lt;Box style={{ padding: '12px 16px', background: '#F7F9FC', borderRadius: 8, border: '1px dashed #D6DCE5' }}&gt;&#10;        &lt;Text style={{ fontSize: 12.5, color: '#8B97A8', lineHeight: 1.55 }}&gt;&#10;          Test for the line: could we rewrite this thing from scratch if we wanted to? Yes → inside. No → outside, and it becomes an actor.&#10;        &lt;/Text&gt;&#10;      &lt;/Box&gt;&#10;    &lt;/Box&gt;&#10;  &lt;/Box&gt;&#10;  &lt;Box style={{ height: 34, padding: '0 40px', flexDirection: 'row', alignItems: 'center', justifyContent: 'space-between' }}&gt;&#10;    &lt;Text style={{ fontSize: 13, color: '#8B97A8' }}&gt;ISAD · Fall 2026 · The boundary is the first design decision you make, and the hardest to move later&lt;/Text&gt;&#10;    &lt;Text style={{ fontSize: 14, color: '#1E4FA8', fontWeight: 'bold' }}&gt;16 / 38&lt;/Text&gt;&#10;  &lt;/Box&gt;&#10;&lt;/Slide&gt;"/>
+        <p:cNvPr id="200" name=""/>
         <p:cNvGrpSpPr/>
         <p:nvPr/>
       </p:nvGrpSpPr>
@@ -7530,7 +7773,10 @@
         </p:spPr>
         <p:txBody>
           <a:bodyPr/>
-          <a:p/>
+          <a:p>
+            <a:pPr/>
+            <a:endParaRPr/>
+          </a:p>
         </p:txBody>
       </p:sp>
       <p:sp>
@@ -7554,7 +7800,10 @@
         </p:spPr>
         <p:txBody>
           <a:bodyPr/>
-          <a:p/>
+          <a:p>
+            <a:pPr/>
+            <a:endParaRPr/>
+          </a:p>
         </p:txBody>
       </p:sp>
       <p:sp>
@@ -7751,7 +8000,10 @@
         </p:spPr>
         <p:txBody>
           <a:bodyPr/>
-          <a:p/>
+          <a:p>
+            <a:pPr/>
+            <a:endParaRPr/>
+          </a:p>
         </p:txBody>
       </p:sp>
       <p:sp>
@@ -7808,7 +8060,10 @@
         </p:spPr>
         <p:txBody>
           <a:bodyPr/>
-          <a:p/>
+          <a:p>
+            <a:pPr/>
+            <a:endParaRPr/>
+          </a:p>
         </p:txBody>
       </p:sp>
       <p:sp>
@@ -7911,7 +8166,10 @@
         </p:spPr>
         <p:txBody>
           <a:bodyPr/>
-          <a:p/>
+          <a:p>
+            <a:pPr/>
+            <a:endParaRPr/>
+          </a:p>
         </p:txBody>
       </p:sp>
       <p:sp>
@@ -8009,7 +8267,10 @@
         </p:spPr>
         <p:txBody>
           <a:bodyPr/>
-          <a:p/>
+          <a:p>
+            <a:pPr/>
+            <a:endParaRPr/>
+          </a:p>
         </p:txBody>
       </p:sp>
       <p:sp>
@@ -8066,7 +8327,10 @@
         </p:spPr>
         <p:txBody>
           <a:bodyPr/>
-          <a:p/>
+          <a:p>
+            <a:pPr/>
+            <a:endParaRPr/>
+          </a:p>
         </p:txBody>
       </p:sp>
       <p:sp>
@@ -8169,7 +8433,10 @@
         </p:spPr>
         <p:txBody>
           <a:bodyPr/>
-          <a:p/>
+          <a:p>
+            <a:pPr/>
+            <a:endParaRPr/>
+          </a:p>
         </p:txBody>
       </p:sp>
       <p:sp>
@@ -8289,7 +8556,7 @@
   <p:cSld>
     <p:spTree>
       <p:nvGrpSpPr>
-        <p:cNvPr id="223" name="" descr="&lt;Slide style={{ background: '#FFFFFF', padding: 0 }}&gt;&#10;  &lt;Box style={{ height: 72, background: '#1E4FA8', padding: '0 40px', flexDirection: 'row', alignItems: 'center', justifyContent: 'space-between' }}&gt;&#10;    &lt;Text style={{ fontSize: 15, color: '#B9CDF0', letterSpacing: 1 }}&gt;ISAD · INFORMATION SYSTEMS ANALYSIS &amp;amp; DESIGN&lt;/Text&gt;&#10;    &lt;Text style={{ fontSize: 15, color: '#B9CDF0' }}&gt;W04 · THE USE CASE DIAGRAM&lt;/Text&gt;&#10;  &lt;/Box&gt;&#10;  &lt;Box style={{ padding: '14px 40px 0 40px', flexDirection: 'row', alignItems: 'center', justifyContent: 'space-between' }}&gt;&#10;    &lt;Text style={{ fontSize: 29, fontWeight: 'bold', color: '#0E3F8C' }}&gt;The Six Elements — Quick Reference&lt;/Text&gt;&#10;    &lt;Text style={{ fontSize: 14, color: '#1E4FA8', fontWeight: 'bold' }}&gt;17 / 38&lt;/Text&gt;&#10;  &lt;/Box&gt;&#10;  &lt;Box style={{ flex: 1, padding: '10px 40px 6px 40px' }}&gt;&#10;    &lt;Table&#10;      style={{ width: '100%', height: '100%' }}&#10;      defaultTextStyle={{ fontSize: 13.5, textAlign: 'left', color: '#1A2230' }}&#10;      defaultCellStyle={{&#10;        border: {&#10;          left: { width: 1, color: '#E5E7EB' },&#10;          right: { width: 1, color: '#E5E7EB' },&#10;          top: { width: 1, color: '#E5E7EB' },&#10;          bottom: { width: 1, color: '#E5E7EB' },&#10;        },&#10;      }}&#10;      cells={[&#10;        [&#10;          { text: 'Element', textStyle: { bold: true, color: '#FFFFFF' }, cellStyle: { background: { color: '#0E3F8C' } } },&#10;          { text: 'How you draw it', textStyle: { bold: true, color: '#FFFFFF' }, cellStyle: { background: { color: '#0E3F8C' } } },&#10;          { text: 'How you read it aloud', textStyle: { bold: true, color: '#FFFFFF' }, cellStyle: { background: { color: '#1E4FA8' } } },&#10;          { text: 'Mistake to avoid', textStyle: { bold: true, color: '#FFFFFF' }, cellStyle: { background: { color: '#D9534F' } } },&#10;        ],&#10;        [&#10;          { text: 'System boundary', textStyle: { bold: true, color: '#0E3F8C' }, cellStyle: { background: { color: '#F7F9FC' } } },&#10;          { text: 'A rectangle with the system name at the top', textStyle: { color: '#4A5568' }, cellStyle: { background: { color: '#F7F9FC' } } },&#10;          { text: '“Everything in this box is ours.”', textStyle: { color: '#4A5568' }, cellStyle: { background: { color: '#F7F9FC' } } },&#10;          { text: 'Leaving it out — then nobody knows what is in scope', textStyle: { color: '#4A5568' }, cellStyle: { background: { color: '#F7F9FC' } } },&#10;        ],&#10;        [&#10;          { text: 'Use case', textStyle: { bold: true, color: '#0E3F8C' } },&#10;          { text: 'An ellipse, named verb plus object', textStyle: { color: '#4A5568' } },&#10;          { text: '“Place Order — a goal that ends.”', textStyle: { color: '#4A5568' } },&#10;          { text: 'Drawing a rectangle, or naming it with a noun', textStyle: { color: '#4A5568' } },&#10;        ],&#10;        [&#10;          { text: 'Actor', textStyle: { bold: true, color: '#0E3F8C' }, cellStyle: { background: { color: '#F7F9FC' } } },&#10;          { text: 'A stick figure, or a box labelled with the system', textStyle: { color: '#4A5568' }, cellStyle: { background: { color: '#F7F9FC' } } },&#10;          { text: '“The Student wants this.”', textStyle: { color: '#4A5568' }, cellStyle: { background: { color: '#F7F9FC' } } },&#10;          { text: 'Naming a department, a person, or your own database', textStyle: { color: '#4A5568' }, cellStyle: { background: { color: '#F7F9FC' } } },&#10;        ],&#10;        [&#10;          { text: 'Association', textStyle: { bold: true, color: '#0E3F8C' } },&#10;          { text: 'A solid line, no arrowhead', textStyle: { color: '#4A5568' } },&#10;          { text: '“The actor talks to this use case.”', textStyle: { color: '#4A5568' } },&#10;          { text: 'Adding arrowheads — it is a conversation, not a flow', textStyle: { color: '#4A5568' } },&#10;        ],&#10;        [&#10;          { text: '&lt;&lt;include&gt;&gt;', textStyle: { bold: true, color: '#0E3F8C' }, cellStyle: { background: { color: '#F7F9FC' } } },&#10;          { text: 'A dashed arrow, base pointing to the included', textStyle: { color: '#4A5568' }, cellStyle: { background: { color: '#F7F9FC' } } },&#10;          { text: '“Place Order always authenticates first.”', textStyle: { color: '#4A5568' }, cellStyle: { background: { color: '#F7F9FC' } } },&#10;          { text: 'Using it for something that only sometimes happens', textStyle: { color: '#4A5568' }, cellStyle: { background: { color: '#F7F9FC' } } },&#10;        ],&#10;        [&#10;          { text: '&lt;&lt;extend&gt;&gt;', textStyle: { bold: true, color: '#0E3F8C' } },&#10;          { text: 'A dashed arrow, extra pointing back to the base', textStyle: { color: '#4A5568' } },&#10;          { text: '“Apply Coupon sometimes adds itself in.”', textStyle: { color: '#4A5568' } },&#10;          { text: 'Drawing the arrow the wrong way round', textStyle: { color: '#4A5568' } },&#10;        ],&#10;      ]}&#10;    /&gt;&#10;  &lt;/Box&gt;&#10;  &lt;Box style={{ height: 46, background: '#0E3F8C', padding: '0 40px', flexDirection: 'row', alignItems: 'center', justifyContent: 'center' }}&gt;&#10;    &lt;Text style={{ fontSize: 16, color: '#FFFFFF', fontWeight: '600' }}&gt;Six symbols is the whole notation. If your diagram needs a seventh, something is wrong with the model.&lt;/Text&gt;&#10;  &lt;/Box&gt;&#10;&lt;/Slide&gt;"/>
+        <p:cNvPr id="223" name=""/>
         <p:cNvGrpSpPr/>
         <p:nvPr/>
       </p:nvGrpSpPr>
@@ -8322,7 +8589,10 @@
         </p:spPr>
         <p:txBody>
           <a:bodyPr/>
-          <a:p/>
+          <a:p>
+            <a:pPr/>
+            <a:endParaRPr/>
+          </a:p>
         </p:txBody>
       </p:sp>
       <p:sp>
@@ -8346,7 +8616,10 @@
         </p:spPr>
         <p:txBody>
           <a:bodyPr/>
-          <a:p/>
+          <a:p>
+            <a:pPr/>
+            <a:endParaRPr/>
+          </a:p>
         </p:txBody>
       </p:sp>
       <p:sp>
@@ -9746,7 +10019,10 @@
         </p:spPr>
         <p:txBody>
           <a:bodyPr/>
-          <a:p/>
+          <a:p>
+            <a:pPr/>
+            <a:endParaRPr/>
+          </a:p>
         </p:txBody>
       </p:sp>
       <p:sp>
@@ -9794,7 +10070,7 @@
   <p:cSld>
     <p:spTree>
       <p:nvGrpSpPr>
-        <p:cNvPr id="233" name="" descr="&lt;Slide style={{ background: '#FFFFFF', padding: 0 }}&gt;&#10;  &lt;Box style={{ height: 72, background: '#1E4FA8', padding: '0 40px', flexDirection: 'row', alignItems: 'center', justifyContent: 'space-between' }}&gt;&#10;    &lt;Text style={{ fontSize: 15, color: '#B9CDF0', letterSpacing: 1 }}&gt;ISAD · INFORMATION SYSTEMS ANALYSIS &amp;amp; DESIGN&lt;/Text&gt;&#10;    &lt;Text style={{ fontSize: 15, color: '#B9CDF0' }}&gt;W04 · THE USE CASE DIAGRAM&lt;/Text&gt;&#10;  &lt;/Box&gt;&#10;  &lt;Box style={{ padding: '12px 40px 0 40px', flexDirection: 'row', alignItems: 'center', justifyContent: 'space-between' }}&gt;&#10;    &lt;Text style={{ fontSize: 29, fontWeight: 'bold', color: '#0E3F8C' }}&gt;A Worked Diagram — Place Order&lt;/Text&gt;&#10;    &lt;Text style={{ fontSize: 14, color: '#1E4FA8', fontWeight: 'bold' }}&gt;18 / 38&lt;/Text&gt;&#10;  &lt;/Box&gt;&#10;  &lt;Box style={{ flex: 1, padding: '8px 40px 0 40px', flexDirection: 'row', gap: 26 }}&gt;&#10;    &lt;Box style={{ width: 600, justifyContent: 'center', alignItems: 'center' }}&gt;&#10;      &lt;svg width={600} height={356} viewBox='0 0 600 356'&gt;&#10;        &lt;text x='6' y='16' fill='#8B97A8' fontSize='12'&gt;One goal, two actors, one include — read it before you copy it&lt;/text&gt;&#10;&#10;        &lt;rect x='168' y='36' width='300' height='280' rx='6' fill='#FFFFFF' stroke='#1E4FA8' strokeWidth='2' /&gt;&#10;        &lt;text x='318' y='58' textAnchor='middle' fill='#0E3F8C' fontSize='13.5' fontWeight='bold'&gt;CampusBites&lt;/text&gt;&#10;&#10;        &lt;ellipse cx='318' cy='108' rx='122' ry='26' fill='#F0F5FC' stroke='#1E4FA8' strokeWidth='1.8' /&gt;&#10;        &lt;text x='318' y='113' textAnchor='middle' fill='#1A2230' fontSize='13' fontWeight='bold'&gt;Place Order&lt;/text&gt;&#10;&#10;        &lt;ellipse cx='318' cy='190' rx='122' ry='26' fill='#FFFFFF' stroke='#1E4FA8' strokeWidth='1.5' /&gt;&#10;        &lt;text x='318' y='195' textAnchor='middle' fill='#1A2230' fontSize='13'&gt;Authenticate&lt;/text&gt;&#10;&#10;        &lt;ellipse cx='318' cy='262' rx='122' ry='26' fill='#FFFFFF' stroke='#1E4FA8' strokeWidth='1.5' /&gt;&#10;        &lt;text x='318' y='267' textAnchor='middle' fill='#1A2230' fontSize='13'&gt;Pay for Order&lt;/text&gt;&#10;&#10;        &lt;g transform='translate(24,84)'&gt;&#10;          &lt;circle cx='16' cy='16' r='9' fill='none' stroke='#0E3F8C' strokeWidth='2' /&gt;&#10;          &lt;line x1='16' y1='25' x2='16' y2='48' stroke='#0E3F8C' strokeWidth='2' /&gt;&#10;          &lt;line x1='16' y1='33' x2='4' y2='45' stroke='#0E3F8C' strokeWidth='2' /&gt;&#10;          &lt;line x1='16' y1='33' x2='28' y2='45' stroke='#0E3F8C' strokeWidth='2' /&gt;&#10;          &lt;line x1='16' y1='48' x2='5' y2='64' stroke='#0E3F8C' strokeWidth='2' /&gt;&#10;          &lt;line x1='16' y1='48' x2='27' y2='64' stroke='#0E3F8C' strokeWidth='2' /&gt;&#10;          &lt;text x='16' y='80' textAnchor='middle' fill='#0E3F8C' fontSize='12' fontWeight='bold'&gt;Student&lt;/text&gt;&#10;          &lt;text x='16' y='95' textAnchor='middle' fill='#8B97A8' fontSize='10'&gt;primary&lt;/text&gt;&#10;        &lt;/g&gt;&#10;&#10;        &lt;g transform='translate(492,222)'&gt;&#10;          &lt;rect x='0' y='0' width='100' height='42' rx='4' fill='#F7F9FC' stroke='#8B97A8' strokeWidth='1.6' /&gt;&#10;          &lt;text x='50' y='19' textAnchor='middle' fill='#4A5568' fontSize='11' fontWeight='bold'&gt;Payment&lt;/text&gt;&#10;          &lt;text x='50' y='34' textAnchor='middle' fill='#4A5568' fontSize='11' fontWeight='bold'&gt;Provider&lt;/text&gt;&#10;          &lt;text x='50' y='56' textAnchor='middle' fill='#8B97A8' fontSize='10'&gt;secondary&lt;/text&gt;&#10;        &lt;/g&gt;&#10;&#10;        &lt;line x1='52' y1='148' x2='200' y2='114' stroke='#1E4FA8' strokeWidth='1.6' /&gt;&#10;        &lt;line x1='52' y1='158' x2='200' y2='186' stroke='#1E4FA8' strokeWidth='1.4' /&gt;&#10;&#10;        &lt;line x1='440' y1='258' x2='494' y2='246' stroke='#8B97A8' strokeWidth='1.4' /&gt;&#10;&#10;        &lt;line x1='262' y1='126' x2='220' y2='168' stroke='#1E4FA8' strokeWidth='1.5' strokeDasharray='6 4' /&gt;&#10;        &lt;polygon points='216,171 230,168 221,158' fill='#1E4FA8' /&gt;&#10;        &lt;text x='150' y='158' fill='#1E4FA8' fontSize='10.5' fontWeight='bold'&gt;«include»&lt;/text&gt;&#10;&#10;        &lt;text x='318' y='336' textAnchor='middle' fill='#8B97A8' fontSize='11'&gt;Note: two actors touch one use case, and the dashed arrow never points at an actor.&lt;/text&gt;&#10;      &lt;/svg&gt;&#10;    &lt;/Box&gt;&#10;    &lt;Box style={{ flex: 1, flexDirection: 'column', justifyContent: 'center', gap: 12 }}&gt;&#10;      &lt;Box style={{ padding: '14px 17px', background: '#F0F5FC', borderRadius: 9, borderLeft: '4px solid #1E4FA8' }}&gt;&#10;        &lt;Text style={{ fontSize: 15.5, fontWeight: 'bold', color: '#0E3F8C' }}&gt;Why Authenticate is an include&lt;/Text&gt;&#10;        &lt;Text style={{ fontSize: 12.8, color: '#4A5568', lineHeight: 1.6, marginTop: 5 }}&gt;&#10;          Every order needs it, every time. Nobody asks for it on its own — that is the signature of an include, not a use case anyone wants.&#10;        &lt;/Text&gt;&#10;      &lt;/Box&gt;&#10;      &lt;Box style={{ padding: '14px 17px', background: '#FFFFFF', borderRadius: 9, border: '1px solid #D6DCE5' }}&gt;&#10;        &lt;Text style={{ fontSize: 15.5, fontWeight: 'bold', color: '#0E3F8C' }}&gt;Why Pay for Order is a use case&lt;/Text&gt;&#10;        &lt;Text style={{ fontSize: 12.8, color: '#4A5568', lineHeight: 1.6, marginTop: 5 }}&gt;&#10;          A student can pay a later order without placing a new one. It is a goal somebody has, so it earns its own ellipse.&#10;        &lt;/Text&gt;&#10;      &lt;/Box&gt;&#10;      &lt;Box style={{ padding: '14px 17px', background: '#FFFFFF', borderRadius: 9, border: '1px solid #D6DCE5' }}&gt;&#10;        &lt;Text style={{ fontSize: 15.5, fontWeight: 'bold', color: '#0E3F8C' }}&gt;Why the provider is an actor&lt;/Text&gt;&#10;        &lt;Text style={{ fontSize: 12.8, color: '#4A5568', lineHeight: 1.6, marginTop: 5 }}&gt;&#10;          We do not own the card network, so we cannot change how it behaves. It sits outside the box and serves us.&#10;        &lt;/Text&gt;&#10;      &lt;/Box&gt;&#10;      &lt;Box style={{ padding: '12px 16px', background: '#FDF3F3', borderRadius: 8, borderLeft: '3px solid #D9534F' }}&gt;&#10;        &lt;Text style={{ fontSize: 12.5, color: '#4A5568', lineHeight: 1.55 }}&gt;&#10;          &lt;Text style={{ fontWeight: 'bold', color: '#D9534F' }}&gt;Check the arrows. &lt;/Text&gt;&#10;          The dashed arrow leaves Place Order and arrives at Authenticate. If yours points the other way, you have described the opposite relationship.&#10;        &lt;/Text&gt;&#10;      &lt;/Box&gt;&#10;    &lt;/Box&gt;&#10;  &lt;/Box&gt;&#10;  &lt;Box style={{ height: 34, padding: '0 40px', flexDirection: 'row', alignItems: 'center', justifyContent: 'space-between' }}&gt;&#10;    &lt;Text style={{ fontSize: 13, color: '#8B97A8' }}&gt;ISAD · Fall 2026 · Read every dashed arrow out loud — the direction is where most first diagrams go wrong&lt;/Text&gt;&#10;    &lt;Text style={{ fontSize: 14, color: '#1E4FA8', fontWeight: 'bold' }}&gt;18 / 38&lt;/Text&gt;&#10;  &lt;/Box&gt;&#10;&lt;/Slide&gt;"/>
+        <p:cNvPr id="233" name=""/>
         <p:cNvGrpSpPr/>
         <p:nvPr/>
       </p:nvGrpSpPr>
@@ -9827,7 +10103,10 @@
         </p:spPr>
         <p:txBody>
           <a:bodyPr/>
-          <a:p/>
+          <a:p>
+            <a:pPr/>
+            <a:endParaRPr/>
+          </a:p>
         </p:txBody>
       </p:sp>
       <p:sp>
@@ -9851,7 +10130,10 @@
         </p:spPr>
         <p:txBody>
           <a:bodyPr/>
-          <a:p/>
+          <a:p>
+            <a:pPr/>
+            <a:endParaRPr/>
+          </a:p>
         </p:txBody>
       </p:sp>
       <p:sp>
@@ -10048,7 +10330,10 @@
         </p:spPr>
         <p:txBody>
           <a:bodyPr/>
-          <a:p/>
+          <a:p>
+            <a:pPr/>
+            <a:endParaRPr/>
+          </a:p>
         </p:txBody>
       </p:sp>
       <p:sp>
@@ -10105,7 +10390,10 @@
         </p:spPr>
         <p:txBody>
           <a:bodyPr/>
-          <a:p/>
+          <a:p>
+            <a:pPr/>
+            <a:endParaRPr/>
+          </a:p>
         </p:txBody>
       </p:sp>
       <p:sp>
@@ -10208,7 +10496,10 @@
         </p:spPr>
         <p:txBody>
           <a:bodyPr/>
-          <a:p/>
+          <a:p>
+            <a:pPr/>
+            <a:endParaRPr/>
+          </a:p>
         </p:txBody>
       </p:sp>
       <p:sp>
@@ -10311,7 +10602,10 @@
         </p:spPr>
         <p:txBody>
           <a:bodyPr/>
-          <a:p/>
+          <a:p>
+            <a:pPr/>
+            <a:endParaRPr/>
+          </a:p>
         </p:txBody>
       </p:sp>
       <p:sp>
@@ -10409,7 +10703,10 @@
         </p:spPr>
         <p:txBody>
           <a:bodyPr/>
-          <a:p/>
+          <a:p>
+            <a:pPr/>
+            <a:endParaRPr/>
+          </a:p>
         </p:txBody>
       </p:sp>
       <p:sp>
@@ -10466,7 +10763,10 @@
         </p:spPr>
         <p:txBody>
           <a:bodyPr/>
-          <a:p/>
+          <a:p>
+            <a:pPr/>
+            <a:endParaRPr/>
+          </a:p>
         </p:txBody>
       </p:sp>
       <p:sp>
@@ -10596,7 +10896,7 @@
   <p:cSld>
     <p:spTree>
       <p:nvGrpSpPr>
-        <p:cNvPr id="256" name="" descr="&lt;Slide style={{ background: '#FFFFFF', padding: 0 }}&gt;&#10;  &lt;Box style={{ height: 72, background: '#1E4FA8', padding: '0 40px', flexDirection: 'row', alignItems: 'center', justifyContent: 'space-between' }}&gt;&#10;    &lt;Text style={{ fontSize: 15, color: '#B9CDF0', letterSpacing: 1 }}&gt;ISAD · INFORMATION SYSTEMS ANALYSIS &amp;amp; DESIGN&lt;/Text&gt;&#10;    &lt;Text style={{ fontSize: 15, color: '#B9CDF0' }}&gt;W04 · THE USE CASE DIAGRAM&lt;/Text&gt;&#10;  &lt;/Box&gt;&#10;  &lt;Box style={{ padding: '14px 40px 0 40px', flexDirection: 'row', alignItems: 'center', justifyContent: 'space-between' }}&gt;&#10;    &lt;Text style={{ fontSize: 29, fontWeight: 'bold', color: '#0E3F8C' }}&gt;Three Mistakes Everyone Makes&lt;/Text&gt;&#10;    &lt;Text style={{ fontSize: 14, color: '#1E4FA8', fontWeight: 'bold' }}&gt;19 / 38&lt;/Text&gt;&#10;  &lt;/Box&gt;&#10;  &lt;Box style={{ flex: 1, padding: '14px 60px 0 60px', flexDirection: 'column', justifyContent: 'center', alignItems: 'center' }}&gt;&#10;    &lt;Box style={{ width: 960, padding: '20px 30px', background: '#F0F5FC', borderRadius: 10, borderLeft: '6px solid #D9534F', marginBottom: 20 }}&gt;&#10;      &lt;Text style={{ fontSize: 23, color: '#0E3F8C', fontWeight: 'bold', lineHeight: 1.4, textAlign: 'center' }}&gt;&#10;        All three come from the same habit: describing what the system does&#10;        &lt;br /&gt;&#10;        instead of what the actor gets.&#10;      &lt;/Text&gt;&#10;    &lt;/Box&gt;&#10;    &lt;Box style={{ width: 960, flexDirection: 'row', gap: 18 }}&gt;&#10;      &lt;Box style={{ flex: 1, padding: '20px 18px', background: '#FFFFFF', borderRadius: 10, border: '1px solid #D6DCE5' }}&gt;&#10;        &lt;Box style={{ flexDirection: 'row', alignItems: 'center', gap: 8, marginBottom: 8 }}&gt;&#10;          &lt;FAIcon name='sitemap' style={{ fill: '#D9534F', width: 20, height: 20 }} /&gt;&#10;          &lt;Text style={{ fontSize: 16, fontWeight: 'bold', color: '#D9534F' }}&gt;01 · Functional decomposition&lt;/Text&gt;&#10;        &lt;/Box&gt;&#10;        &lt;Box style={{ padding: '10px 12px', background: '#FDF3F3', borderRadius: 6, marginBottom: 8 }}&gt;&#10;          &lt;Text style={{ fontSize: 12.5, color: '#4A5568', lineHeight: 1.5 }}&gt;Enter Address → Choose Restaurant → Add Item → Confirm → Pay&lt;/Text&gt;&#10;        &lt;/Box&gt;&#10;        &lt;Text style={{ fontSize: 12.5, color: '#4A5568', lineHeight: 1.6 }}&gt;&#10;          Five “use cases” that are really five steps of one. The student has exactly one goal: get lunch. Everything else is a line inside the scenario — Week 05.&#10;        &lt;/Text&gt;&#10;      &lt;/Box&gt;&#10;      &lt;Box style={{ flex: 1, padding: '20px 18px', background: '#FFFFFF', borderRadius: 10, border: '1px solid #D6DCE5' }}&gt;&#10;        &lt;Box style={{ flexDirection: 'row', alignItems: 'center', gap: 8, marginBottom: 8 }}&gt;&#10;          &lt;FAIcon name='cubes' style={{ fill: '#D9534F', width: 20, height: 20 }} /&gt;&#10;          &lt;Text style={{ fontSize: 16, fontWeight: 'bold', color: '#D9534F' }}&gt;02 · CRUD as use cases&lt;/Text&gt;&#10;        &lt;/Box&gt;&#10;        &lt;Box style={{ padding: '10px 12px', background: '#FDF3F3', borderRadius: 6, marginBottom: 8 }}&gt;&#10;          &lt;Text style={{ fontSize: 12.5, color: '#4A5568', lineHeight: 1.5 }}&gt;Create Order · Read Order · Update Order · Delete Order&lt;/Text&gt;&#10;        &lt;/Box&gt;&#10;        &lt;Text style={{ fontSize: 12.5, color: '#4A5568', lineHeight: 1.6 }}&gt;&#10;          You have modelled a table. Ask who wakes up wanting this: nobody wants to “update an order”. They want to change the address, or cancel it.&#10;        &lt;/Text&gt;&#10;      &lt;/Box&gt;&#10;      &lt;Box style={{ flex: 1, padding: '20px 18px', background: '#FFFFFF', borderRadius: 10, border: '1px solid #D6DCE5' }}&gt;&#10;        &lt;Box style={{ flexDirection: 'row', alignItems: 'center', gap: 8, marginBottom: 8 }}&gt;&#10;          &lt;FAIcon name='plug' style={{ fill: '#D9534F', width: 20, height: 20 }} /&gt;&#10;          &lt;Text style={{ fontSize: 16, fontWeight: 'bold', color: '#D9534F' }}&gt;03 · External systems inside&lt;/Text&gt;&#10;        &lt;/Box&gt;&#10;        &lt;Box style={{ padding: '10px 12px', background: '#FDF3F3', borderRadius: 6, marginBottom: 8 }}&gt;&#10;          &lt;Text style={{ fontSize: 12.5, color: '#4A5568', lineHeight: 1.5 }}&gt;Process Payment · Send SMS · Charge Campus Card&lt;/Text&gt;&#10;        &lt;/Box&gt;&#10;        &lt;Text style={{ fontSize: 12.5, color: '#4A5568', lineHeight: 1.6 }}&gt;&#10;          If you cannot change how it behaves, it is not your use case. Those three are actors outside the box that serve you.&#10;        &lt;/Text&gt;&#10;      &lt;/Box&gt;&#10;    &lt;/Box&gt;&#10;  &lt;/Box&gt;&#10;  &lt;Box style={{ height: 46, background: '#0E3F8C', padding: '0 40px', flexDirection: 'row', alignItems: 'center', justifyContent: 'center' }}&gt;&#10;    &lt;Text style={{ fontSize: 16, color: '#FFFFFF', fontWeight: '600' }}&gt;Count your ellipses. Six to twelve is a healthy diagram; forty means you have modelled the menu, not the goals.&lt;/Text&gt;&#10;  &lt;/Box&gt;&#10;&lt;/Slide&gt;"/>
+        <p:cNvPr id="256" name=""/>
         <p:cNvGrpSpPr/>
         <p:nvPr/>
       </p:nvGrpSpPr>
@@ -10629,7 +10929,10 @@
         </p:spPr>
         <p:txBody>
           <a:bodyPr/>
-          <a:p/>
+          <a:p>
+            <a:pPr/>
+            <a:endParaRPr/>
+          </a:p>
         </p:txBody>
       </p:sp>
       <p:sp>
@@ -10653,7 +10956,10 @@
         </p:spPr>
         <p:txBody>
           <a:bodyPr/>
-          <a:p/>
+          <a:p>
+            <a:pPr/>
+            <a:endParaRPr/>
+          </a:p>
         </p:txBody>
       </p:sp>
       <p:sp>
@@ -10819,7 +11125,10 @@
         </p:spPr>
         <p:txBody>
           <a:bodyPr/>
-          <a:p/>
+          <a:p>
+            <a:pPr/>
+            <a:endParaRPr/>
+          </a:p>
         </p:txBody>
       </p:sp>
       <p:sp>
@@ -10876,7 +11185,10 @@
         </p:spPr>
         <p:txBody>
           <a:bodyPr/>
-          <a:p/>
+          <a:p>
+            <a:pPr/>
+            <a:endParaRPr/>
+          </a:p>
         </p:txBody>
       </p:sp>
       <p:sp>
@@ -10960,7 +11272,10 @@
         </p:spPr>
         <p:txBody>
           <a:bodyPr/>
-          <a:p/>
+          <a:p>
+            <a:pPr/>
+            <a:endParaRPr/>
+          </a:p>
         </p:txBody>
       </p:sp>
       <p:pic>
@@ -11052,7 +11367,10 @@
         </p:spPr>
         <p:txBody>
           <a:bodyPr/>
-          <a:p/>
+          <a:p>
+            <a:pPr/>
+            <a:endParaRPr/>
+          </a:p>
         </p:txBody>
       </p:sp>
       <p:sp>
@@ -11157,7 +11475,10 @@
         </p:spPr>
         <p:txBody>
           <a:bodyPr/>
-          <a:p/>
+          <a:p>
+            <a:pPr/>
+            <a:endParaRPr/>
+          </a:p>
         </p:txBody>
       </p:sp>
       <p:pic>
@@ -11249,7 +11570,10 @@
         </p:spPr>
         <p:txBody>
           <a:bodyPr/>
-          <a:p/>
+          <a:p>
+            <a:pPr/>
+            <a:endParaRPr/>
+          </a:p>
         </p:txBody>
       </p:sp>
       <p:sp>
@@ -11354,7 +11678,10 @@
         </p:spPr>
         <p:txBody>
           <a:bodyPr/>
-          <a:p/>
+          <a:p>
+            <a:pPr/>
+            <a:endParaRPr/>
+          </a:p>
         </p:txBody>
       </p:sp>
       <p:pic>
@@ -11446,7 +11773,10 @@
         </p:spPr>
         <p:txBody>
           <a:bodyPr/>
-          <a:p/>
+          <a:p>
+            <a:pPr/>
+            <a:endParaRPr/>
+          </a:p>
         </p:txBody>
       </p:sp>
       <p:sp>
@@ -11544,7 +11874,10 @@
         </p:spPr>
         <p:txBody>
           <a:bodyPr/>
-          <a:p/>
+          <a:p>
+            <a:pPr/>
+            <a:endParaRPr/>
+          </a:p>
         </p:txBody>
       </p:sp>
       <p:sp>
@@ -11592,7 +11925,7 @@
   <p:cSld>
     <p:spTree>
       <p:nvGrpSpPr>
-        <p:cNvPr id="286" name="" descr="&lt;Slide style={{ background: '#FFFFFF', padding: 0 }}&gt;&#10;  &lt;Box style={{ flexDirection: 'row', height: '100%' }}&gt;&#10;    &lt;Box style={{ width: 320, background: '#0E3F8C', padding: '60px 44px', flexDirection: 'column', justifyContent: 'space-between' }}&gt;&#10;      &lt;Box&gt;&#10;        &lt;Box style={{ width: 40, height: 4, background: '#FFC107', marginBottom: 24 }} /&gt;&#10;        &lt;Text style={{ fontSize: 46, fontWeight: 'bold', color: '#FFFFFF', fontFamily: 'Georgia, serif', lineHeight: 1.15 }}&gt;Contents&lt;/Text&gt;&#10;        &lt;Text style={{ fontSize: 16, color: '#7FA2D6', marginTop: 18, letterSpacing: 1 }}&gt;WEEK 04 · ROADMAP&lt;/Text&gt;&#10;      &lt;/Box&gt;&#10;      &lt;Text style={{ fontSize: 15, color: '#5B84C4', lineHeight: 1.5 }}&gt;Requirements&lt;br /&gt;&amp;amp; Use Case Modeling&lt;/Text&gt;&#10;    &lt;/Box&gt;&#10;    &lt;Box style={{ flex: 1, padding: '50px 56px', flexDirection: 'column', gap: 15 }}&gt;&#10;      {[&#10;        { n: '01', t: 'Requirements, Briefly', p: '03' },&#10;        { n: '02', t: 'Actors &amp;amp; Goals', p: '08' },&#10;        { n: '03', t: 'The Use Case Diagram', p: '14' },&#10;        { n: '04', t: 'Include vs. Extend', p: '20' },&#10;        { n: '05', t: 'Finding Use Cases', p: '24' },&#10;        { n: '06', t: 'Lab — Exercise 4.1, 4.2 &amp;amp; M1', p: '30' },&#10;      ].map((item) =&gt; (&#10;        &lt;Box key={item.n} style={{ flexDirection: 'row', alignItems: 'center', gap: 20, padding: '14px 20px', background: '#F7F9FC', borderRadius: 10, border: '1px solid #E5E7EB' }}&gt;&#10;          &lt;Box style={{ width: 52, height: 52, borderRadius: 8, background: '#1E4FA8', justifyContent: 'center', alignItems: 'center' }}&gt;&#10;            &lt;Text style={{ fontSize: 22, fontWeight: 'bold', color: '#FFFFFF' }}&gt;{item.n}&lt;/Text&gt;&#10;          &lt;/Box&gt;&#10;          &lt;Text style={{ flex: 1, fontSize: 20, color: '#1A2230', fontWeight: '600' }}&gt;{item.t}&lt;/Text&gt;&#10;          &lt;Text style={{ fontSize: 20, color: '#8B97A8', fontWeight: 'bold' }}&gt;{item.p}&lt;/Text&gt;&#10;        &lt;/Box&gt;&#10;      ))}&#10;    &lt;/Box&gt;&#10;  &lt;/Box&gt;&#10;&lt;/Slide&gt;"/>
+        <p:cNvPr id="286" name="" descr="&lt;Slide style={{ background: '#FFFFFF', padding: 0 }}&gt;&#10;  &lt;Box style={{ flexDirection: 'row', height: '100%' }}&gt;&#10;    &lt;Box style={{ width: 320, background: '#0E3F8C', padding: '60px 44px', flexDirection: 'column', justifyContent: 'space-between' }}&gt;&#10;      &lt;Box&gt;&#10;        &lt;Box style={{ width: 40, height: 4, background: '#FFC107', marginBottom: 24 }} /&gt;&#10;        &lt;Text style={{ fontSize: 46, fontWeight: 'bold', color: '#FFFFFF', fontFamily: 'Georgia, serif', lineHeight: 1.15 }}&gt;Contents&lt;/Text&gt;&#10;        &lt;Text style={{ fontSize: 16, color: '#7FA2D6', marginTop: 18, letterSpacing: 1 }}&gt;WEEK 04 · ROADMAP&lt;/Text&gt;&#10;      &lt;/Box&gt;&#10;      &lt;Text style={{ fontSize: 15, color: '#5B84C4', lineHeight: 1.5 }}&gt;Requirements&lt;br /&gt;&amp;amp; Use Case Modeling&lt;/Text&gt;&#10;    &lt;/Box&gt;&#10;    &lt;Box style={{ flex: 1, padding: '50px 56px', flexDirection: 'column', gap: 15 }}&gt;&#10;      {[&#10;        { n: '01', t: 'Requirements, Briefly', p: '03' },&#10;        { n: '02', t: 'Actors &amp; Goals', p: '08' },&#10;        { n: '03', t: 'The Use Case Diagram', p: '14' },&#10;        { n: '04', t: 'Include vs. Extend', p: '20' },&#10;        { n: '05', t: 'Finding Use Cases', p: '24' },&#10;        { n: '06', t: 'Lab — Exercise 4.1, 4.2 &amp; M1', p: '30' },&#10;      ].map((item) =&gt; (&#10;        &lt;Box key={item.n} style={{ flexDirection: 'row', alignItems: 'center', gap: 20, padding: '14px 20px', background: '#F7F9FC', borderRadius: 10, border: '1px solid #E5E7EB' }}&gt;&#10;          &lt;Box style={{ width: 52, height: 52, borderRadius: 8, background: '#1E4FA8', justifyContent: 'center', alignItems: 'center' }}&gt;&#10;            &lt;Text style={{ fontSize: 22, fontWeight: 'bold', color: '#FFFFFF' }}&gt;{item.n}&lt;/Text&gt;&#10;          &lt;/Box&gt;&#10;          &lt;Text style={{ flex: 1, fontSize: 20, color: '#1A2230', fontWeight: '600' }}&gt;{item.t}&lt;/Text&gt;&#10;          &lt;Text style={{ fontSize: 20, color: '#8B97A8', fontWeight: 'bold' }}&gt;{item.p}&lt;/Text&gt;&#10;        &lt;/Box&gt;&#10;      ))}&#10;    &lt;/Box&gt;&#10;  &lt;/Box&gt;&#10;&lt;/Slide&gt;&#10;"/>
         <p:cNvGrpSpPr/>
         <p:nvPr/>
       </p:nvGrpSpPr>
@@ -12082,7 +12415,7 @@
                 <a:latin typeface="Microsoft YaHei"/>
                 <a:ea typeface="Microsoft YaHei"/>
               </a:rPr>
-              <a:t>Actors &amp;amp; Goals</a:t>
+              <a:t>Actors &amp; Goals</a:t>
             </a:r>
             <a:endParaRPr/>
           </a:p>
@@ -12730,7 +13063,7 @@
                 <a:latin typeface="Microsoft YaHei"/>
                 <a:ea typeface="Microsoft YaHei"/>
               </a:rPr>
-              <a:t>Lab — Exercise 4.1, 4.2 &amp;amp; M1</a:t>
+              <a:t>Lab — Exercise 4.1, 4.2 &amp; M1</a:t>
             </a:r>
             <a:endParaRPr/>
           </a:p>
@@ -12781,7 +13114,7 @@
   <p:cSld>
     <p:spTree>
       <p:nvGrpSpPr>
-        <p:cNvPr id="323" name="" descr="&lt;Slide style={{ background: '#0E3F8C', padding: 0 }}&gt;&#10;  &lt;Box style={{ flexDirection: 'row', height: '100%', position: 'relative' }}&gt;&#10;    &lt;Box style={{ position: 'absolute', top: 0, left: 0, right: 0, height: 8, background: '#1E4FA8' }} /&gt;&#10;    &lt;Box style={{ width: 300, justifyContent: 'center', alignItems: 'center', borderRight: '1px solid #2B5793' }}&gt;&#10;      &lt;Text style={{ fontSize: 220, fontWeight: 'bold', color: '#3D7BD9', fontFamily: 'Georgia, serif', lineHeight: 1 }}&gt;04&lt;/Text&gt;&#10;    &lt;/Box&gt;&#10;    &lt;Box style={{ flex: 1, padding: '70px 64px', flexDirection: 'column', justifyContent: 'center' }}&gt;&#10;      &lt;Text style={{ fontSize: 15, color: '#7FA2D6', letterSpacing: 2, marginBottom: 18 }}&gt;PART 1 · LECTURE&lt;/Text&gt;&#10;      &lt;Text style={{ fontSize: 46, fontWeight: 'bold', color: '#FFFFFF', lineHeight: 1.18 }}&gt;Include&lt;br /&gt;vs. Extend&lt;/Text&gt;&#10;      &lt;Box style={{ width: 64, height: 4, background: '#FFC107', marginTop: 26, marginBottom: 26 }} /&gt;&#10;      &lt;Box style={{ flexDirection: 'column', gap: 12 }}&gt;&#10;        {[&#10;          'include: always happens, the base cannot finish without it',&#10;          'extend: may happen, the base is complete either way',&#10;          'The arrow direction is the part everybody gets wrong',&#10;        ].map((t) =&gt; (&#10;          &lt;Box key={t} style={{ flexDirection: 'row', alignItems: 'center', gap: 12 }}&gt;&#10;            &lt;Box style={{ width: 8, height: 8, borderRadius: 4, background: '#3D7BD9' }} /&gt;&#10;            &lt;Text style={{ fontSize: 20, color: '#C5D4EA' }}&gt;{t}&lt;/Text&gt;&#10;          &lt;/Box&gt;&#10;        ))}&#10;      &lt;/Box&gt;&#10;    &lt;/Box&gt;&#10;  &lt;/Box&gt;&#10;&lt;/Slide&gt;"/>
+        <p:cNvPr id="323" name=""/>
         <p:cNvGrpSpPr/>
         <p:nvPr/>
       </p:nvGrpSpPr>
@@ -12814,7 +13147,10 @@
         </p:spPr>
         <p:txBody>
           <a:bodyPr/>
-          <a:p/>
+          <a:p>
+            <a:pPr/>
+            <a:endParaRPr/>
+          </a:p>
         </p:txBody>
       </p:sp>
       <p:sp>
@@ -12854,7 +13190,10 @@
         </p:spPr>
         <p:txBody>
           <a:bodyPr/>
-          <a:p/>
+          <a:p>
+            <a:pPr/>
+            <a:endParaRPr/>
+          </a:p>
         </p:txBody>
       </p:sp>
       <p:sp>
@@ -13001,7 +13340,10 @@
         </p:spPr>
         <p:txBody>
           <a:bodyPr/>
-          <a:p/>
+          <a:p>
+            <a:pPr/>
+            <a:endParaRPr/>
+          </a:p>
         </p:txBody>
       </p:sp>
       <p:sp>
@@ -13027,7 +13369,10 @@
         </p:spPr>
         <p:txBody>
           <a:bodyPr/>
-          <a:p/>
+          <a:p>
+            <a:pPr/>
+            <a:endParaRPr/>
+          </a:p>
         </p:txBody>
       </p:sp>
       <p:sp>
@@ -13088,7 +13433,10 @@
         </p:spPr>
         <p:txBody>
           <a:bodyPr/>
-          <a:p/>
+          <a:p>
+            <a:pPr/>
+            <a:endParaRPr/>
+          </a:p>
         </p:txBody>
       </p:sp>
       <p:sp>
@@ -13149,7 +13497,10 @@
         </p:spPr>
         <p:txBody>
           <a:bodyPr/>
-          <a:p/>
+          <a:p>
+            <a:pPr/>
+            <a:endParaRPr/>
+          </a:p>
         </p:txBody>
       </p:sp>
       <p:sp>
@@ -13208,7 +13559,10 @@
         </p:spPr>
         <p:txBody>
           <a:bodyPr/>
-          <a:p/>
+          <a:p>
+            <a:pPr/>
+            <a:endParaRPr/>
+          </a:p>
         </p:txBody>
       </p:sp>
     </p:spTree>
@@ -13221,7 +13575,7 @@
   <p:cSld>
     <p:spTree>
       <p:nvGrpSpPr>
-        <p:cNvPr id="337" name="" descr="&lt;Slide style={{ background: '#FFFFFF', padding: 0 }}&gt;&#10;  &lt;Box style={{ height: 72, background: '#1E4FA8', padding: '0 40px', flexDirection: 'row', alignItems: 'center', justifyContent: 'space-between' }}&gt;&#10;    &lt;Text style={{ fontSize: 15, color: '#B9CDF0', letterSpacing: 1 }}&gt;ISAD · INFORMATION SYSTEMS ANALYSIS &amp;amp; DESIGN&lt;/Text&gt;&#10;    &lt;Text style={{ fontSize: 15, color: '#B9CDF0' }}&gt;W04 · INCLUDE &amp;amp; EXTEND&lt;/Text&gt;&#10;  &lt;/Box&gt;&#10;  &lt;Box style={{ padding: '12px 40px 0 40px', flexDirection: 'row', alignItems: 'center', justifyContent: 'space-between' }}&gt;&#10;    &lt;Text style={{ fontSize: 29, fontWeight: 'bold', color: '#0E3F8C' }}&gt;&amp;lt;&amp;lt;include&amp;gt;&amp;gt; — Always Happens&lt;/Text&gt;&#10;    &lt;Text style={{ fontSize: 14, color: '#1E4FA8', fontWeight: 'bold' }}&gt;21 / 38&lt;/Text&gt;&#10;  &lt;/Box&gt;&#10;  &lt;Box style={{ flex: 1, padding: '8px 40px 0 40px', flexDirection: 'row', gap: 26 }}&gt;&#10;    &lt;Box style={{ width: 590, justifyContent: 'center', alignItems: 'center' }}&gt;&#10;      &lt;svg width={590} height={352} viewBox='0 0 590 352'&gt;&#10;        &lt;text x='6' y='16' fill='#8B97A8' fontSize='12'&gt;The base use case reaches out and pulls the other one in — every single time&lt;/text&gt;&#10;&#10;        &lt;rect x='150' y='40' width='320' height='250' rx='6' fill='#FFFFFF' stroke='#1E4FA8' strokeWidth='2' /&gt;&#10;        &lt;text x='310' y='62' textAnchor='middle' fill='#0E3F8C' fontSize='13' fontWeight='bold'&gt;CampusBites&lt;/text&gt;&#10;&#10;        &lt;ellipse cx='310' cy='112' rx='126' ry='27' fill='#F0F5FC' stroke='#1E4FA8' strokeWidth='1.8' /&gt;&#10;        &lt;text x='310' y='117' textAnchor='middle' fill='#1A2230' fontSize='13' fontWeight='bold'&gt;Place Order&lt;/text&gt;&#10;&#10;        &lt;ellipse cx='310' cy='214' rx='126' ry='27' fill='#FFFFFF' stroke='#1E4FA8' strokeWidth='1.5' /&gt;&#10;        &lt;text x='310' y='219' textAnchor='middle' fill='#1A2230' fontSize='13'&gt;Authenticate&lt;/text&gt;&#10;&#10;        &lt;g transform='translate(24,86)'&gt;&#10;          &lt;circle cx='16' cy='16' r='9' fill='none' stroke='#0E3F8C' strokeWidth='2' /&gt;&#10;          &lt;line x1='16' y1='25' x2='16' y2='48' stroke='#0E3F8C' strokeWidth='2' /&gt;&#10;          &lt;line x1='16' y1='33' x2='4' y2='45' stroke='#0E3F8C' strokeWidth='2' /&gt;&#10;          &lt;line x1='16' y1='33' x2='28' y2='45' stroke='#0E3F8C' strokeWidth='2' /&gt;&#10;          &lt;line x1='16' y1='48' x2='5' y2='64' stroke='#0E3F8C' strokeWidth='2' /&gt;&#10;          &lt;line x1='16' y1='48' x2='27' y2='64' stroke='#0E3F8C' strokeWidth='2' /&gt;&#10;          &lt;text x='16' y='80' textAnchor='middle' fill='#0E3F8C' fontSize='12' fontWeight='bold'&gt;Student&lt;/text&gt;&#10;        &lt;/g&gt;&#10;&#10;        &lt;line x1='52' y1='152' x2='188' y2='120' stroke='#1E4FA8' strokeWidth='1.6' /&gt;&#10;&#10;        &lt;line x1='256' y1='130' x2='214' y2='188' stroke='#1E4FA8' strokeWidth='2' strokeDasharray='7 4' /&gt;&#10;        &lt;polygon points='210,192 224,187 213,178' fill='#1E4FA8' /&gt;&#10;        &lt;text x='132' y='170' fill='#1E4FA8' fontSize='11.5' fontWeight='bold'&gt;«include»&lt;/text&gt;&#10;        &lt;text x='132' y='186' fill='#8B97A8' fontSize='10'&gt;arrow leaves the base&lt;/text&gt;&#10;&#10;        &lt;rect x='150' y='304' width='320' height='38' rx='6' fill='#F0F5FC' stroke='#1E4FA8' strokeWidth='1' /&gt;&#10;        &lt;text x='310' y='328' textAnchor='middle' fill='#0E3F8C' fontSize='12.5' fontWeight='bold'&gt;No authentication, no order — the base is incomplete without it&lt;/text&gt;&#10;      &lt;/svg&gt;&#10;    &lt;/Box&gt;&#10;    &lt;Box style={{ flex: 1, flexDirection: 'column', justifyContent: 'center', gap: 12 }}&gt;&#10;      &lt;Box style={{ padding: '15px 17px', background: '#F0F5FC', borderRadius: 9, borderLeft: '4px solid #1E4FA8' }}&gt;&#10;        &lt;Text style={{ fontSize: 16, fontWeight: 'bold', color: '#0E3F8C' }}&gt;The test&lt;/Text&gt;&#10;        &lt;Text style={{ fontSize: 13, color: '#4A5568', lineHeight: 1.6, marginTop: 5 }}&gt;&#10;          Delete the included use case from your head. Can the base still reach its goal? If the answer is no, it is an include.&#10;        &lt;/Text&gt;&#10;      &lt;/Box&gt;&#10;      &lt;Box style={{ padding: '15px 17px', background: '#FFFFFF', borderRadius: 9, border: '1px solid #D6DCE5' }}&gt;&#10;        &lt;Text style={{ fontSize: 16, fontWeight: 'bold', color: '#0E3F8C' }}&gt;It is about reuse, not options&lt;/Text&gt;&#10;        &lt;Text style={{ fontSize: 13, color: '#4A5568', lineHeight: 1.6, marginTop: 5 }}&gt;&#10;          You draw it once because three use cases all need it, and you refuse to write “authenticate the user” three times. That is the whole reason.&#10;        &lt;/Text&gt;&#10;      &lt;/Box&gt;&#10;      &lt;Box style={{ padding: '15px 17px', background: '#FDF3F3', borderRadius: 9, borderLeft: '4px solid #D9534F' }}&gt;&#10;        &lt;Text style={{ fontSize: 16, fontWeight: 'bold', color: '#D9534F' }}&gt;Common misuse&lt;/Text&gt;&#10;        &lt;Text style={{ fontSize: 13, color: '#4A5568', lineHeight: 1.6, marginTop: 5 }}&gt;&#10;          Using include to break one use case into steps. Steps belong in the scenario text next week, not in ellipses.&#10;        &lt;/Text&gt;&#10;      &lt;/Box&gt;&#10;      &lt;Box style={{ padding: '12px 16px', background: '#F7F9FC', borderRadius: 8, border: '1px dashed #D6DCE5' }}&gt;&#10;        &lt;Text style={{ fontSize: 12.5, color: '#8B97A8', lineHeight: 1.55 }}&gt;&#10;          Memory hook: &lt;Text style={{ fontWeight: 'bold', color: '#0E3F8C' }}&gt;in&lt;/Text&gt;clude = &lt;Text style={{ fontWeight: 'bold', color: '#0E3F8C' }}&gt;in&lt;/Text&gt;evitable.&#10;        &lt;/Text&gt;&#10;      &lt;/Box&gt;&#10;    &lt;/Box&gt;&#10;  &lt;/Box&gt;&#10;  &lt;Box style={{ height: 34, padding: '0 40px', flexDirection: 'row', alignItems: 'center', justifyContent: 'space-between' }}&gt;&#10;    &lt;Text style={{ fontSize: 13, color: '#8B97A8' }}&gt;ISAD · Fall 2026 · The base owns the arrow: it points at what it needs&lt;/Text&gt;&#10;    &lt;Text style={{ fontSize: 14, color: '#1E4FA8', fontWeight: 'bold' }}&gt;21 / 38&lt;/Text&gt;&#10;  &lt;/Box&gt;&#10;&lt;/Slide&gt;"/>
+        <p:cNvPr id="337" name=""/>
         <p:cNvGrpSpPr/>
         <p:nvPr/>
       </p:nvGrpSpPr>
@@ -13254,7 +13608,10 @@
         </p:spPr>
         <p:txBody>
           <a:bodyPr/>
-          <a:p/>
+          <a:p>
+            <a:pPr/>
+            <a:endParaRPr/>
+          </a:p>
         </p:txBody>
       </p:sp>
       <p:sp>
@@ -13278,7 +13635,10 @@
         </p:spPr>
         <p:txBody>
           <a:bodyPr/>
-          <a:p/>
+          <a:p>
+            <a:pPr/>
+            <a:endParaRPr/>
+          </a:p>
         </p:txBody>
       </p:sp>
       <p:sp>
@@ -13475,7 +13835,10 @@
         </p:spPr>
         <p:txBody>
           <a:bodyPr/>
-          <a:p/>
+          <a:p>
+            <a:pPr/>
+            <a:endParaRPr/>
+          </a:p>
         </p:txBody>
       </p:sp>
       <p:sp>
@@ -13532,7 +13895,10 @@
         </p:spPr>
         <p:txBody>
           <a:bodyPr/>
-          <a:p/>
+          <a:p>
+            <a:pPr/>
+            <a:endParaRPr/>
+          </a:p>
         </p:txBody>
       </p:sp>
       <p:sp>
@@ -13635,7 +14001,10 @@
         </p:spPr>
         <p:txBody>
           <a:bodyPr/>
-          <a:p/>
+          <a:p>
+            <a:pPr/>
+            <a:endParaRPr/>
+          </a:p>
         </p:txBody>
       </p:sp>
       <p:sp>
@@ -13733,7 +14102,10 @@
         </p:spPr>
         <p:txBody>
           <a:bodyPr/>
-          <a:p/>
+          <a:p>
+            <a:pPr/>
+            <a:endParaRPr/>
+          </a:p>
         </p:txBody>
       </p:sp>
       <p:sp>
@@ -13790,7 +14162,10 @@
         </p:spPr>
         <p:txBody>
           <a:bodyPr/>
-          <a:p/>
+          <a:p>
+            <a:pPr/>
+            <a:endParaRPr/>
+          </a:p>
         </p:txBody>
       </p:sp>
       <p:sp>
@@ -13893,7 +14268,10 @@
         </p:spPr>
         <p:txBody>
           <a:bodyPr/>
-          <a:p/>
+          <a:p>
+            <a:pPr/>
+            <a:endParaRPr/>
+          </a:p>
         </p:txBody>
       </p:sp>
       <p:sp>
@@ -14051,7 +14429,7 @@
   <p:cSld>
     <p:spTree>
       <p:nvGrpSpPr>
-        <p:cNvPr id="360" name="" descr="&lt;Slide style={{ background: '#FFFFFF', padding: 0 }}&gt;&#10;  &lt;Box style={{ height: 72, background: '#1E4FA8', padding: '0 40px', flexDirection: 'row', alignItems: 'center', justifyContent: 'space-between' }}&gt;&#10;    &lt;Text style={{ fontSize: 15, color: '#B9CDF0', letterSpacing: 1 }}&gt;ISAD · INFORMATION SYSTEMS ANALYSIS &amp;amp; DESIGN&lt;/Text&gt;&#10;    &lt;Text style={{ fontSize: 15, color: '#B9CDF0' }}&gt;W04 · INCLUDE &amp;amp; EXTEND&lt;/Text&gt;&#10;  &lt;/Box&gt;&#10;  &lt;Box style={{ padding: '12px 40px 0 40px', flexDirection: 'row', alignItems: 'center', justifyContent: 'space-between' }}&gt;&#10;    &lt;Text style={{ fontSize: 29, fontWeight: 'bold', color: '#0E3F8C' }}&gt;&amp;lt;&amp;lt;extend&amp;gt;&amp;gt; — Conditionally Happens&lt;/Text&gt;&#10;    &lt;Text style={{ fontSize: 14, color: '#1E4FA8', fontWeight: 'bold' }}&gt;22 / 38&lt;/Text&gt;&#10;  &lt;/Box&gt;&#10;  &lt;Box style={{ flex: 1, padding: '8px 40px 0 40px', flexDirection: 'row', gap: 26 }}&gt;&#10;    &lt;Box style={{ width: 590, justifyContent: 'center', alignItems: 'center' }}&gt;&#10;      &lt;svg width={590} height={352} viewBox='0 0 590 352'&gt;&#10;        &lt;text x='6' y='16' fill='#8B97A8' fontSize='12'&gt;The extra use case points BACK at the base — this is the direction people reverse&lt;/text&gt;&#10;&#10;        &lt;rect x='150' y='40' width='320' height='250' rx='6' fill='#FFFFFF' stroke='#1E4FA8' strokeWidth='2' /&gt;&#10;        &lt;text x='310' y='62' textAnchor='middle' fill='#0E3F8C' fontSize='13' fontWeight='bold'&gt;CampusBites&lt;/text&gt;&#10;&#10;        &lt;ellipse cx='310' cy='112' rx='126' ry='27' fill='#F0F5FC' stroke='#1E4FA8' strokeWidth='1.8' /&gt;&#10;        &lt;text x='310' y='117' textAnchor='middle' fill='#1A2230' fontSize='13' fontWeight='bold'&gt;Place Order&lt;/text&gt;&#10;&#10;        &lt;ellipse cx='310' cy='214' rx='126' ry='27' fill='#FFFFFF' stroke='#3D7BD9' strokeWidth='1.6' /&gt;&#10;        &lt;text x='310' y='219' textAnchor='middle' fill='#1A2230' fontSize='13'&gt;Apply Coupon&lt;/text&gt;&#10;&#10;        &lt;g transform='translate(24,86)'&gt;&#10;          &lt;circle cx='16' cy='16' r='9' fill='none' stroke='#0E3F8C' strokeWidth='2' /&gt;&#10;          &lt;line x1='16' y1='25' x2='16' y2='48' stroke='#0E3F8C' strokeWidth='2' /&gt;&#10;          &lt;line x1='16' y1='33' x2='4' y2='45' stroke='#0E3F8C' strokeWidth='2' /&gt;&#10;          &lt;line x1='16' y1='33' x2='28' y2='45' stroke='#0E3F8C' strokeWidth='2' /&gt;&#10;          &lt;line x1='16' y1='48' x2='5' y2='64' stroke='#0E3F8C' strokeWidth='2' /&gt;&#10;          &lt;line x1='16' y1='48' x2='27' y2='64' stroke='#0E3F8C' strokeWidth='2' /&gt;&#10;          &lt;text x='16' y='80' textAnchor='middle' fill='#0E3F8C' fontSize='12' fontWeight='bold'&gt;Student&lt;/text&gt;&#10;        &lt;/g&gt;&#10;&#10;        &lt;line x1='52' y1='152' x2='188' y2='120' stroke='#1E4FA8' strokeWidth='1.6' /&gt;&#10;&#10;        &lt;line x1='256' y1='196' x2='216' y2='140' stroke='#3D7BD9' strokeWidth='2' strokeDasharray='7 4' /&gt;&#10;        &lt;polygon points='212,136 226,142 216,151' fill='#3D7BD9' /&gt;&#10;        &lt;text x='256' y='176' fill='#3D7BD9' fontSize='11.5' fontWeight='bold'&gt;«extend»&lt;/text&gt;&#10;        &lt;text x='256' y='192' fill='#8B97A8' fontSize='10'&gt;arrow points back to the base&lt;/text&gt;&#10;&#10;        &lt;rect x='150' y='304' width='320' height='38' rx='6' fill='#FFFFFF' stroke='#3D7BD9' strokeWidth='1' /&gt;&#10;        &lt;text x='310' y='322' textAnchor='middle' fill='#0E3F8C' fontSize='12' fontWeight='bold'&gt;Condition: the student holds a valid coupon&lt;/text&gt;&#10;        &lt;text x='310' y='336' textAnchor='middle' fill='#8B97A8' fontSize='11'&gt;The order is complete with or without it&lt;/text&gt;&#10;      &lt;/svg&gt;&#10;    &lt;/Box&gt;&#10;    &lt;Box style={{ flex: 1, flexDirection: 'column', justifyContent: 'center', gap: 12 }}&gt;&#10;      &lt;Box style={{ padding: '15px 17px', background: '#F0F5FC', borderRadius: 9, borderLeft: '4px solid #3D7BD9' }}&gt;&#10;        &lt;Text style={{ fontSize: 16, fontWeight: 'bold', color: '#0E3F8C' }}&gt;The test&lt;/Text&gt;&#10;        &lt;Text style={{ fontSize: 13, color: '#4A5568', lineHeight: 1.6, marginTop: 5 }}&gt;&#10;          Delete the extension. Does the base still deliver its goal? If yes — the base is complete, so the extra is an extend.&#10;        &lt;/Text&gt;&#10;      &lt;/Box&gt;&#10;      &lt;Box style={{ padding: '15px 17px', background: '#FFFFFF', borderRadius: 9, border: '1px solid #D6DCE5' }}&gt;&#10;        &lt;Text style={{ fontSize: 16, fontWeight: 'bold', color: '#0E3F8C' }}&gt;Name the condition&lt;/Text&gt;&#10;        &lt;Text style={{ fontSize: 13, color: '#4A5568', lineHeight: 1.6, marginTop: 5 }}&gt;&#10;          An extend without a stated condition is a guess. Write it on the diagram as a note: “only when the student holds a valid coupon”.&#10;        &lt;/Text&gt;&#10;      &lt;/Box&gt;&#10;      &lt;Box style={{ padding: '15px 17px', background: '#FDF3F3', borderRadius: 9, borderLeft: '4px solid #D9534F' }}&gt;&#10;        &lt;Text style={{ fontSize: 16, fontWeight: 'bold', color: '#D9534F' }}&gt;Common misuse&lt;/Text&gt;&#10;        &lt;Text style={{ fontSize: 13, color: '#4A5568', lineHeight: 1.6, marginTop: 5 }}&gt;&#10;          Using extend for the normal path. If it happens eight times out of ten, it is part of the base, not an extension of it.&#10;        &lt;/Text&gt;&#10;      &lt;/Box&gt;&#10;      &lt;Box style={{ padding: '12px 16px', background: '#F7F9FC', borderRadius: 8, border: '1px dashed #D6DCE5' }}&gt;&#10;        &lt;Text style={{ fontSize: 12.5, color: '#8B97A8', lineHeight: 1.55 }}&gt;&#10;          Memory hook: &lt;Text style={{ fontWeight: 'bold', color: '#0E3F8C' }}&gt;ex&lt;/Text&gt;tend = &lt;Text style={{ fontWeight: 'bold', color: '#0E3F8C' }}&gt;ex&lt;/Text&gt;ception, and the arrow comes back.&#10;        &lt;/Text&gt;&#10;      &lt;/Box&gt;&#10;    &lt;/Box&gt;&#10;  &lt;/Box&gt;&#10;  &lt;Box style={{ height: 34, padding: '0 40px', flexDirection: 'row', alignItems: 'center', justifyContent: 'space-between' }}&gt;&#10;    &lt;Text style={{ fontSize: 13, color: '#8B97A8' }}&gt;ISAD · Fall 2026 · Arrow from the extra to the base — the opposite of include&lt;/Text&gt;&#10;    &lt;Text style={{ fontSize: 14, color: '#1E4FA8', fontWeight: 'bold' }}&gt;22 / 38&lt;/Text&gt;&#10;  &lt;/Box&gt;&#10;&lt;/Slide&gt;"/>
+        <p:cNvPr id="360" name=""/>
         <p:cNvGrpSpPr/>
         <p:nvPr/>
       </p:nvGrpSpPr>
@@ -14084,7 +14462,10 @@
         </p:spPr>
         <p:txBody>
           <a:bodyPr/>
-          <a:p/>
+          <a:p>
+            <a:pPr/>
+            <a:endParaRPr/>
+          </a:p>
         </p:txBody>
       </p:sp>
       <p:sp>
@@ -14108,7 +14489,10 @@
         </p:spPr>
         <p:txBody>
           <a:bodyPr/>
-          <a:p/>
+          <a:p>
+            <a:pPr/>
+            <a:endParaRPr/>
+          </a:p>
         </p:txBody>
       </p:sp>
       <p:sp>
@@ -14305,7 +14689,10 @@
         </p:spPr>
         <p:txBody>
           <a:bodyPr/>
-          <a:p/>
+          <a:p>
+            <a:pPr/>
+            <a:endParaRPr/>
+          </a:p>
         </p:txBody>
       </p:sp>
       <p:sp>
@@ -14362,7 +14749,10 @@
         </p:spPr>
         <p:txBody>
           <a:bodyPr/>
-          <a:p/>
+          <a:p>
+            <a:pPr/>
+            <a:endParaRPr/>
+          </a:p>
         </p:txBody>
       </p:sp>
       <p:sp>
@@ -14465,7 +14855,10 @@
         </p:spPr>
         <p:txBody>
           <a:bodyPr/>
-          <a:p/>
+          <a:p>
+            <a:pPr/>
+            <a:endParaRPr/>
+          </a:p>
         </p:txBody>
       </p:sp>
       <p:sp>
@@ -14563,7 +14956,10 @@
         </p:spPr>
         <p:txBody>
           <a:bodyPr/>
-          <a:p/>
+          <a:p>
+            <a:pPr/>
+            <a:endParaRPr/>
+          </a:p>
         </p:txBody>
       </p:sp>
       <p:sp>
@@ -14620,7 +15016,10 @@
         </p:spPr>
         <p:txBody>
           <a:bodyPr/>
-          <a:p/>
+          <a:p>
+            <a:pPr/>
+            <a:endParaRPr/>
+          </a:p>
         </p:txBody>
       </p:sp>
       <p:sp>
@@ -14723,7 +15122,10 @@
         </p:spPr>
         <p:txBody>
           <a:bodyPr/>
-          <a:p/>
+          <a:p>
+            <a:pPr/>
+            <a:endParaRPr/>
+          </a:p>
         </p:txBody>
       </p:sp>
       <p:sp>
@@ -14881,7 +15283,7 @@
   <p:cSld>
     <p:spTree>
       <p:nvGrpSpPr>
-        <p:cNvPr id="383" name="" descr="&lt;Slide style={{ background: '#FFFFFF', padding: 0 }}&gt;&#10;  &lt;Box style={{ height: 72, background: '#1E4FA8', padding: '0 40px', flexDirection: 'row', alignItems: 'center', justifyContent: 'space-between' }}&gt;&#10;    &lt;Text style={{ fontSize: 15, color: '#B9CDF0', letterSpacing: 1 }}&gt;ISAD · INFORMATION SYSTEMS ANALYSIS &amp;amp; DESIGN&lt;/Text&gt;&#10;    &lt;Text style={{ fontSize: 15, color: '#B9CDF0' }}&gt;W04 · INCLUDE &amp;amp; EXTEND&lt;/Text&gt;&#10;  &lt;/Box&gt;&#10;  &lt;Box style={{ padding: '14px 40px 0 40px', flexDirection: 'row', alignItems: 'center', justifyContent: 'space-between' }}&gt;&#10;    &lt;Text style={{ fontSize: 29, fontWeight: 'bold', color: '#0E3F8C' }}&gt;Include vs. Extend — The Decision Table&lt;/Text&gt;&#10;    &lt;Text style={{ fontSize: 14, color: '#1E4FA8', fontWeight: 'bold' }}&gt;23 / 38&lt;/Text&gt;&#10;  &lt;/Box&gt;&#10;  &lt;Box style={{ flex: 1, padding: '10px 40px 6px 40px' }}&gt;&#10;    &lt;Table&#10;      style={{ width: '100%', height: '100%' }}&#10;      defaultTextStyle={{ fontSize: 13.5, textAlign: 'left', color: '#1A2230' }}&#10;      defaultCellStyle={{&#10;        border: {&#10;          left: { width: 1, color: '#E5E7EB' },&#10;          right: { width: 1, color: '#E5E7EB' },&#10;          top: { width: 1, color: '#E5E7EB' },&#10;          bottom: { width: 1, color: '#E5E7EB' },&#10;        },&#10;      }}&#10;      cells={[&#10;        [&#10;          { text: 'Dimension', textStyle: { bold: true, color: '#FFFFFF' }, cellStyle: { background: { color: '#0E3F8C' } } },&#10;          { text: '&lt;&lt;include&gt;&gt;', textStyle: { bold: true, color: '#FFFFFF' }, cellStyle: { background: { color: '#1E4FA8' } } },&#10;          { text: '&lt;&lt;extend&gt;&gt;', textStyle: { bold: true, color: '#FFFFFF' }, cellStyle: { background: { color: '#3D7BD9' } } },&#10;        ],&#10;        [&#10;          { text: 'Does it always happen?', textStyle: { bold: true, color: '#0E3F8C' }, cellStyle: { background: { color: '#F7F9FC' } } },&#10;          { text: 'Yes. Every run of the base.', textStyle: { color: '#4A5568' }, cellStyle: { background: { color: '#F7F9FC' } } },&#10;          { text: 'No. Only when a condition holds.', textStyle: { color: '#4A5568' }, cellStyle: { background: { color: '#F7F9FC' } } },&#10;        ],&#10;        [&#10;          { text: 'Is the base complete without it?', textStyle: { bold: true, color: '#0E3F8C' } },&#10;          { text: 'No. Remove it and the goal is unreachable.', textStyle: { color: '#4A5568' } },&#10;          { text: 'Yes. The goal is met either way.', textStyle: { color: '#4A5568' } },&#10;        ],&#10;        [&#10;          { text: 'Who depends on whom?', textStyle: { bold: true, color: '#0E3F8C' }, cellStyle: { background: { color: '#F7F9FC' } } },&#10;          { text: 'The base needs the included behaviour.', textStyle: { color: '#4A5568' }, cellStyle: { background: { color: '#F7F9FC' } } },&#10;          { text: 'The extension needs the base to hook into.', textStyle: { color: '#4A5568' }, cellStyle: { background: { color: '#F7F9FC' } } },&#10;        ],&#10;        [&#10;          { text: 'Arrow direction', textStyle: { bold: true, color: '#0E3F8C' } },&#10;          { text: 'Base → included', textStyle: { color: '#4A5568' } },&#10;          { text: 'Extension → base', textStyle: { color: '#4A5568' } },&#10;        ],&#10;        [&#10;          { text: 'Can it stand alone?', textStyle: { bold: true, color: '#0E3F8C' }, cellStyle: { background: { color: '#F7F9FC' } } },&#10;          { text: 'Usually not — nobody asks for it on its own.', textStyle: { color: '#4A5568' }, cellStyle: { background: { color: '#F7F9FC' } } },&#10;          { text: 'Often yes — it may be a small goal of its own.', textStyle: { color: '#4A5568' }, cellStyle: { background: { color: '#F7F9FC' } } },&#10;        ],&#10;        [&#10;          { text: 'Why you draw it', textStyle: { bold: true, color: '#0E3F8C' } },&#10;          { text: 'To stop writing the same behaviour three times.', textStyle: { color: '#4A5568' } },&#10;          { text: 'To keep a rare case out of the main text.', textStyle: { color: '#4A5568' } },&#10;        ],&#10;        [&#10;          { text: 'CampusBites example', textStyle: { bold: true, color: '#0E3F8C' }, cellStyle: { background: { color: '#F7F9FC' } } },&#10;          { text: 'Place Order includes Authenticate', textStyle: { color: '#4A5568' }, cellStyle: { background: { color: '#F7F9FC' } } },&#10;          { text: 'Apply Coupon extends Place Order', textStyle: { color: '#4A5568' }, cellStyle: { background: { color: '#F7F9FC' } } },&#10;        ],&#10;      ]}&#10;    /&gt;&#10;  &lt;/Box&gt;&#10;  &lt;Box style={{ height: 46, background: '#0E3F8C', padding: '0 40px', flexDirection: 'row', alignItems: 'center', justifyContent: 'center' }}&gt;&#10;    &lt;Text style={{ fontSize: 16, color: '#FFFFFF', fontWeight: '600' }}&gt;Ask only one question: is the base still complete without it? No → include. Yes → extend.&lt;/Text&gt;&#10;  &lt;/Box&gt;&#10;&lt;/Slide&gt;"/>
+        <p:cNvPr id="383" name=""/>
         <p:cNvGrpSpPr/>
         <p:nvPr/>
       </p:nvGrpSpPr>
@@ -14914,7 +15316,10 @@
         </p:spPr>
         <p:txBody>
           <a:bodyPr/>
-          <a:p/>
+          <a:p>
+            <a:pPr/>
+            <a:endParaRPr/>
+          </a:p>
         </p:txBody>
       </p:sp>
       <p:sp>
@@ -14938,7 +15343,10 @@
         </p:spPr>
         <p:txBody>
           <a:bodyPr/>
-          <a:p/>
+          <a:p>
+            <a:pPr/>
+            <a:endParaRPr/>
+          </a:p>
         </p:txBody>
       </p:sp>
       <p:sp>
@@ -16179,7 +16587,10 @@
         </p:spPr>
         <p:txBody>
           <a:bodyPr/>
-          <a:p/>
+          <a:p>
+            <a:pPr/>
+            <a:endParaRPr/>
+          </a:p>
         </p:txBody>
       </p:sp>
       <p:sp>
@@ -16227,7 +16638,7 @@
   <p:cSld>
     <p:spTree>
       <p:nvGrpSpPr>
-        <p:cNvPr id="393" name="" descr="&lt;Slide style={{ background: '#0E3F8C', padding: 0 }}&gt;&#10;  &lt;Box style={{ flexDirection: 'row', height: '100%', position: 'relative' }}&gt;&#10;    &lt;Box style={{ position: 'absolute', top: 0, left: 0, right: 0, height: 8, background: '#1E4FA8' }} /&gt;&#10;    &lt;Box style={{ width: 300, justifyContent: 'center', alignItems: 'center', borderRight: '1px solid #2B5793' }}&gt;&#10;      &lt;Text style={{ fontSize: 220, fontWeight: 'bold', color: '#3D7BD9', fontFamily: 'Georgia, serif', lineHeight: 1 }}&gt;05&lt;/Text&gt;&#10;    &lt;/Box&gt;&#10;    &lt;Box style={{ flex: 1, padding: '70px 64px', flexDirection: 'column', justifyContent: 'center' }}&gt;&#10;      &lt;Text style={{ fontSize: 15, color: '#7FA2D6', letterSpacing: 2, marginBottom: 18 }}&gt;PART 1 · LECTURE&lt;/Text&gt;&#10;      &lt;Text style={{ fontSize: 46, fontWeight: 'bold', color: '#FFFFFF', lineHeight: 1.18 }}&gt;Finding&lt;br /&gt;Use Cases&lt;/Text&gt;&#10;      &lt;Box style={{ width: 64, height: 4, background: '#FFC107', marginTop: 26, marginBottom: 26 }} /&gt;&#10;      &lt;Box style={{ flexDirection: 'column', gap: 12 }}&gt;&#10;        {[&#10;          'Two heuristics: events, and the noun-verb scan',&#10;          'Six use cases fall out of the CampusBites pack',&#10;          'A name is not a use case — the text comes in Week 05',&#10;        ].map((t) =&gt; (&#10;          &lt;Box key={t} style={{ flexDirection: 'row', alignItems: 'center', gap: 12 }}&gt;&#10;            &lt;Box style={{ width: 8, height: 8, borderRadius: 4, background: '#3D7BD9' }} /&gt;&#10;            &lt;Text style={{ fontSize: 20, color: '#C5D4EA' }}&gt;{t}&lt;/Text&gt;&#10;          &lt;/Box&gt;&#10;        ))}&#10;      &lt;/Box&gt;&#10;    &lt;/Box&gt;&#10;  &lt;/Box&gt;&#10;&lt;/Slide&gt;"/>
+        <p:cNvPr id="393" name=""/>
         <p:cNvGrpSpPr/>
         <p:nvPr/>
       </p:nvGrpSpPr>
@@ -16260,7 +16671,10 @@
         </p:spPr>
         <p:txBody>
           <a:bodyPr/>
-          <a:p/>
+          <a:p>
+            <a:pPr/>
+            <a:endParaRPr/>
+          </a:p>
         </p:txBody>
       </p:sp>
       <p:sp>
@@ -16300,7 +16714,10 @@
         </p:spPr>
         <p:txBody>
           <a:bodyPr/>
-          <a:p/>
+          <a:p>
+            <a:pPr/>
+            <a:endParaRPr/>
+          </a:p>
         </p:txBody>
       </p:sp>
       <p:sp>
@@ -16447,7 +16864,10 @@
         </p:spPr>
         <p:txBody>
           <a:bodyPr/>
-          <a:p/>
+          <a:p>
+            <a:pPr/>
+            <a:endParaRPr/>
+          </a:p>
         </p:txBody>
       </p:sp>
       <p:sp>
@@ -16473,7 +16893,10 @@
         </p:spPr>
         <p:txBody>
           <a:bodyPr/>
-          <a:p/>
+          <a:p>
+            <a:pPr/>
+            <a:endParaRPr/>
+          </a:p>
         </p:txBody>
       </p:sp>
       <p:sp>
@@ -16534,7 +16957,10 @@
         </p:spPr>
         <p:txBody>
           <a:bodyPr/>
-          <a:p/>
+          <a:p>
+            <a:pPr/>
+            <a:endParaRPr/>
+          </a:p>
         </p:txBody>
       </p:sp>
       <p:sp>
@@ -16595,7 +17021,10 @@
         </p:spPr>
         <p:txBody>
           <a:bodyPr/>
-          <a:p/>
+          <a:p>
+            <a:pPr/>
+            <a:endParaRPr/>
+          </a:p>
         </p:txBody>
       </p:sp>
       <p:sp>
@@ -16654,7 +17083,10 @@
         </p:spPr>
         <p:txBody>
           <a:bodyPr/>
-          <a:p/>
+          <a:p>
+            <a:pPr/>
+            <a:endParaRPr/>
+          </a:p>
         </p:txBody>
       </p:sp>
     </p:spTree>
@@ -16667,7 +17099,7 @@
   <p:cSld>
     <p:spTree>
       <p:nvGrpSpPr>
-        <p:cNvPr id="407" name="" descr="&lt;Slide style={{ background: '#FFFFFF', padding: 0 }}&gt;&#10;  &lt;Box style={{ height: 72, background: '#1E4FA8', padding: '0 40px', flexDirection: 'row', alignItems: 'center', justifyContent: 'space-between' }}&gt;&#10;    &lt;Text style={{ fontSize: 15, color: '#B9CDF0', letterSpacing: 1 }}&gt;ISAD · INFORMATION SYSTEMS ANALYSIS &amp;amp; DESIGN&lt;/Text&gt;&#10;    &lt;Text style={{ fontSize: 15, color: '#B9CDF0' }}&gt;W04 · FINDING USE CASES&lt;/Text&gt;&#10;  &lt;/Box&gt;&#10;  &lt;Box style={{ padding: '14px 40px 0 40px', flexDirection: 'row', alignItems: 'center', justifyContent: 'space-between' }}&gt;&#10;    &lt;Text style={{ fontSize: 29, fontWeight: 'bold', color: '#0E3F8C' }}&gt;Two Ways to Find Them&lt;/Text&gt;&#10;    &lt;Text style={{ fontSize: 14, color: '#1E4FA8', fontWeight: 'bold' }}&gt;25 / 38&lt;/Text&gt;&#10;  &lt;/Box&gt;&#10;  &lt;Box style={{ flex: 1, padding: '12px 40px 0 40px', flexDirection: 'row', gap: 22 }}&gt;&#10;    &lt;Box style={{ flex: 1, flexDirection: 'column' }}&gt;&#10;      &lt;Box style={{ padding: '16px 18px', background: '#F0F5FC', borderRadius: 10, borderTop: '4px solid #1E4FA8', marginBottom: 10 }}&gt;&#10;        &lt;Text style={{ fontSize: 18, fontWeight: 'bold', color: '#0E3F8C' }}&gt;01 · Event analysis&lt;/Text&gt;&#10;        &lt;Text style={{ fontSize: 13, color: '#4A5568', lineHeight: 1.6, marginTop: 6 }}&gt;&#10;          Start from what happens to the business, then ask what the system must do about it.&#10;        &lt;/Text&gt;&#10;      &lt;/Box&gt;&#10;      {[&#10;        ['Best when', 'The process is well understood and somebody can list the events'],&#10;        ['You get', 'A use case per business event — traceable back to the business'],&#10;        ['Blind spot', 'Misses quiet goals: browsing, searching, comparing'],&#10;        ['Effort', 'Needs a domain expert in the room for an hour'],&#10;      ].map((r) =&gt; (&#10;        &lt;Box key={r[0]} style={{ padding: '12px 15px', background: '#FFFFFF', borderRadius: 8, border: '1px solid #D6DCE5', marginBottom: 8 }}&gt;&#10;          &lt;Text style={{ fontSize: 11.5, color: '#8B97A8', marginBottom: 2 }}&gt;{r[0].toUpperCase()}&lt;/Text&gt;&#10;          &lt;Text style={{ fontSize: 13, color: '#4A5568', lineHeight: 1.5 }}&gt;{r[1]}&lt;/Text&gt;&#10;        &lt;/Box&gt;&#10;      ))}&#10;    &lt;/Box&gt;&#10;    &lt;Box style={{ width: 20 }} /&gt;&#10;    &lt;Box style={{ flex: 1, flexDirection: 'column' }}&gt;&#10;      &lt;Box style={{ padding: '16px 18px', background: '#F7F9FC', borderRadius: 10, borderTop: '4px solid #3D7BD9', marginBottom: 10 }}&gt;&#10;        &lt;Text style={{ fontSize: 18, fontWeight: 'bold', color: '#0E3F8C' }}&gt;02 · Noun–verb scanning&lt;/Text&gt;&#10;        &lt;Text style={{ fontSize: 13, color: '#4A5568', lineHeight: 1.6, marginTop: 6 }}&gt;&#10;          Read the narrative. Underline the nouns and the verbs, then sort what you underlined.&#10;        &lt;/Text&gt;&#10;      &lt;/Box&gt;&#10;      {[&#10;        ['Best when', 'You have a written brief and no expert available'],&#10;        ['You get', 'Candidate actors and use cases in one pass — plus candidate classes'],&#10;        ['Blind spot', 'Finds what the text says, not what the text forgot'],&#10;        ['Effort', 'Twenty minutes alone with a highlighter'],&#10;      ].map((r) =&gt; (&#10;        &lt;Box key={r[0]} style={{ padding: '12px 15px', background: '#FFFFFF', borderRadius: 8, border: '1px solid #D6DCE5', marginBottom: 8 }}&gt;&#10;          &lt;Text style={{ fontSize: 11.5, color: '#8B97A8', marginBottom: 2 }}&gt;{r[0].toUpperCase()}&lt;/Text&gt;&#10;          &lt;Text style={{ fontSize: 13, color: '#4A5568', lineHeight: 1.5 }}&gt;{r[1]}&lt;/Text&gt;&#10;        &lt;/Box&gt;&#10;      ))}&#10;    &lt;/Box&gt;&#10;  &lt;/Box&gt;&#10;  &lt;Box style={{ height: 46, background: '#0E3F8C', padding: '0 40px', flexDirection: 'row', alignItems: 'center', justifyContent: 'center' }}&gt;&#10;    &lt;Text style={{ fontSize: 16, color: '#FFFFFF', fontWeight: '600' }}&gt;Run both. Where they agree, you are confident; where they disagree, you have found a question to ask.&lt;/Text&gt;&#10;  &lt;/Box&gt;&#10;&lt;/Slide&gt;"/>
+        <p:cNvPr id="407" name=""/>
         <p:cNvGrpSpPr/>
         <p:nvPr/>
       </p:nvGrpSpPr>
@@ -16700,7 +17132,10 @@
         </p:spPr>
         <p:txBody>
           <a:bodyPr/>
-          <a:p/>
+          <a:p>
+            <a:pPr/>
+            <a:endParaRPr/>
+          </a:p>
         </p:txBody>
       </p:sp>
       <p:sp>
@@ -16724,7 +17159,10 @@
         </p:spPr>
         <p:txBody>
           <a:bodyPr/>
-          <a:p/>
+          <a:p>
+            <a:pPr/>
+            <a:endParaRPr/>
+          </a:p>
         </p:txBody>
       </p:sp>
       <p:sp>
@@ -16890,7 +17328,10 @@
         </p:spPr>
         <p:txBody>
           <a:bodyPr/>
-          <a:p/>
+          <a:p>
+            <a:pPr/>
+            <a:endParaRPr/>
+          </a:p>
         </p:txBody>
       </p:sp>
       <p:sp>
@@ -16947,7 +17388,10 @@
         </p:spPr>
         <p:txBody>
           <a:bodyPr/>
-          <a:p/>
+          <a:p>
+            <a:pPr/>
+            <a:endParaRPr/>
+          </a:p>
         </p:txBody>
       </p:sp>
       <p:sp>
@@ -17048,7 +17492,10 @@
         </p:spPr>
         <p:txBody>
           <a:bodyPr/>
-          <a:p/>
+          <a:p>
+            <a:pPr/>
+            <a:endParaRPr/>
+          </a:p>
         </p:txBody>
       </p:sp>
       <p:sp>
@@ -17149,7 +17596,10 @@
         </p:spPr>
         <p:txBody>
           <a:bodyPr/>
-          <a:p/>
+          <a:p>
+            <a:pPr/>
+            <a:endParaRPr/>
+          </a:p>
         </p:txBody>
       </p:sp>
       <p:sp>
@@ -17250,7 +17700,10 @@
         </p:spPr>
         <p:txBody>
           <a:bodyPr/>
-          <a:p/>
+          <a:p>
+            <a:pPr/>
+            <a:endParaRPr/>
+          </a:p>
         </p:txBody>
       </p:sp>
       <p:sp>
@@ -17351,7 +17804,10 @@
         </p:spPr>
         <p:txBody>
           <a:bodyPr/>
-          <a:p/>
+          <a:p>
+            <a:pPr/>
+            <a:endParaRPr/>
+          </a:p>
         </p:txBody>
       </p:sp>
       <p:sp>
@@ -17447,7 +17903,10 @@
         </p:spPr>
         <p:txBody>
           <a:bodyPr/>
-          <a:p/>
+          <a:p>
+            <a:pPr/>
+            <a:endParaRPr/>
+          </a:p>
         </p:txBody>
       </p:sp>
       <p:sp>
@@ -17504,7 +17963,10 @@
         </p:spPr>
         <p:txBody>
           <a:bodyPr/>
-          <a:p/>
+          <a:p>
+            <a:pPr/>
+            <a:endParaRPr/>
+          </a:p>
         </p:txBody>
       </p:sp>
       <p:sp>
@@ -17605,7 +18067,10 @@
         </p:spPr>
         <p:txBody>
           <a:bodyPr/>
-          <a:p/>
+          <a:p>
+            <a:pPr/>
+            <a:endParaRPr/>
+          </a:p>
         </p:txBody>
       </p:sp>
       <p:sp>
@@ -17706,7 +18171,10 @@
         </p:spPr>
         <p:txBody>
           <a:bodyPr/>
-          <a:p/>
+          <a:p>
+            <a:pPr/>
+            <a:endParaRPr/>
+          </a:p>
         </p:txBody>
       </p:sp>
       <p:sp>
@@ -17807,7 +18275,10 @@
         </p:spPr>
         <p:txBody>
           <a:bodyPr/>
-          <a:p/>
+          <a:p>
+            <a:pPr/>
+            <a:endParaRPr/>
+          </a:p>
         </p:txBody>
       </p:sp>
       <p:sp>
@@ -17908,7 +18379,10 @@
         </p:spPr>
         <p:txBody>
           <a:bodyPr/>
-          <a:p/>
+          <a:p>
+            <a:pPr/>
+            <a:endParaRPr/>
+          </a:p>
         </p:txBody>
       </p:sp>
       <p:sp>
@@ -18002,7 +18476,10 @@
         </p:spPr>
         <p:txBody>
           <a:bodyPr/>
-          <a:p/>
+          <a:p>
+            <a:pPr/>
+            <a:endParaRPr/>
+          </a:p>
         </p:txBody>
       </p:sp>
       <p:sp>
@@ -18050,7 +18527,7 @@
   <p:cSld>
     <p:spTree>
       <p:nvGrpSpPr>
-        <p:cNvPr id="448" name="" descr="&lt;Slide style={{ background: '#FFFFFF', padding: 0 }}&gt;&#10;  &lt;Box style={{ height: 72, background: '#1E4FA8', padding: '0 40px', flexDirection: 'row', alignItems: 'center', justifyContent: 'space-between' }}&gt;&#10;    &lt;Text style={{ fontSize: 15, color: '#B9CDF0', letterSpacing: 1 }}&gt;ISAD · INFORMATION SYSTEMS ANALYSIS &amp;amp; DESIGN&lt;/Text&gt;&#10;    &lt;Text style={{ fontSize: 15, color: '#B9CDF0' }}&gt;W04 · FINDING USE CASES&lt;/Text&gt;&#10;  &lt;/Box&gt;&#10;  &lt;Box style={{ padding: '14px 40px 0 40px', flexDirection: 'row', alignItems: 'center', justifyContent: 'space-between' }}&gt;&#10;    &lt;Text style={{ fontSize: 29, fontWeight: 'bold', color: '#0E3F8C' }}&gt;The Event Table&lt;/Text&gt;&#10;    &lt;Text style={{ fontSize: 14, color: '#1E4FA8', fontWeight: 'bold' }}&gt;26 / 38&lt;/Text&gt;&#10;  &lt;/Box&gt;&#10;  &lt;Box style={{ flex: 1, padding: '10px 40px 6px 40px' }}&gt;&#10;    &lt;Table&#10;      style={{ width: '100%', height: '100%' }}&#10;      defaultTextStyle={{ fontSize: 13.5, textAlign: 'left', color: '#1A2230' }}&#10;      defaultCellStyle={{&#10;        border: {&#10;          left: { width: 1, color: '#E5E7EB' },&#10;          right: { width: 1, color: '#E5E7EB' },&#10;          top: { width: 1, color: '#E5E7EB' },&#10;          bottom: { width: 1, color: '#E5E7EB' },&#10;        },&#10;      }}&#10;      cells={[&#10;        [&#10;          { text: 'External event', textStyle: { bold: true, color: '#FFFFFF' }, cellStyle: { background: { color: '#0E3F8C' } } },&#10;          { text: 'Who triggers it', textStyle: { bold: true, color: '#FFFFFF' }, cellStyle: { background: { color: '#0E3F8C' } } },&#10;          { text: 'What the system must do', textStyle: { bold: true, color: '#FFFFFF' }, cellStyle: { background: { color: '#1E4FA8' } } },&#10;          { text: 'Use case', textStyle: { bold: true, color: '#FFFFFF' }, cellStyle: { background: { color: '#1E4FA8' } } },&#10;        ],&#10;        [&#10;          { text: 'A student wants lunch', textStyle: { color: '#4A5568' }, cellStyle: { background: { color: '#F7F9FC' } } },&#10;          { text: 'Student', textStyle: { color: '#4A5568' }, cellStyle: { background: { color: '#F7F9FC' } } },&#10;          { text: 'Show the menu, take the selection, take the money', textStyle: { color: '#4A5568' }, cellStyle: { background: { color: '#F7F9FC' } } },&#10;          { text: 'Place Order', textStyle: { bold: true, color: '#0E3F8C' }, cellStyle: { background: { color: '#F7F9FC' } } },&#10;        ],&#10;        [&#10;          { text: 'A restaurant changes its menu', textStyle: { color: '#4A5568' } },&#10;          { text: 'Restaurant Manager', textStyle: { color: '#4A5568' } },&#10;          { text: 'Let the manager mark items sold out before service starts', textStyle: { color: '#4A5568' } },&#10;          { text: 'Manage Today’s Menu', textStyle: { bold: true, color: '#0E3F8C' } },&#10;        ],&#10;        [&#10;          { text: 'An order is ready for pickup', textStyle: { color: '#4A5568' }, cellStyle: { background: { color: '#F7F9FC' } } },&#10;          { text: 'Kitchen (system clock)', textStyle: { color: '#4A5568' }, cellStyle: { background: { color: '#F7F9FC' } } },&#10;          { text: 'Find an available courier and assign the delivery', textStyle: { color: '#4A5568' }, cellStyle: { background: { color: '#F7F9FC' } } },&#10;          { text: 'Dispatch Courier', textStyle: { bold: true, color: '#0E3F8C' }, cellStyle: { background: { color: '#F7F9FC' } } },&#10;        ],&#10;        [&#10;          { text: 'A student wants to know where lunch is', textStyle: { color: '#4A5568' } },&#10;          { text: 'Student', textStyle: { color: '#4A5568' } },&#10;          { text: 'Show the current status of a live order', textStyle: { color: '#4A5568' } },&#10;          { text: 'Track Order', textStyle: { bold: true, color: '#0E3F8C' } },&#10;        ],&#10;        [&#10;          { text: 'A delivery has arrived', textStyle: { color: '#4A5568' }, cellStyle: { background: { color: '#F7F9FC' } } },&#10;          { text: 'Courier', textStyle: { color: '#4A5568' }, cellStyle: { background: { color: '#F7F9FC' } } },&#10;          { text: 'Close the order, record the arrival time, open the rating', textStyle: { color: '#4A5568' }, cellStyle: { background: { color: '#F7F9FC' } } },&#10;          { text: 'Confirm Delivery', textStyle: { bold: true, color: '#0E3F8C' }, cellStyle: { background: { color: '#F7F9FC' } } },&#10;        ],&#10;        [&#10;          { text: 'A payment is declined', textStyle: { color: '#4A5568' } },&#10;          { text: 'Payment Provider', textStyle: { color: '#4A5568' } },&#10;          { text: 'Tell the student, hold the order for thirty minutes', textStyle: { color: '#4A5568' } },&#10;          { text: 'Pay for Order', textStyle: { bold: true, color: '#0E3F8C' } },&#10;        ],&#10;      ]}&#10;    /&gt;&#10;  &lt;/Box&gt;&#10;  &lt;Box style={{ height: 46, background: '#0E3F8C', padding: '0 40px', flexDirection: 'row', alignItems: 'center', justifyContent: 'center' }}&gt;&#10;    &lt;Text style={{ fontSize: 16, color: '#FFFFFF', fontWeight: '600' }}&gt;One row per event, one verb phrase per row — if two rows produce the same use case, merge them.&lt;/Text&gt;&#10;  &lt;/Box&gt;&#10;&lt;/Slide&gt;"/>
+        <p:cNvPr id="448" name=""/>
         <p:cNvGrpSpPr/>
         <p:nvPr/>
       </p:nvGrpSpPr>
@@ -18083,7 +18560,10 @@
         </p:spPr>
         <p:txBody>
           <a:bodyPr/>
-          <a:p/>
+          <a:p>
+            <a:pPr/>
+            <a:endParaRPr/>
+          </a:p>
         </p:txBody>
       </p:sp>
       <p:sp>
@@ -18107,7 +18587,10 @@
         </p:spPr>
         <p:txBody>
           <a:bodyPr/>
-          <a:p/>
+          <a:p>
+            <a:pPr/>
+            <a:endParaRPr/>
+          </a:p>
         </p:txBody>
       </p:sp>
       <p:sp>
@@ -19507,7 +19990,10 @@
         </p:spPr>
         <p:txBody>
           <a:bodyPr/>
-          <a:p/>
+          <a:p>
+            <a:pPr/>
+            <a:endParaRPr/>
+          </a:p>
         </p:txBody>
       </p:sp>
       <p:sp>
@@ -19555,7 +20041,7 @@
   <p:cSld>
     <p:spTree>
       <p:nvGrpSpPr>
-        <p:cNvPr id="458" name="" descr="&lt;Slide style={{ background: '#FFFFFF', padding: 0 }}&gt;&#10;  &lt;Box style={{ height: 72, background: '#1E4FA8', padding: '0 40px', flexDirection: 'row', alignItems: 'center', justifyContent: 'space-between' }}&gt;&#10;    &lt;Text style={{ fontSize: 15, color: '#B9CDF0', letterSpacing: 1 }}&gt;ISAD · INFORMATION SYSTEMS ANALYSIS &amp;amp; DESIGN&lt;/Text&gt;&#10;    &lt;Text style={{ fontSize: 15, color: '#B9CDF0' }}&gt;W04 · FINDING USE CASES&lt;/Text&gt;&#10;  &lt;/Box&gt;&#10;  &lt;Box style={{ padding: '12px 40px 0 40px', flexDirection: 'row', alignItems: 'center', justifyContent: 'space-between' }}&gt;&#10;    &lt;Text style={{ fontSize: 30, fontWeight: 'bold', color: '#0E3F8C' }}&gt;Noun–Verb Scanning&lt;/Text&gt;&#10;    &lt;Text style={{ fontSize: 14, color: '#1E4FA8', fontWeight: 'bold' }}&gt;27 / 38&lt;/Text&gt;&#10;  &lt;/Box&gt;&#10;  &lt;Box style={{ flex: 1, padding: '4px 40px 0 40px', justifyContent: 'center', alignItems: 'center' }}&gt;&#10;    &lt;svg width={1180} height={382} viewBox='0 0 1180 382'&gt;&#10;      &lt;text x='10' y='16' fill='#8B97A8' fontSize='13'&gt;Underline the nouns in blue and the verbs in amber. Then sort what you underlined.&lt;/text&gt;&#10;&#10;      &lt;g transform='translate(10,30)'&gt;&#10;        &lt;rect x='0' y='0' width='1160' height='186' rx='8' fill='#F7F9FC' stroke='#D6DCE5' strokeWidth='1' /&gt;&#10;        &lt;text x='20' y='26' fill='#8B97A8' fontSize='11.5'&gt;THE NARRATIVE — CampusBites requirements pack, §2.1&lt;/text&gt;&#10;&#10;        &lt;text x='20' y='54' fill='#1A2230' fontSize='14'&gt;&#10;          A &lt;tspan fill='#1E4FA8' fontWeight='bold'&gt;student&lt;/tspan&gt; &lt;tspan fill='#B8860B' fontWeight='bold'&gt;browses&lt;/tspan&gt; the &lt;tspan fill='#1E4FA8' fontWeight='bold'&gt;menu&lt;/tspan&gt; of a &lt;tspan fill='#1E4FA8' fontWeight='bold'&gt;restaurant&lt;/tspan&gt;, &lt;tspan fill='#B8860B' fontWeight='bold'&gt;selects&lt;/tspan&gt; &lt;tspan fill='#1E4FA8' fontWeight='bold'&gt;items&lt;/tspan&gt;,&#10;        &lt;/text&gt;&#10;        &lt;text x='20' y='78' fill='#1A2230' fontSize='14'&gt;&#10;          and &lt;tspan fill='#B8860B' fontWeight='bold'&gt;places&lt;/tspan&gt; an &lt;tspan fill='#1E4FA8' fontWeight='bold'&gt;order&lt;/tspan&gt;. The system &lt;tspan fill='#B8860B' fontWeight='bold'&gt;authenticates&lt;/tspan&gt; the student,&#10;        &lt;/text&gt;&#10;        &lt;text x='20' y='102' fill='#1A2230' fontSize='14'&gt;&#10;          &lt;tspan fill='#B8860B' fontWeight='bold'&gt;calculates&lt;/tspan&gt; the total and &lt;tspan fill='#B8860B' fontWeight='bold'&gt;charges&lt;/tspan&gt; the &lt;tspan fill='#1E4FA8' fontWeight='bold'&gt;campus card&lt;/tspan&gt;.&#10;        &lt;/text&gt;&#10;        &lt;text x='20' y='126' fill='#1A2230' fontSize='14'&gt;&#10;          The restaurant &lt;tspan fill='#B8860B' fontWeight='bold'&gt;receives&lt;/tspan&gt; the order, &lt;tspan fill='#B8860B' fontWeight='bold'&gt;marks&lt;/tspan&gt; an item sold out,&#10;        &lt;/text&gt;&#10;        &lt;text x='20' y='150' fill='#1A2230' fontSize='14'&gt;&#10;          and &lt;tspan fill='#B8860B' fontWeight='bold'&gt;notifies&lt;/tspan&gt; a &lt;tspan fill='#1E4FA8' fontWeight='bold'&gt;courier&lt;/tspan&gt;. The courier &lt;tspan fill='#B8860B' fontWeight='bold'&gt;picks up&lt;/tspan&gt; and &lt;tspan fill='#B8860B' fontWeight='bold'&gt;delivers&lt;/tspan&gt;&#10;        &lt;/text&gt;&#10;        &lt;text x='20' y='174' fill='#1A2230' fontSize='14'&gt;&#10;          the order; the student &lt;tspan fill='#B8860B' fontWeight='bold'&gt;rates&lt;/tspan&gt; the restaurant afterwards.&#10;        &lt;/text&gt;&#10;&#10;        &lt;g transform='translate(872,196)'&gt;&#10;          &lt;rect x='0' y='0' width='130' height='22' rx='4' fill='#E8EFF8' stroke='#1E4FA8' strokeWidth='1' /&gt;&#10;          &lt;text x='65' y='15' textAnchor='middle' fill='#1E4FA8' fontSize='11' fontWeight='bold'&gt;NOUNS&lt;/text&gt;&#10;          &lt;rect x='142' y='0' width='130' height='22' rx='4' fill='#FFF6E0' stroke='#FFC107' strokeWidth='1' /&gt;&#10;          &lt;text x='207' y='15' textAnchor='middle' fill='#996F00' fontSize='11' fontWeight='bold'&gt;VERBS&lt;/text&gt;&#10;        &lt;/g&gt;&#10;      &lt;/g&gt;&#10;&#10;      &lt;g transform='translate(10,230)'&gt;&#10;        &lt;rect x='0' y='0' width='570' height='146' rx='8' fill='#F0F5FC' stroke='#1E4FA8' strokeWidth='1.5' /&gt;&#10;        &lt;text x='18' y='26' fill='#0E3F8C' fontSize='14' fontWeight='bold'&gt;Nouns → actors and candidate concepts&lt;/text&gt;&#10;        &lt;text x='18' y='45' fill='#8B97A8' fontSize='11.5'&gt;Keep for Week 06: the domain model is hiding in this column&lt;/text&gt;&#10;&#10;        &lt;g transform='translate(18,58)'&gt;&#10;          &lt;rect x='0' y='0' width='164' height='26' rx='4' fill='#FFFFFF' stroke='#D6DCE5' strokeWidth='1' /&gt;&#10;          &lt;text x='10' y='18' fill='#1A2230' fontSize='11.5' fontWeight='bold'&gt;Student&lt;/text&gt;&#10;          &lt;text x='96' y='18' fill='#1E4FA8' fontSize='11'&gt;actor&lt;/text&gt;&#10;        &lt;/g&gt;&#10;        &lt;g transform='translate(192,58)'&gt;&#10;          &lt;rect x='0' y='0' width='164' height='26' rx='4' fill='#FFFFFF' stroke='#D6DCE5' strokeWidth='1' /&gt;&#10;          &lt;text x='10' y='18' fill='#1A2230' fontSize='11.5' fontWeight='bold'&gt;Restaurant&lt;/text&gt;&#10;          &lt;text x='96' y='18' fill='#1E4FA8' fontSize='11'&gt;actor&lt;/text&gt;&#10;        &lt;/g&gt;&#10;        &lt;g transform='translate(366,58)'&gt;&#10;          &lt;rect x='0' y='0' width='164' height='26' rx='4' fill='#FFFFFF' stroke='#D6DCE5' strokeWidth='1' /&gt;&#10;          &lt;text x='10' y='18' fill='#1A2230' fontSize='11.5' fontWeight='bold'&gt;Courier&lt;/text&gt;&#10;          &lt;text x='96' y='18' fill='#1E4FA8' fontSize='11'&gt;actor&lt;/text&gt;&#10;        &lt;/g&gt;&#10;&#10;        &lt;g transform='translate(18,92)'&gt;&#10;          &lt;rect x='0' y='0' width='164' height='26' rx='4' fill='#FFFFFF' stroke='#D6DCE5' strokeWidth='1' /&gt;&#10;          &lt;text x='10' y='18' fill='#1A2230' fontSize='11.5'&gt;Menu&lt;/text&gt;&#10;          &lt;text x='96' y='18' fill='#8B97A8' fontSize='11'&gt;concept&lt;/text&gt;&#10;        &lt;/g&gt;&#10;        &lt;g transform='translate(192,92)'&gt;&#10;          &lt;rect x='0' y='0' width='164' height='26' rx='4' fill='#FFFFFF' stroke='#D6DCE5' strokeWidth='1' /&gt;&#10;          &lt;text x='10' y='18' fill='#1A2230' fontSize='11.5'&gt;Order&lt;/text&gt;&#10;          &lt;text x='96' y='18' fill='#8B97A8' fontSize='11'&gt;concept&lt;/text&gt;&#10;        &lt;/g&gt;&#10;        &lt;g transform='translate(366,92)'&gt;&#10;          &lt;rect x='0' y='0' width='164' height='26' rx='4' fill='#FFFFFF' stroke='#D6DCE5' strokeWidth='1' /&gt;&#10;          &lt;text x='10' y='18' fill='#1A2230' fontSize='11.5'&gt;Campus card&lt;/text&gt;&#10;          &lt;text x='96' y='18' fill='#8B97A8' fontSize='11'&gt;concept&lt;/text&gt;&#10;        &lt;/g&gt;&#10;&#10;        &lt;text x='18' y='136' fill='#8B97A8' fontSize='11'&gt;Some nouns turn out to be attributes — “total” is a number on Order, not a class.&lt;/text&gt;&#10;      &lt;/g&gt;&#10;&#10;      &lt;g transform='translate(600,230)'&gt;&#10;        &lt;rect x='0' y='0' width='570' height='146' rx='8' fill='#FFF6E0' stroke='#FFC107' strokeWidth='1.5' /&gt;&#10;        &lt;text x='18' y='26' fill='#996F00' fontSize='14' fontWeight='bold'&gt;Verbs → candidate use cases&lt;/text&gt;&#10;        &lt;text x='18' y='45' fill='#8B97A8' fontSize='11.5'&gt;Then filter: keep only the verbs that name a goal somebody has&lt;/text&gt;&#10;&#10;        &lt;g transform='translate(18,58)'&gt;&#10;          &lt;rect x='0' y='0' width='164' height='26' rx='4' fill='#FFFFFF' stroke='#D6DCE5' strokeWidth='1' /&gt;&#10;          &lt;text x='10' y='18' fill='#1A2230' fontSize='11.5' fontWeight='bold'&gt;Browse menu&lt;/text&gt;&#10;          &lt;text x='118' y='18' fill='#1E4FA8' fontSize='10.5'&gt;keep&lt;/text&gt;&#10;        &lt;/g&gt;&#10;        &lt;g transform='translate(192,58)'&gt;&#10;          &lt;rect x='0' y='0' width='164' height='26' rx='4' fill='#FFFFFF' stroke='#D6DCE5' strokeWidth='1' /&gt;&#10;          &lt;text x='10' y='18' fill='#1A2230' fontSize='11.5' fontWeight='bold'&gt;Place order&lt;/text&gt;&#10;          &lt;text x='118' y='18' fill='#1E4FA8' fontSize='10.5'&gt;keep&lt;/text&gt;&#10;        &lt;/g&gt;&#10;        &lt;g transform='translate(366,58)'&gt;&#10;          &lt;rect x='0' y='0' width='164' height='26' rx='4' fill='#FFFFFF' stroke='#D6DCE5' strokeWidth='1' /&gt;&#10;          &lt;text x='10' y='18' fill='#1A2230' fontSize='11.5' fontWeight='bold'&gt;Rate restaurant&lt;/text&gt;&#10;          &lt;text x='118' y='18' fill='#1E4FA8' fontSize='10.5'&gt;keep&lt;/text&gt;&#10;        &lt;/g&gt;&#10;&#10;        &lt;g transform='translate(18,92)'&gt;&#10;          &lt;rect x='0' y='0' width='164' height='26' rx='4' fill='#FDF3F3' stroke='#D9534F' strokeWidth='1' /&gt;&#10;          &lt;text x='10' y='18' fill='#4A5568' fontSize='11.5'&gt;Calculates&lt;/text&gt;&#10;          &lt;text x='118' y='18' fill='#D9534F' fontSize='10.5'&gt;step&lt;/text&gt;&#10;        &lt;/g&gt;&#10;        &lt;g transform='translate(192,92)'&gt;&#10;          &lt;rect x='0' y='0' width='164' height='26' rx='4' fill='#FDF3F3' stroke='#D9534F' strokeWidth='1' /&gt;&#10;          &lt;text x='10' y='18' fill='#4A5568' fontSize='11.5'&gt;Authenticates&lt;/text&gt;&#10;          &lt;text x='118' y='18' fill='#D9534F' fontSize='10.5'&gt;include&lt;/text&gt;&#10;        &lt;/g&gt;&#10;        &lt;g transform='translate(366,92)'&gt;&#10;          &lt;rect x='0' y='0' width='164' height='26' rx='4' fill='#FDF3F3' stroke='#D9534F' strokeWidth='1' /&gt;&#10;          &lt;text x='10' y='18' fill='#4A5568' fontSize='11.5'&gt;Notifies&lt;/text&gt;&#10;          &lt;text x='118' y='18' fill='#D9534F' fontSize='10.5'&gt;external&lt;/text&gt;&#10;        &lt;/g&gt;&#10;&#10;        &lt;text x='18' y='136' fill='#8B97A8' fontSize='11'&gt;Three verbs survive as use cases. The other three go to the scenario text — Week 05.&lt;/text&gt;&#10;      &lt;/g&gt;&#10;    &lt;/svg&gt;&#10;  &lt;/Box&gt;&#10;  &lt;Box style={{ height: 34, padding: '0 40px', flexDirection: 'row', alignItems: 'center', justifyContent: 'space-between' }}&gt;&#10;    &lt;Text style={{ fontSize: 13, color: '#8B97A8' }}&gt;ISAD · Fall 2026 · The scan gives you candidates, not answers — you still have to say “is this a goal?”&lt;/Text&gt;&#10;    &lt;Text style={{ fontSize: 14, color: '#1E4FA8', fontWeight: 'bold' }}&gt;27 / 38&lt;/Text&gt;&#10;  &lt;/Box&gt;&#10;&lt;/Slide&gt;"/>
+        <p:cNvPr id="458" name=""/>
         <p:cNvGrpSpPr/>
         <p:nvPr/>
       </p:nvGrpSpPr>
@@ -19588,7 +20074,10 @@
         </p:spPr>
         <p:txBody>
           <a:bodyPr/>
-          <a:p/>
+          <a:p>
+            <a:pPr/>
+            <a:endParaRPr/>
+          </a:p>
         </p:txBody>
       </p:sp>
       <p:sp>
@@ -19612,7 +20101,10 @@
         </p:spPr>
         <p:txBody>
           <a:bodyPr/>
-          <a:p/>
+          <a:p>
+            <a:pPr/>
+            <a:endParaRPr/>
+          </a:p>
         </p:txBody>
       </p:sp>
       <p:sp>
@@ -19866,7 +20358,7 @@
   <p:cSld>
     <p:spTree>
       <p:nvGrpSpPr>
-        <p:cNvPr id="468" name="" descr="&lt;Slide style={{ background: '#FFFFFF', padding: 0 }}&gt;&#10;  &lt;Box style={{ height: 72, background: '#1E4FA8', padding: '0 40px', flexDirection: 'row', alignItems: 'center', justifyContent: 'space-between' }}&gt;&#10;    &lt;Text style={{ fontSize: 15, color: '#B9CDF0', letterSpacing: 1 }}&gt;ISAD · INFORMATION SYSTEMS ANALYSIS &amp;amp; DESIGN&lt;/Text&gt;&#10;    &lt;Text style={{ fontSize: 15, color: '#B9CDF0' }}&gt;W04 · FINDING USE CASES&lt;/Text&gt;&#10;  &lt;/Box&gt;&#10;  &lt;Box style={{ padding: '14px 40px 0 40px', flexDirection: 'row', alignItems: 'center', justifyContent: 'space-between' }}&gt;&#10;    &lt;Text style={{ fontSize: 29, fontWeight: 'bold', color: '#0E3F8C' }}&gt;Six Use Cases of CampusBites&lt;/Text&gt;&#10;    &lt;Text style={{ fontSize: 14, color: '#1E4FA8', fontWeight: 'bold' }}&gt;28 / 38&lt;/Text&gt;&#10;  &lt;/Box&gt;&#10;  &lt;Box style={{ flex: 1, padding: '14px 40px 0 40px', flexDirection: 'row', gap: 14 }}&gt;&#10;    {[&#10;      ['01', 'Place Order', 'Student', 'Ends when the order is accepted and paid for', '#1E4FA8'],&#10;      ['02', 'Pay for Order', 'Student', 'Ends when the provider confirms or declines', '#1E4FA8'],&#10;      ['03', 'Track Order', 'Student', 'Ends when the student sees the current status', '#1E4FA8'],&#10;      ['04', 'Manage Today’s Menu', 'Restaurant Manager', 'Ends when the kitchen sees the live menu', '#3D7BD9'],&#10;      ['05', 'Dispatch Courier', 'Dispatcher', 'Ends when a rider accepts the delivery', '#3D7BD9'],&#10;      ['06', 'Rate Restaurant', 'Student', 'Ends when the rating is stored and shown', '#3D7BD9'],&#10;    ].map((c) =&gt; (&#10;      &lt;Box key={c[0]} style={{ flex: 1, padding: '16px 14px', background: '#FFFFFF', borderRadius: 10, border: '1px solid #D6DCE5', borderTop: '4px solid #1E4FA8', flexDirection: 'column' }}&gt;&#10;        &lt;Text style={{ fontSize: 13, color: '#8B97A8', fontWeight: 'bold', letterSpacing: 1 }}&gt;{c[0]}&lt;/Text&gt;&#10;        &lt;Text style={{ fontSize: 15.5, fontWeight: 'bold', color: '#0E3F8C', marginTop: 6, lineHeight: 1.3 }}&gt;{c[1]}&lt;/Text&gt;&#10;        &lt;Box style={{ marginTop: 10, padding: '4px 8px', background: '#F0F5FC', borderRadius: 4, alignSelf: 'flex-start' }}&gt;&#10;          &lt;Text style={{ fontSize: 11.5, color: '#1E4FA8', fontWeight: 'bold' }}&gt;{c[2]}&lt;/Text&gt;&#10;        &lt;/Box&gt;&#10;        &lt;Text style={{ fontSize: 11.5, color: '#4A5568', lineHeight: 1.5, marginTop: 10 }}&gt;{c[3]}&lt;/Text&gt;&#10;      &lt;/Box&gt;&#10;    ))}&#10;  &lt;/Box&gt;&#10;  &lt;Box style={{ height: 46, background: '#0E3F8C', padding: '0 40px', flexDirection: 'row', alignItems: 'center', justifyContent: 'center' }}&gt;&#10;    &lt;Text style={{ fontSize: 16, color: '#FFFFFF', fontWeight: '600' }}&gt;Six is the right number for a first pass. If your M1 diagram has twenty, look for the CRUD trap.&lt;/Text&gt;&#10;  &lt;/Box&gt;&#10;&lt;/Slide&gt;"/>
+        <p:cNvPr id="468" name=""/>
         <p:cNvGrpSpPr/>
         <p:nvPr/>
       </p:nvGrpSpPr>
@@ -19899,7 +20391,10 @@
         </p:spPr>
         <p:txBody>
           <a:bodyPr/>
-          <a:p/>
+          <a:p>
+            <a:pPr/>
+            <a:endParaRPr/>
+          </a:p>
         </p:txBody>
       </p:sp>
       <p:sp>
@@ -19923,7 +20418,10 @@
         </p:spPr>
         <p:txBody>
           <a:bodyPr/>
-          <a:p/>
+          <a:p>
+            <a:pPr/>
+            <a:endParaRPr/>
+          </a:p>
         </p:txBody>
       </p:sp>
       <p:sp>
@@ -20089,7 +20587,10 @@
         </p:spPr>
         <p:txBody>
           <a:bodyPr/>
-          <a:p/>
+          <a:p>
+            <a:pPr/>
+            <a:endParaRPr/>
+          </a:p>
         </p:txBody>
       </p:sp>
       <p:sp>
@@ -20146,7 +20647,10 @@
         </p:spPr>
         <p:txBody>
           <a:bodyPr/>
-          <a:p/>
+          <a:p>
+            <a:pPr/>
+            <a:endParaRPr/>
+          </a:p>
         </p:txBody>
       </p:sp>
       <p:sp>
@@ -20242,7 +20746,10 @@
         </p:spPr>
         <p:txBody>
           <a:bodyPr/>
-          <a:p/>
+          <a:p>
+            <a:pPr/>
+            <a:endParaRPr/>
+          </a:p>
         </p:txBody>
       </p:sp>
       <p:sp>
@@ -20340,7 +20847,10 @@
         </p:spPr>
         <p:txBody>
           <a:bodyPr/>
-          <a:p/>
+          <a:p>
+            <a:pPr/>
+            <a:endParaRPr/>
+          </a:p>
         </p:txBody>
       </p:sp>
       <p:sp>
@@ -20397,7 +20907,10 @@
         </p:spPr>
         <p:txBody>
           <a:bodyPr/>
-          <a:p/>
+          <a:p>
+            <a:pPr/>
+            <a:endParaRPr/>
+          </a:p>
         </p:txBody>
       </p:sp>
       <p:sp>
@@ -20493,7 +21006,10 @@
         </p:spPr>
         <p:txBody>
           <a:bodyPr/>
-          <a:p/>
+          <a:p>
+            <a:pPr/>
+            <a:endParaRPr/>
+          </a:p>
         </p:txBody>
       </p:sp>
       <p:sp>
@@ -20591,7 +21107,10 @@
         </p:spPr>
         <p:txBody>
           <a:bodyPr/>
-          <a:p/>
+          <a:p>
+            <a:pPr/>
+            <a:endParaRPr/>
+          </a:p>
         </p:txBody>
       </p:sp>
       <p:sp>
@@ -20648,7 +21167,10 @@
         </p:spPr>
         <p:txBody>
           <a:bodyPr/>
-          <a:p/>
+          <a:p>
+            <a:pPr/>
+            <a:endParaRPr/>
+          </a:p>
         </p:txBody>
       </p:sp>
       <p:sp>
@@ -20744,7 +21266,10 @@
         </p:spPr>
         <p:txBody>
           <a:bodyPr/>
-          <a:p/>
+          <a:p>
+            <a:pPr/>
+            <a:endParaRPr/>
+          </a:p>
         </p:txBody>
       </p:sp>
       <p:sp>
@@ -20842,7 +21367,10 @@
         </p:spPr>
         <p:txBody>
           <a:bodyPr/>
-          <a:p/>
+          <a:p>
+            <a:pPr/>
+            <a:endParaRPr/>
+          </a:p>
         </p:txBody>
       </p:sp>
       <p:sp>
@@ -20899,7 +21427,10 @@
         </p:spPr>
         <p:txBody>
           <a:bodyPr/>
-          <a:p/>
+          <a:p>
+            <a:pPr/>
+            <a:endParaRPr/>
+          </a:p>
         </p:txBody>
       </p:sp>
       <p:sp>
@@ -20997,7 +21528,10 @@
         </p:spPr>
         <p:txBody>
           <a:bodyPr/>
-          <a:p/>
+          <a:p>
+            <a:pPr/>
+            <a:endParaRPr/>
+          </a:p>
         </p:txBody>
       </p:sp>
       <p:sp>
@@ -21095,7 +21629,10 @@
         </p:spPr>
         <p:txBody>
           <a:bodyPr/>
-          <a:p/>
+          <a:p>
+            <a:pPr/>
+            <a:endParaRPr/>
+          </a:p>
         </p:txBody>
       </p:sp>
       <p:sp>
@@ -21152,7 +21689,10 @@
         </p:spPr>
         <p:txBody>
           <a:bodyPr/>
-          <a:p/>
+          <a:p>
+            <a:pPr/>
+            <a:endParaRPr/>
+          </a:p>
         </p:txBody>
       </p:sp>
       <p:sp>
@@ -21248,7 +21788,10 @@
         </p:spPr>
         <p:txBody>
           <a:bodyPr/>
-          <a:p/>
+          <a:p>
+            <a:pPr/>
+            <a:endParaRPr/>
+          </a:p>
         </p:txBody>
       </p:sp>
       <p:sp>
@@ -21346,7 +21889,10 @@
         </p:spPr>
         <p:txBody>
           <a:bodyPr/>
-          <a:p/>
+          <a:p>
+            <a:pPr/>
+            <a:endParaRPr/>
+          </a:p>
         </p:txBody>
       </p:sp>
       <p:sp>
@@ -21403,7 +21949,10 @@
         </p:spPr>
         <p:txBody>
           <a:bodyPr/>
-          <a:p/>
+          <a:p>
+            <a:pPr/>
+            <a:endParaRPr/>
+          </a:p>
         </p:txBody>
       </p:sp>
       <p:sp>
@@ -21499,7 +22048,10 @@
         </p:spPr>
         <p:txBody>
           <a:bodyPr/>
-          <a:p/>
+          <a:p>
+            <a:pPr/>
+            <a:endParaRPr/>
+          </a:p>
         </p:txBody>
       </p:sp>
       <p:sp>
@@ -21595,7 +22147,10 @@
         </p:spPr>
         <p:txBody>
           <a:bodyPr/>
-          <a:p/>
+          <a:p>
+            <a:pPr/>
+            <a:endParaRPr/>
+          </a:p>
         </p:txBody>
       </p:sp>
       <p:sp>
@@ -21643,7 +22198,7 @@
   <p:cSld>
     <p:spTree>
       <p:nvGrpSpPr>
-        <p:cNvPr id="519" name="" descr="&lt;Slide style={{ background: '#FFFFFF', padding: 0 }}&gt;&#10;  &lt;Box style={{ height: 72, background: '#1E4FA8', padding: '0 40px', flexDirection: 'row', alignItems: 'center', justifyContent: 'space-between' }}&gt;&#10;    &lt;Text style={{ fontSize: 15, color: '#B9CDF0', letterSpacing: 1 }}&gt;ISAD · INFORMATION SYSTEMS ANALYSIS &amp;amp; DESIGN&lt;/Text&gt;&#10;    &lt;Text style={{ fontSize: 15, color: '#B9CDF0' }}&gt;W04 · FINDING USE CASES&lt;/Text&gt;&#10;  &lt;/Box&gt;&#10;  &lt;Box style={{ padding: '14px 40px 0 40px', flexDirection: 'row', alignItems: 'center', justifyContent: 'space-between' }}&gt;&#10;    &lt;Text style={{ fontSize: 29, fontWeight: 'bold', color: '#0E3F8C' }}&gt;What We Have Not Done Yet&lt;/Text&gt;&#10;    &lt;Text style={{ fontSize: 14, color: '#1E4FA8', fontWeight: 'bold' }}&gt;29 / 38&lt;/Text&gt;&#10;  &lt;/Box&gt;&#10;  &lt;Box style={{ flex: 1, padding: '16px 60px 0 60px', flexDirection: 'column', justifyContent: 'center', alignItems: 'center' }}&gt;&#10;    &lt;Box style={{ width: 960, padding: '20px 30px', background: '#FFF6E0', borderRadius: 10, borderLeft: '6px solid #FFC107', marginBottom: 20 }}&gt;&#10;      &lt;Text style={{ fontSize: 23, color: '#0E3F8C', fontWeight: 'bold', lineHeight: 1.4, textAlign: 'center' }}&gt;&#10;        A named ellipse is a promise to write something.&#10;        &lt;br /&gt;&#10;        The promise is kept next week.&#10;      &lt;/Text&gt;&#10;    &lt;/Box&gt;&#10;    &lt;Box style={{ width: 960, flexDirection: 'row', gap: 18 }}&gt;&#10;      &lt;Box style={{ flex: 1, padding: '20px 18px', background: '#FFFFFF', borderRadius: 10, border: '1px solid #D6DCE5' }}&gt;&#10;        &lt;Box style={{ flexDirection: 'row', alignItems: 'center', gap: 8, marginBottom: 8 }}&gt;&#10;          &lt;FAIcon name='info-circle' style={{ fill: '#1E4FA8', width: 20, height: 20 }} /&gt;&#10;          &lt;Text style={{ fontSize: 16, fontWeight: 'bold', color: '#0E3F8C' }}&gt;Not yet: the use case text&lt;/Text&gt;&#10;        &lt;/Box&gt;&#10;        &lt;Text style={{ fontSize: 12.8, color: '#4A5568', lineHeight: 1.65 }}&gt;&#10;          “Place Order” on a diagram tells you a goal exists. It does not tell you what happens when the card is declined, or what must be true before the student starts. That is the use case specification — &lt;Text style={{ fontWeight: 'bold', color: '#0E3F8C' }}&gt;Week 05&lt;/Text&gt;.&#10;        &lt;/Text&gt;&#10;      &lt;/Box&gt;&#10;      &lt;Box style={{ flex: 1, padding: '20px 18px', background: '#FFFFFF', borderRadius: 10, border: '1px solid #D6DCE5' }}&gt;&#10;        &lt;Box style={{ flexDirection: 'row', alignItems: 'center', gap: 8, marginBottom: 8 }}&gt;&#10;          &lt;FAIcon name='layer-group' style={{ fill: '#1E4FA8', width: 20, height: 20 }} /&gt;&#10;          &lt;Text style={{ fontSize: 16, fontWeight: 'bold', color: '#0E3F8C' }}&gt;Not yet: the domain model&lt;/Text&gt;&#10;        &lt;/Box&gt;&#10;        &lt;Text style={{ fontSize: 12.8, color: '#4A5568', lineHeight: 1.65 }}&gt;&#10;          Order, MenuItem and Courier are names on this page. Turning them into classes with attributes and associations is a different artefact — &lt;Text style={{ fontWeight: 'bold', color: '#0E3F8C' }}&gt;Week 06&lt;/Text&gt;. Resist the urge to draw boxes today.&#10;        &lt;/Text&gt;&#10;      &lt;/Box&gt;&#10;      &lt;Box style={{ flex: 1, padding: '20px 18px', background: '#F0F5FC', borderRadius: 10, border: '1px solid #1E4FA8' }}&gt;&#10;        &lt;Box style={{ flexDirection: 'row', alignItems: 'center', gap: 8, marginBottom: 8 }}&gt;&#10;          &lt;FAIcon name='handshake' style={{ fill: '#1E4FA8', width: 20, height: 20 }} /&gt;&#10;          &lt;Text style={{ fontSize: 16, fontWeight: 'bold', color: '#0E3F8C' }}&gt;Next week: you are the client&lt;/Text&gt;&#10;        &lt;/Box&gt;&#10;        &lt;Text style={{ fontSize: 12.8, color: '#4A5568', lineHeight: 1.65 }}&gt;&#10;          In Week 05 the instructor plays the client and reviews your pack with you. Bring a diagram you can defend, because the client will ask why “Manage Order” is on it.&#10;        &lt;/Text&gt;&#10;      &lt;/Box&gt;&#10;    &lt;/Box&gt;&#10;  &lt;/Box&gt;&#10;  &lt;Box style={{ height: 46, background: '#0E3F8C', padding: '0 40px', flexDirection: 'row', alignItems: 'center', justifyContent: 'center' }}&gt;&#10;    &lt;Text style={{ fontSize: 16, color: '#FFFFFF', fontWeight: '600' }}&gt;This week you find the goals. Next week you write them down so a stranger could build them.&lt;/Text&gt;&#10;  &lt;/Box&gt;&#10;&lt;/Slide&gt;"/>
+        <p:cNvPr id="519" name=""/>
         <p:cNvGrpSpPr/>
         <p:nvPr/>
       </p:nvGrpSpPr>
@@ -21676,7 +22231,10 @@
         </p:spPr>
         <p:txBody>
           <a:bodyPr/>
-          <a:p/>
+          <a:p>
+            <a:pPr/>
+            <a:endParaRPr/>
+          </a:p>
         </p:txBody>
       </p:sp>
       <p:sp>
@@ -21700,7 +22258,10 @@
         </p:spPr>
         <p:txBody>
           <a:bodyPr/>
-          <a:p/>
+          <a:p>
+            <a:pPr/>
+            <a:endParaRPr/>
+          </a:p>
         </p:txBody>
       </p:sp>
       <p:sp>
@@ -21866,7 +22427,10 @@
         </p:spPr>
         <p:txBody>
           <a:bodyPr/>
-          <a:p/>
+          <a:p>
+            <a:pPr/>
+            <a:endParaRPr/>
+          </a:p>
         </p:txBody>
       </p:sp>
       <p:sp>
@@ -21923,7 +22487,10 @@
         </p:spPr>
         <p:txBody>
           <a:bodyPr/>
-          <a:p/>
+          <a:p>
+            <a:pPr/>
+            <a:endParaRPr/>
+          </a:p>
         </p:txBody>
       </p:sp>
       <p:sp>
@@ -22007,7 +22574,10 @@
         </p:spPr>
         <p:txBody>
           <a:bodyPr/>
-          <a:p/>
+          <a:p>
+            <a:pPr/>
+            <a:endParaRPr/>
+          </a:p>
         </p:txBody>
       </p:sp>
       <p:pic>
@@ -22161,7 +22731,10 @@
         </p:spPr>
         <p:txBody>
           <a:bodyPr/>
-          <a:p/>
+          <a:p>
+            <a:pPr/>
+            <a:endParaRPr/>
+          </a:p>
         </p:txBody>
       </p:sp>
       <p:pic>
@@ -22315,7 +22888,10 @@
         </p:spPr>
         <p:txBody>
           <a:bodyPr/>
-          <a:p/>
+          <a:p>
+            <a:pPr/>
+            <a:endParaRPr/>
+          </a:p>
         </p:txBody>
       </p:sp>
       <p:pic>
@@ -22442,7 +23018,10 @@
         </p:spPr>
         <p:txBody>
           <a:bodyPr/>
-          <a:p/>
+          <a:p>
+            <a:pPr/>
+            <a:endParaRPr/>
+          </a:p>
         </p:txBody>
       </p:sp>
       <p:sp>
@@ -22490,7 +23069,7 @@
   <p:cSld>
     <p:spTree>
       <p:nvGrpSpPr>
-        <p:cNvPr id="543" name="" descr="&lt;Slide style={{ background: '#0E3F8C', padding: 0 }}&gt;&#10;  &lt;Box style={{ flexDirection: 'row', height: '100%', position: 'relative' }}&gt;&#10;    &lt;Box style={{ position: 'absolute', top: 0, left: 0, right: 0, height: 8, background: '#1E4FA8' }} /&gt;&#10;    &lt;Box style={{ width: 300, justifyContent: 'center', alignItems: 'center', borderRight: '1px solid #2B5793' }}&gt;&#10;      &lt;Text style={{ fontSize: 220, fontWeight: 'bold', color: '#3D7BD9', fontFamily: 'Georgia, serif', lineHeight: 1 }}&gt;01&lt;/Text&gt;&#10;    &lt;/Box&gt;&#10;    &lt;Box style={{ flex: 1, padding: '70px 64px', flexDirection: 'column', justifyContent: 'center' }}&gt;&#10;      &lt;Text style={{ fontSize: 15, color: '#7FA2D6', letterSpacing: 2, marginBottom: 18 }}&gt;PART 1 · LECTURE&lt;/Text&gt;&#10;      &lt;Text style={{ fontSize: 46, fontWeight: 'bold', color: '#FFFFFF', lineHeight: 1.18 }}&gt;Requirements,&lt;br /&gt;Briefly&lt;/Text&gt;&#10;      &lt;Box style={{ width: 64, height: 4, background: '#FFC107', marginTop: 26, marginBottom: 26 }} /&gt;&#10;      &lt;Box style={{ flexDirection: 'column', gap: 12 }}&gt;&#10;        {[&#10;          'The requirements pack arrives today',&#10;          'Functional says what, non-functional says how well',&#10;          'A requirement you cannot test is not a requirement',&#10;        ].map((t) =&gt; (&#10;          &lt;Box key={t} style={{ flexDirection: 'row', alignItems: 'center', gap: 12 }}&gt;&#10;            &lt;Box style={{ width: 8, height: 8, borderRadius: 4, background: '#3D7BD9' }} /&gt;&#10;            &lt;Text style={{ fontSize: 20, color: '#C5D4EA' }}&gt;{t}&lt;/Text&gt;&#10;          &lt;/Box&gt;&#10;        ))}&#10;      &lt;/Box&gt;&#10;    &lt;/Box&gt;&#10;  &lt;/Box&gt;&#10;&lt;/Slide&gt;"/>
+        <p:cNvPr id="543" name=""/>
         <p:cNvGrpSpPr/>
         <p:nvPr/>
       </p:nvGrpSpPr>
@@ -22523,7 +23102,10 @@
         </p:spPr>
         <p:txBody>
           <a:bodyPr/>
-          <a:p/>
+          <a:p>
+            <a:pPr/>
+            <a:endParaRPr/>
+          </a:p>
         </p:txBody>
       </p:sp>
       <p:sp>
@@ -22563,7 +23145,10 @@
         </p:spPr>
         <p:txBody>
           <a:bodyPr/>
-          <a:p/>
+          <a:p>
+            <a:pPr/>
+            <a:endParaRPr/>
+          </a:p>
         </p:txBody>
       </p:sp>
       <p:sp>
@@ -22710,7 +23295,10 @@
         </p:spPr>
         <p:txBody>
           <a:bodyPr/>
-          <a:p/>
+          <a:p>
+            <a:pPr/>
+            <a:endParaRPr/>
+          </a:p>
         </p:txBody>
       </p:sp>
       <p:sp>
@@ -22736,7 +23324,10 @@
         </p:spPr>
         <p:txBody>
           <a:bodyPr/>
-          <a:p/>
+          <a:p>
+            <a:pPr/>
+            <a:endParaRPr/>
+          </a:p>
         </p:txBody>
       </p:sp>
       <p:sp>
@@ -22797,7 +23388,10 @@
         </p:spPr>
         <p:txBody>
           <a:bodyPr/>
-          <a:p/>
+          <a:p>
+            <a:pPr/>
+            <a:endParaRPr/>
+          </a:p>
         </p:txBody>
       </p:sp>
       <p:sp>
@@ -22858,7 +23452,10 @@
         </p:spPr>
         <p:txBody>
           <a:bodyPr/>
-          <a:p/>
+          <a:p>
+            <a:pPr/>
+            <a:endParaRPr/>
+          </a:p>
         </p:txBody>
       </p:sp>
       <p:sp>
@@ -22917,7 +23514,10 @@
         </p:spPr>
         <p:txBody>
           <a:bodyPr/>
-          <a:p/>
+          <a:p>
+            <a:pPr/>
+            <a:endParaRPr/>
+          </a:p>
         </p:txBody>
       </p:sp>
     </p:spTree>
@@ -22930,7 +23530,7 @@
   <p:cSld>
     <p:spTree>
       <p:nvGrpSpPr>
-        <p:cNvPr id="557" name="" descr="&lt;Slide style={{ background: '#0E3F8C', padding: 0 }}&gt;&#10;  &lt;Box style={{ flexDirection: 'row', height: '100%', position: 'relative' }}&gt;&#10;    &lt;Box style={{ position: 'absolute', top: 0, left: 0, right: 0, height: 8, background: '#1E4FA8' }} /&gt;&#10;    &lt;Box style={{ width: 300, justifyContent: 'center', alignItems: 'center', borderRight: '1px solid #2B5793' }}&gt;&#10;      &lt;Text style={{ fontSize: 220, fontWeight: 'bold', color: '#3D7BD9', fontFamily: 'Georgia, serif', lineHeight: 1 }}&gt;06&lt;/Text&gt;&#10;    &lt;/Box&gt;&#10;    &lt;Box style={{ flex: 1, padding: '70px 64px', flexDirection: 'column', justifyContent: 'center' }}&gt;&#10;      &lt;Text style={{ fontSize: 15, color: '#7FA2D6', letterSpacing: 2, marginBottom: 18 }}&gt;PART 2 · LAB&lt;/Text&gt;&#10;      &lt;Text style={{ fontSize: 44, fontWeight: 'bold', color: '#FFFFFF', lineHeight: 1.18 }}&gt;Exercise 4.1,&lt;br /&gt;4.2 &amp;amp; M1&lt;/Text&gt;&#10;      &lt;Box style={{ width: 64, height: 4, background: '#FFC107', marginTop: 26, marginBottom: 26 }} /&gt;&#10;      &lt;Box style={{ flexDirection: 'column', gap: 12 }}&gt;&#10;        {[&#10;          'Read the narrative, find the actors and the goals',&#10;          'Draw the diagram — one include, one extend',&#10;          'M1 opens today and closes on Sunday 4 October',&#10;        ].map((t) =&gt; (&#10;          &lt;Box key={t} style={{ flexDirection: 'row', alignItems: 'center', gap: 12 }}&gt;&#10;            &lt;Box style={{ width: 8, height: 8, borderRadius: 4, background: '#3D7BD9' }} /&gt;&#10;            &lt;Text style={{ fontSize: 20, color: '#C5D4EA' }}&gt;{t}&lt;/Text&gt;&#10;          &lt;/Box&gt;&#10;        ))}&#10;      &lt;/Box&gt;&#10;    &lt;/Box&gt;&#10;  &lt;/Box&gt;&#10;&lt;/Slide&gt;"/>
+        <p:cNvPr id="557" name=""/>
         <p:cNvGrpSpPr/>
         <p:nvPr/>
       </p:nvGrpSpPr>
@@ -22963,7 +23563,10 @@
         </p:spPr>
         <p:txBody>
           <a:bodyPr/>
-          <a:p/>
+          <a:p>
+            <a:pPr/>
+            <a:endParaRPr/>
+          </a:p>
         </p:txBody>
       </p:sp>
       <p:sp>
@@ -23003,7 +23606,10 @@
         </p:spPr>
         <p:txBody>
           <a:bodyPr/>
-          <a:p/>
+          <a:p>
+            <a:pPr/>
+            <a:endParaRPr/>
+          </a:p>
         </p:txBody>
       </p:sp>
       <p:sp>
@@ -23150,7 +23756,10 @@
         </p:spPr>
         <p:txBody>
           <a:bodyPr/>
-          <a:p/>
+          <a:p>
+            <a:pPr/>
+            <a:endParaRPr/>
+          </a:p>
         </p:txBody>
       </p:sp>
       <p:sp>
@@ -23176,7 +23785,10 @@
         </p:spPr>
         <p:txBody>
           <a:bodyPr/>
-          <a:p/>
+          <a:p>
+            <a:pPr/>
+            <a:endParaRPr/>
+          </a:p>
         </p:txBody>
       </p:sp>
       <p:sp>
@@ -23237,7 +23849,10 @@
         </p:spPr>
         <p:txBody>
           <a:bodyPr/>
-          <a:p/>
+          <a:p>
+            <a:pPr/>
+            <a:endParaRPr/>
+          </a:p>
         </p:txBody>
       </p:sp>
       <p:sp>
@@ -23298,7 +23913,10 @@
         </p:spPr>
         <p:txBody>
           <a:bodyPr/>
-          <a:p/>
+          <a:p>
+            <a:pPr/>
+            <a:endParaRPr/>
+          </a:p>
         </p:txBody>
       </p:sp>
       <p:sp>
@@ -23357,7 +23975,10 @@
         </p:spPr>
         <p:txBody>
           <a:bodyPr/>
-          <a:p/>
+          <a:p>
+            <a:pPr/>
+            <a:endParaRPr/>
+          </a:p>
         </p:txBody>
       </p:sp>
     </p:spTree>
@@ -23370,7 +23991,7 @@
   <p:cSld>
     <p:spTree>
       <p:nvGrpSpPr>
-        <p:cNvPr id="571" name="" descr="&lt;Slide style={{ background: '#FFFFFF', padding: 0 }}&gt;&#10;  &lt;Box style={{ height: 72, background: '#1E4FA8', padding: '0 40px', flexDirection: 'row', alignItems: 'center', justifyContent: 'space-between' }}&gt;&#10;    &lt;Text style={{ fontSize: 15, color: '#B9CDF0', letterSpacing: 1 }}&gt;ISAD · INFORMATION SYSTEMS ANALYSIS &amp;amp; DESIGN&lt;/Text&gt;&#10;    &lt;Text style={{ fontSize: 15, color: '#B9CDF0' }}&gt;W04 · LAB · EXERCISE 4.1&lt;/Text&gt;&#10;  &lt;/Box&gt;&#10;  &lt;Box style={{ padding: '14px 40px 0 40px', flexDirection: 'row', alignItems: 'center', justifyContent: 'space-between' }}&gt;&#10;    &lt;Text style={{ fontSize: 29, fontWeight: 'bold', color: '#0E3F8C' }}&gt;Exercise 4.1 — The Narrative&lt;/Text&gt;&#10;    &lt;Text style={{ fontSize: 14, color: '#1E4FA8', fontWeight: 'bold' }}&gt;31 / 38&lt;/Text&gt;&#10;  &lt;/Box&gt;&#10;  &lt;Box style={{ flex: 1, padding: '10px 40px 0 40px', flexDirection: 'row', gap: 26 }}&gt;&#10;    &lt;Box style={{ flex: 5, justifyContent: 'center' }}&gt;&#10;      &lt;CodeBlock theme='one-dark-pro' code={`CampusBites — Requirements Pack, section 2.1 (extract)&#10;&#10;Students on the Dalian campus order lunch from the&#10;restaurants on campus. A student opens the app, browses&#10;today's menu of a restaurant, selects items, and places&#10;an order. The system authenticates the student against&#10;the campus card centre, calculates the total, and&#10;charges the campus card, a wallet, or cash on delivery.&#10;&#10;Restaurant staff keep the menu current. A manager marks&#10;an item sold out before service starts; the kitchen&#10;receives the order on a wall tablet. When an order is&#10;ready, a dispatcher assigns a courier. The courier picks&#10;up the order, delivers it to the student, and confirms&#10;the delivery in the app.&#10;&#10;After delivery the student may rate the restaurant and&#10;the courier. The platform administrator can suspend a&#10;restaurant that receives three ratings below two stars&#10;in one week. Every evening at 23:00 the system closes&#10;the day and emails a sales report to each restaurant.`} language='text' /&gt;&#10;    &lt;/Box&gt;&#10;    &lt;Box style={{ flex: 2, flexDirection: 'column', justifyContent: 'center', gap: 12 }}&gt;&#10;      &lt;Box style={{ padding: '15px 17px', background: '#F0F5FC', borderRadius: 9, borderLeft: '4px solid #1E4FA8' }}&gt;&#10;        &lt;Text style={{ fontSize: 15.5, fontWeight: 'bold', color: '#0E3F8C' }}&gt;This is real&lt;/Text&gt;&#10;        &lt;Text style={{ fontSize: 12.8, color: '#4A5568', lineHeight: 1.6, marginTop: 5 }}&gt;&#10;          This is the extract your team has in the pack. The full version has four more paragraphs; the lab works on this one.&#10;        &lt;/Text&gt;&#10;      &lt;/Box&gt;&#10;      &lt;Box style={{ padding: '15px 17px', background: '#FFF6E0', borderRadius: 9, borderLeft: '4px solid #FFC107' }}&gt;&#10;        &lt;Text style={{ fontSize: 15.5, fontWeight: 'bold', color: '#996F00' }}&gt;Read it twice&lt;/Text&gt;&#10;        &lt;Text style={{ fontSize: 12.8, color: '#4A5568', lineHeight: 1.6, marginTop: 5 }}&gt;&#10;          First time for the story. Second time with a pen, marking nouns and verbs as we did on page 27.&#10;        &lt;/Text&gt;&#10;      &lt;/Box&gt;&#10;      &lt;Box style={{ padding: '15px 17px', background: '#FFFFFF', borderRadius: 9, border: '1px dashed #D6DCE5' }}&gt;&#10;        &lt;Text style={{ fontSize: 12.8, color: '#8B97A8', lineHeight: 1.6 }}&gt;&#10;          Do not start drawing yet. A diagram drawn from a half-read paragraph has to be drawn twice.&#10;        &lt;/Text&gt;&#10;      &lt;/Box&gt;&#10;    &lt;/Box&gt;&#10;  &lt;/Box&gt;&#10;  &lt;Box style={{ height: 46, background: '#0E3F8C', padding: '0 40px', flexDirection: 'row', alignItems: 'center', justifyContent: 'center' }}&gt;&#10;    &lt;Text style={{ fontSize: 16, color: '#FFFFFF', fontWeight: '600' }}&gt;Fifteen minutes with the text. It is the cheapest fifteen minutes you will spend this week.&lt;/Text&gt;&#10;  &lt;/Box&gt;&#10;&lt;/Slide&gt;"/>
+        <p:cNvPr id="571" name=""/>
         <p:cNvGrpSpPr/>
         <p:nvPr/>
       </p:nvGrpSpPr>
@@ -23403,7 +24024,10 @@
         </p:spPr>
         <p:txBody>
           <a:bodyPr/>
-          <a:p/>
+          <a:p>
+            <a:pPr/>
+            <a:endParaRPr/>
+          </a:p>
         </p:txBody>
       </p:sp>
       <p:sp>
@@ -23427,7 +24051,10 @@
         </p:spPr>
         <p:txBody>
           <a:bodyPr/>
-          <a:p/>
+          <a:p>
+            <a:pPr/>
+            <a:endParaRPr/>
+          </a:p>
         </p:txBody>
       </p:sp>
       <p:sp>
@@ -23593,7 +24220,10 @@
         </p:spPr>
         <p:txBody>
           <a:bodyPr/>
-          <a:p/>
+          <a:p>
+            <a:pPr/>
+            <a:endParaRPr/>
+          </a:p>
         </p:txBody>
       </p:sp>
       <p:sp>
@@ -23650,7 +24280,10 @@
         </p:spPr>
         <p:txBody>
           <a:bodyPr/>
-          <a:p/>
+          <a:p>
+            <a:pPr/>
+            <a:endParaRPr/>
+          </a:p>
         </p:txBody>
       </p:sp>
       <p:sp>
@@ -23748,7 +24381,10 @@
         </p:spPr>
         <p:txBody>
           <a:bodyPr/>
-          <a:p/>
+          <a:p>
+            <a:pPr/>
+            <a:endParaRPr/>
+          </a:p>
         </p:txBody>
       </p:sp>
       <p:sp>
@@ -23805,7 +24441,10 @@
         </p:spPr>
         <p:txBody>
           <a:bodyPr/>
-          <a:p/>
+          <a:p>
+            <a:pPr/>
+            <a:endParaRPr/>
+          </a:p>
         </p:txBody>
       </p:sp>
       <p:sp>
@@ -23908,7 +24547,10 @@
         </p:spPr>
         <p:txBody>
           <a:bodyPr/>
-          <a:p/>
+          <a:p>
+            <a:pPr/>
+            <a:endParaRPr/>
+          </a:p>
         </p:txBody>
       </p:sp>
       <p:sp>
@@ -23969,7 +24611,10 @@
         </p:spPr>
         <p:txBody>
           <a:bodyPr/>
-          <a:p/>
+          <a:p>
+            <a:pPr/>
+            <a:endParaRPr/>
+          </a:p>
         </p:txBody>
       </p:sp>
       <p:sp>
@@ -24030,7 +24675,10 @@
         </p:spPr>
         <p:txBody>
           <a:bodyPr/>
-          <a:p/>
+          <a:p>
+            <a:pPr/>
+            <a:endParaRPr/>
+          </a:p>
         </p:txBody>
       </p:sp>
       <p:sp>
@@ -24093,7 +24741,7 @@
   <p:cSld>
     <p:spTree>
       <p:nvGrpSpPr>
-        <p:cNvPr id="592" name="" descr="&lt;Slide style={{ background: '#FFFFFF', padding: 0 }}&gt;&#10;  &lt;Box style={{ height: 72, background: '#1E4FA8', padding: '0 40px', flexDirection: 'row', alignItems: 'center', justifyContent: 'space-between' }}&gt;&#10;    &lt;Text style={{ fontSize: 15, color: '#B9CDF0', letterSpacing: 1 }}&gt;ISAD · INFORMATION SYSTEMS ANALYSIS &amp;amp; DESIGN&lt;/Text&gt;&#10;    &lt;Text style={{ fontSize: 15, color: '#B9CDF0' }}&gt;W04 · LAB · EXERCISE 4.1&lt;/Text&gt;&#10;  &lt;/Box&gt;&#10;  &lt;Box style={{ padding: '14px 40px 0 40px', flexDirection: 'row', alignItems: 'center', justifyContent: 'space-between' }}&gt;&#10;    &lt;Text style={{ fontSize: 29, fontWeight: 'bold', color: '#0E3F8C' }}&gt;Exercise 4.1 — Your Turn&lt;/Text&gt;&#10;    &lt;Text style={{ fontSize: 14, color: '#1E4FA8', fontWeight: 'bold' }}&gt;32 / 38&lt;/Text&gt;&#10;  &lt;/Box&gt;&#10;  &lt;Box style={{ flex: 1, padding: '14px 40px 0 40px', flexDirection: 'row', gap: 24 }}&gt;&#10;    &lt;Box style={{ flex: 1, flexDirection: 'column', gap: 12 }}&gt;&#10;      &lt;Box style={{ padding: '18px 18px', background: '#F0F5FC', borderRadius: 10, borderLeft: '4px solid #1E4FA8' }}&gt;&#10;        &lt;Text style={{ fontSize: 16, fontWeight: 'bold', color: '#0E3F8C' }}&gt;A · List the actors&lt;/Text&gt;&#10;        &lt;Text style={{ fontSize: 13, color: '#4A5568', lineHeight: 1.6, marginTop: 6 }}&gt;&#10;          Every role that stands outside CampusBites and talks to it. Name roles, not people — and include the systems that serve you.&#10;        &lt;/Text&gt;&#10;        &lt;Text style={{ fontSize: 12.5, color: '#8B97A8', marginTop: 8 }}&gt;Target: five to seven.&lt;/Text&gt;&#10;      &lt;/Box&gt;&#10;      &lt;Box style={{ padding: '18px 18px', background: '#F0F5FC', borderRadius: 10, borderLeft: '4px solid #1E4FA8' }}&gt;&#10;        &lt;Text style={{ fontSize: 16, fontWeight: 'bold', color: '#0E3F8C' }}&gt;B · List candidate use cases&lt;/Text&gt;&#10;        &lt;Text style={{ fontSize: 13, color: '#4A5568', lineHeight: 1.6, marginTop: 6 }}&gt;&#10;          Take the verbs from the narrative and keep only those that name a goal somebody has. Write them verb plus object.&#10;        &lt;/Text&gt;&#10;        &lt;Text style={{ fontSize: 12.5, color: '#8B97A8', marginTop: 8 }}&gt;Target: nine candidates before filtering.&lt;/Text&gt;&#10;      &lt;/Box&gt;&#10;    &lt;/Box&gt;&#10;    &lt;Box style={{ flex: 1, flexDirection: 'column', gap: 12 }}&gt;&#10;      &lt;Box style={{ padding: '18px 18px', background: '#FFFFFF', borderRadius: 10, border: '1px solid #D6DCE5' }}&gt;&#10;        &lt;Text style={{ fontSize: 16, fontWeight: 'bold', color: '#0E3F8C' }}&gt;C · Mark primary and secondary&lt;/Text&gt;&#10;        &lt;Text style={{ fontSize: 13, color: '#4A5568', lineHeight: 1.6, marginTop: 6 }}&gt;&#10;          For each actor, say whether they start use cases (primary) or are called by the system (secondary). Write the goal they own.&#10;        &lt;/Text&gt;&#10;      &lt;/Box&gt;&#10;      &lt;Box style={{ padding: '18px 18px', background: '#FFFFFF', borderRadius: 10, border: '1px solid #D6DCE5' }}&gt;&#10;        &lt;Text style={{ fontSize: 16, fontWeight: 'bold', color: '#0E3F8C' }}&gt;D · Filter the candidates&lt;/Text&gt;&#10;        &lt;Text style={{ fontSize: 13, color: '#4A5568', lineHeight: 1.6, marginTop: 6 }}&gt;&#10;          For each of the nine, answer in one line: is this a user goal, or a step inside one? Keep the goals; park the steps.&#10;        &lt;/Text&gt;&#10;      &lt;/Box&gt;&#10;      &lt;Box style={{ padding: '16px 18px', background: '#FFF6E0', borderRadius: 9, border: '1px solid #FFC107' }}&gt;&#10;        &lt;Text style={{ fontSize: 13, color: '#4A5568', lineHeight: 1.6 }}&gt;&#10;          &lt;Text style={{ fontWeight: 'bold', color: '#996F00' }}&gt;Work in your team. &lt;/Text&gt;&#10;          One page, two columns, twenty-five minutes. Answers on the next two pages — do not turn the page early.&#10;        &lt;/Text&gt;&#10;      &lt;/Box&gt;&#10;    &lt;/Box&gt;&#10;  &lt;/Box&gt;&#10;  &lt;Box style={{ height: 46, background: '#0E3F8C', padding: '0 40px', flexDirection: 'row', alignItems: 'center', justifyContent: 'center' }}&gt;&#10;    &lt;Text style={{ fontSize: 16, color: '#FFFFFF', fontWeight: '600' }}&gt;Twenty-five minutes. One page for the four of you — then each person defends one row you disagreed on.&lt;/Text&gt;&#10;  &lt;/Box&gt;&#10;&lt;/Slide&gt;"/>
+        <p:cNvPr id="592" name=""/>
         <p:cNvGrpSpPr/>
         <p:nvPr/>
       </p:nvGrpSpPr>
@@ -24126,7 +24774,10 @@
         </p:spPr>
         <p:txBody>
           <a:bodyPr/>
-          <a:p/>
+          <a:p>
+            <a:pPr/>
+            <a:endParaRPr/>
+          </a:p>
         </p:txBody>
       </p:sp>
       <p:sp>
@@ -24150,7 +24801,10 @@
         </p:spPr>
         <p:txBody>
           <a:bodyPr/>
-          <a:p/>
+          <a:p>
+            <a:pPr/>
+            <a:endParaRPr/>
+          </a:p>
         </p:txBody>
       </p:sp>
       <p:sp>
@@ -24316,7 +24970,10 @@
         </p:spPr>
         <p:txBody>
           <a:bodyPr/>
-          <a:p/>
+          <a:p>
+            <a:pPr/>
+            <a:endParaRPr/>
+          </a:p>
         </p:txBody>
       </p:sp>
       <p:sp>
@@ -24373,7 +25030,10 @@
         </p:spPr>
         <p:txBody>
           <a:bodyPr/>
-          <a:p/>
+          <a:p>
+            <a:pPr/>
+            <a:endParaRPr/>
+          </a:p>
         </p:txBody>
       </p:sp>
       <p:sp>
@@ -24506,7 +25166,10 @@
         </p:spPr>
         <p:txBody>
           <a:bodyPr/>
-          <a:p/>
+          <a:p>
+            <a:pPr/>
+            <a:endParaRPr/>
+          </a:p>
         </p:txBody>
       </p:sp>
       <p:sp>
@@ -24563,7 +25226,10 @@
         </p:spPr>
         <p:txBody>
           <a:bodyPr/>
-          <a:p/>
+          <a:p>
+            <a:pPr/>
+            <a:endParaRPr/>
+          </a:p>
         </p:txBody>
       </p:sp>
       <p:sp>
@@ -24701,7 +25367,10 @@
         </p:spPr>
         <p:txBody>
           <a:bodyPr/>
-          <a:p/>
+          <a:p>
+            <a:pPr/>
+            <a:endParaRPr/>
+          </a:p>
         </p:txBody>
       </p:sp>
       <p:sp>
@@ -24804,7 +25473,10 @@
         </p:spPr>
         <p:txBody>
           <a:bodyPr/>
-          <a:p/>
+          <a:p>
+            <a:pPr/>
+            <a:endParaRPr/>
+          </a:p>
         </p:txBody>
       </p:sp>
       <p:sp>
@@ -24907,7 +25579,10 @@
         </p:spPr>
         <p:txBody>
           <a:bodyPr/>
-          <a:p/>
+          <a:p>
+            <a:pPr/>
+            <a:endParaRPr/>
+          </a:p>
         </p:txBody>
       </p:sp>
       <p:sp>
@@ -24978,7 +25653,10 @@
         </p:spPr>
         <p:txBody>
           <a:bodyPr/>
-          <a:p/>
+          <a:p>
+            <a:pPr/>
+            <a:endParaRPr/>
+          </a:p>
         </p:txBody>
       </p:sp>
       <p:sp>
@@ -25026,7 +25704,7 @@
   <p:cSld>
     <p:spTree>
       <p:nvGrpSpPr>
-        <p:cNvPr id="619" name="" descr="&lt;Slide style={{ background: '#FFFFFF', padding: 0 }}&gt;&#10;  &lt;Box style={{ height: 72, background: '#1E4FA8', padding: '0 40px', flexDirection: 'row', alignItems: 'center', justifyContent: 'space-between' }}&gt;&#10;    &lt;Text style={{ fontSize: 15, color: '#B9CDF0', letterSpacing: 1 }}&gt;ISAD · INFORMATION SYSTEMS ANALYSIS &amp;amp; DESIGN&lt;/Text&gt;&#10;    &lt;Text style={{ fontSize: 15, color: '#B9CDF0' }}&gt;W04 · LAB · EXERCISE 4.1&lt;/Text&gt;&#10;  &lt;/Box&gt;&#10;  &lt;Box style={{ padding: '14px 40px 0 40px', flexDirection: 'row', alignItems: 'center', justifyContent: 'space-between' }}&gt;&#10;    &lt;Text style={{ fontSize: 29, fontWeight: 'bold', color: '#0E3F8C' }}&gt;Exercise 4.1 — Actors, Answered&lt;/Text&gt;&#10;    &lt;Text style={{ fontSize: 14, color: '#1E4FA8', fontWeight: 'bold' }}&gt;33 / 38&lt;/Text&gt;&#10;  &lt;/Box&gt;&#10;  &lt;Box style={{ flex: 1, padding: '10px 40px 6px 40px' }}&gt;&#10;    &lt;Table&#10;      style={{ width: '100%', height: '100%' }}&#10;      defaultTextStyle={{ fontSize: 13, textAlign: 'left', color: '#1A2230' }}&#10;      defaultCellStyle={{&#10;        border: {&#10;          left: { width: 1, color: '#E5E7EB' },&#10;          right: { width: 1, color: '#E5E7EB' },&#10;          top: { width: 1, color: '#E5E7EB' },&#10;          bottom: { width: 1, color: '#E5E7EB' },&#10;        },&#10;      }}&#10;      cells={[&#10;        [&#10;          { text: 'Actor', textStyle: { bold: true, color: '#FFFFFF' }, cellStyle: { background: { color: '#0E3F8C' } } },&#10;          { text: 'Primary / secondary', textStyle: { bold: true, color: '#FFFFFF' }, cellStyle: { background: { color: '#0E3F8C' } } },&#10;          { text: 'The goal they own', textStyle: { bold: true, color: '#FFFFFF' }, cellStyle: { background: { color: '#1E4FA8' } } },&#10;          { text: 'Why they are here', textStyle: { bold: true, color: '#FFFFFF' }, cellStyle: { background: { color: '#1E4FA8' } } },&#10;        ],&#10;        [&#10;          { text: 'Student', textStyle: { bold: true, color: '#0E3F8C' }, cellStyle: { background: { color: '#F7F9FC' } } },&#10;          { text: 'Primary', textStyle: { color: '#1E4FA8', bold: true }, cellStyle: { background: { color: '#F7F9FC' } } },&#10;          { text: 'Order lunch, pay for it, and know where it is', textStyle: { color: '#4A5568' }, cellStyle: { background: { color: '#F7F9FC' } } },&#10;          { text: 'The reason the platform exists', textStyle: { color: '#4A5568' }, cellStyle: { background: { color: '#F7F9FC' } } },&#10;        ],&#10;        [&#10;          { text: 'Restaurant Manager', textStyle: { bold: true, color: '#0E3F8C' } },&#10;          { text: 'Primary', textStyle: { color: '#1E4FA8', bold: true } },&#10;          { text: 'Keep today’s menu true to the kitchen', textStyle: { color: '#4A5568' } },&#10;          { text: 'Marks items sold out before service', textStyle: { color: '#4A5568' } },&#10;        ],&#10;        [&#10;          { text: 'Kitchen Staff', textStyle: { bold: true, color: '#0E3F8C' }, cellStyle: { background: { color: '#F7F9FC' } } },&#10;          { text: 'Primary', textStyle: { color: '#1E4FA8', bold: true }, cellStyle: { background: { color: '#F7F9FC' } } },&#10;          { text: 'Receive an order and mark it ready', textStyle: { color: '#4A5568' }, cellStyle: { background: { color: '#F7F9FC' } } },&#10;          { text: 'Works from the wall tablet, not a phone', textStyle: { color: '#4A5568' }, cellStyle: { background: { color: '#F7F9FC' } } },&#10;        ],&#10;        [&#10;          { text: 'Dispatcher', textStyle: { bold: true, color: '#0E3F8C' } },&#10;          { text: 'Primary', textStyle: { color: '#1E4FA8', bold: true } },&#10;          { text: 'Get a ready order onto a courier', textStyle: { color: '#4A5568' } },&#10;          { text: 'Assigns, and reassigns when a rider is late', textStyle: { color: '#4A5568' } },&#10;        ],&#10;        [&#10;          { text: 'Courier', textStyle: { bold: true, color: '#0E3F8C' }, cellStyle: { background: { color: '#F7F9FC' } } },&#10;          { text: 'Primary', textStyle: { color: '#1E4FA8', bold: true }, cellStyle: { background: { color: '#F7F9FC' } } },&#10;          { text: 'Deliver an order and prove it arrived', textStyle: { color: '#4A5568' }, cellStyle: { background: { color: '#F7F9FC' } } },&#10;          { text: 'Confirms delivery in the app', textStyle: { color: '#4A5568' }, cellStyle: { background: { color: '#F7F9FC' } } },&#10;        ],&#10;        [&#10;          { text: 'Platform Administrator', textStyle: { bold: true, color: '#0E3F8C' } },&#10;          { text: 'Primary', textStyle: { color: '#1E4FA8', bold: true } },&#10;          { text: 'Protect students from failing restaurants', textStyle: { color: '#4A5568' } },&#10;          { text: 'Suspends after three ratings below two stars', textStyle: { color: '#4A5568' } },&#10;        ],&#10;        [&#10;          { text: 'Campus Card Centre', textStyle: { bold: true, color: '#8B97A8' }, cellStyle: { background: { color: '#F7F9FC' } } },&#10;          { text: 'Secondary', textStyle: { color: '#8B97A8', bold: true }, cellStyle: { background: { color: '#F7F9FC' } } },&#10;          { text: 'None of its own — it serves us', textStyle: { color: '#4A5568' }, cellStyle: { background: { color: '#F7F9FC' } } },&#10;          { text: 'Authenticates the student and clears the charge', textStyle: { color: '#4A5568' }, cellStyle: { background: { color: '#F7F9FC' } } },&#10;        ],&#10;        [&#10;          { text: 'Payment Provider', textStyle: { bold: true, color: '#8B97A8' } },&#10;          { text: 'Secondary', textStyle: { color: '#8B97A8', bold: true } },&#10;          { text: 'None of its own', textStyle: { color: '#4A5568' } },&#10;          { text: 'Takes wallet payments; tells us yes or no', textStyle: { color: '#4A5568' } },&#10;        ],&#10;        [&#10;          { text: 'Email Service', textStyle: { bold: true, color: '#8B97A8' }, cellStyle: { background: { color: '#F7F9FC' } } },&#10;          { text: 'Secondary', textStyle: { color: '#8B97A8', bold: true }, cellStyle: { background: { color: '#F7F9FC' } } },&#10;          { text: 'None of its own', textStyle: { color: '#4A5568' }, cellStyle: { background: { color: '#F7F9FC' } } },&#10;          { text: 'Carries the 23:00 sales report to each restaurant', textStyle: { color: '#4A5568' }, cellStyle: { background: { color: '#F7F9FC' } } },&#10;        ],&#10;      ]}&#10;    /&gt;&#10;  &lt;/Box&gt;&#10;  &lt;Box style={{ height: 46, background: '#0E3F8C', padding: '0 40px', flexDirection: 'row', alignItems: 'center', justifyContent: 'center' }}&gt;&#10;    &lt;Text style={{ fontSize: 15.5, color: '#FFFFFF', fontWeight: '600' }}&gt;The trap: authenticate and charge are things the card centre does for us — they are actors, never our use cases.&lt;/Text&gt;&#10;  &lt;/Box&gt;&#10;&lt;/Slide&gt;"/>
+        <p:cNvPr id="619" name=""/>
         <p:cNvGrpSpPr/>
         <p:nvPr/>
       </p:nvGrpSpPr>
@@ -25059,7 +25737,10 @@
         </p:spPr>
         <p:txBody>
           <a:bodyPr/>
-          <a:p/>
+          <a:p>
+            <a:pPr/>
+            <a:endParaRPr/>
+          </a:p>
         </p:txBody>
       </p:sp>
       <p:sp>
@@ -25083,7 +25764,10 @@
         </p:spPr>
         <p:txBody>
           <a:bodyPr/>
-          <a:p/>
+          <a:p>
+            <a:pPr/>
+            <a:endParaRPr/>
+          </a:p>
         </p:txBody>
       </p:sp>
       <p:sp>
@@ -26996,7 +27680,10 @@
         </p:spPr>
         <p:txBody>
           <a:bodyPr/>
-          <a:p/>
+          <a:p>
+            <a:pPr/>
+            <a:endParaRPr/>
+          </a:p>
         </p:txBody>
       </p:sp>
       <p:sp>
@@ -27044,7 +27731,7 @@
   <p:cSld>
     <p:spTree>
       <p:nvGrpSpPr>
-        <p:cNvPr id="629" name="" descr="&lt;Slide style={{ background: '#FFFFFF', padding: 0 }}&gt;&#10;  &lt;Box style={{ height: 72, background: '#1E4FA8', padding: '0 40px', flexDirection: 'row', alignItems: 'center', justifyContent: 'space-between' }}&gt;&#10;    &lt;Text style={{ fontSize: 15, color: '#B9CDF0', letterSpacing: 1 }}&gt;ISAD · INFORMATION SYSTEMS ANALYSIS &amp;amp; DESIGN&lt;/Text&gt;&#10;    &lt;Text style={{ fontSize: 15, color: '#B9CDF0' }}&gt;W04 · LAB · EXERCISE 4.1&lt;/Text&gt;&#10;  &lt;/Box&gt;&#10;  &lt;Box style={{ padding: '14px 40px 0 40px', flexDirection: 'row', alignItems: 'center', justifyContent: 'space-between' }}&gt;&#10;    &lt;Text style={{ fontSize: 29, fontWeight: 'bold', color: '#0E3F8C' }}&gt;Exercise 4.1 — Use Cases, Answered&lt;/Text&gt;&#10;    &lt;Text style={{ fontSize: 14, color: '#1E4FA8', fontWeight: 'bold' }}&gt;34 / 38&lt;/Text&gt;&#10;  &lt;/Box&gt;&#10;  &lt;Box style={{ flex: 1, padding: '10px 40px 6px 40px' }}&gt;&#10;    &lt;Table&#10;      style={{ width: '100%', height: '100%' }}&#10;      defaultTextStyle={{ fontSize: 13, textAlign: 'left', color: '#1A2230' }}&#10;      defaultCellStyle={{&#10;        border: {&#10;          left: { width: 1, color: '#E5E7EB' },&#10;          right: { width: 1, color: '#E5E7EB' },&#10;          top: { width: 1, color: '#E5E7EB' },&#10;          bottom: { width: 1, color: '#E5E7EB' },&#10;        },&#10;      }}&#10;      cells={[&#10;        [&#10;          { text: 'Candidate', textStyle: { bold: true, color: '#FFFFFF' }, cellStyle: { background: { color: '#0E3F8C' } } },&#10;          { text: 'Who wants it', textStyle: { bold: true, color: '#FFFFFF' }, cellStyle: { background: { color: '#0E3F8C' } } },&#10;          { text: 'Goal level?', textStyle: { bold: true, color: '#FFFFFF' }, cellStyle: { background: { color: '#0E3F8C' } } },&#10;          { text: 'Why', textStyle: { bold: true, color: '#FFFFFF' }, cellStyle: { background: { color: '#1E4FA8' } } },&#10;        ],&#10;        [&#10;          { text: 'Browse Menu', textStyle: { bold: true, color: '#0E3F8C' }, cellStyle: { background: { color: '#F7F9FC' } } },&#10;          { text: 'Student', textStyle: { color: '#4A5568' }, cellStyle: { background: { color: '#F7F9FC' } } },&#10;          { text: 'Yes', textStyle: { color: '#1E4FA8', bold: true }, cellStyle: { background: { color: '#F7F9FC' } } },&#10;          { text: 'A student can browse and leave. It ends, on its own.', textStyle: { color: '#4A5568' }, cellStyle: { background: { color: '#F7F9FC' } } },&#10;        ],&#10;        [&#10;          { text: 'Place Order', textStyle: { bold: true, color: '#0E3F8C' } },&#10;          { text: 'Student', textStyle: { color: '#4A5568' } },&#10;          { text: 'Yes', textStyle: { color: '#1E4FA8', bold: true } },&#10;          { text: 'The headline goal. Ends when the order is accepted.', textStyle: { color: '#4A5568' } },&#10;        ],&#10;        [&#10;          { text: 'Authenticate', textStyle: { bold: true, color: '#4A5568' }, cellStyle: { background: { color: '#F7F9FC' } } },&#10;          { text: 'Nobody', textStyle: { color: '#4A5568' }, cellStyle: { background: { color: '#F7F9FC' } } },&#10;          { text: 'No — include', textStyle: { color: '#D9534F', bold: true }, cellStyle: { background: { color: '#F7F9FC' } } },&#10;          { text: 'Nobody comes to log in. Place Order always includes it.', textStyle: { color: '#4A5568' }, cellStyle: { background: { color: '#F7F9FC' } } },&#10;        ],&#10;        [&#10;          { text: 'Calculate Total', textStyle: { bold: true, color: '#4A5568' } },&#10;          { text: 'Nobody', textStyle: { color: '#4A5568' } },&#10;          { text: 'No — step', textStyle: { color: '#D9534F', bold: true } },&#10;          { text: 'One line inside the scenario, not a goal of its own.', textStyle: { color: '#4A5568' } },&#10;        ],&#10;        [&#10;          { text: 'Pay for Order', textStyle: { bold: true, color: '#0E3F8C' }, cellStyle: { background: { color: '#F7F9FC' } } },&#10;          { text: 'Student', textStyle: { color: '#4A5568' }, cellStyle: { background: { color: '#F7F9FC' } } },&#10;          { text: 'Yes', textStyle: { color: '#1E4FA8', bold: true }, cellStyle: { background: { color: '#F7F9FC' } } },&#10;          { text: 'Can happen on its own — pay a later order.', textStyle: { color: '#4A5568' }, cellStyle: { background: { color: '#F7F9FC' } } },&#10;        ],&#10;        [&#10;          { text: 'Manage Today’s Menu', textStyle: { bold: true, color: '#0E3F8C' } },&#10;          { text: 'Restaurant Manager', textStyle: { color: '#4A5568' } },&#10;          { text: 'Yes', textStyle: { color: '#1E4FA8', bold: true } },&#10;          { text: 'Ends when the kitchen sees a menu it can cook.', textStyle: { color: '#4A5568' } },&#10;        ],&#10;        [&#10;          { text: 'Receive Order', textStyle: { bold: true, color: '#0E3F8C' }, cellStyle: { background: { color: '#F7F9FC' } } },&#10;          { text: 'Kitchen Staff', textStyle: { color: '#4A5568' }, cellStyle: { background: { color: '#F7F9FC' } } },&#10;          { text: 'Yes', textStyle: { color: '#1E4FA8', bold: true }, cellStyle: { background: { color: '#F7F9FC' } } },&#10;          { text: 'The kitchen has its own goal: see what to cook.', textStyle: { color: '#4A5568' }, cellStyle: { background: { color: '#F7F9FC' } } },&#10;        ],&#10;        [&#10;          { text: 'Dispatch Courier', textStyle: { bold: true, color: '#0E3F8C' } },&#10;          { text: 'Dispatcher', textStyle: { color: '#4A5568' } },&#10;          { text: 'Yes', textStyle: { color: '#1E4FA8', bold: true } },&#10;          { text: 'Ends when a rider accepts. Different actor, different goal.', textStyle: { color: '#4A5568' } },&#10;        ],&#10;        [&#10;          { text: 'Rate Restaurant', textStyle: { bold: true, color: '#0E3F8C' }, cellStyle: { background: { color: '#F7F9FC' } } },&#10;          { text: 'Student', textStyle: { color: '#4A5568' }, cellStyle: { background: { color: '#F7F9FC' } } },&#10;          { text: 'Yes', textStyle: { color: '#1E4FA8', bold: true }, cellStyle: { background: { color: '#F7F9FC' } } },&#10;          { text: 'Optional, but a goal — and it can extend Confirm Delivery.', textStyle: { color: '#4A5568' }, cellStyle: { background: { color: '#F7F9FC' } } },&#10;        ],&#10;      ]}&#10;    /&gt;&#10;  &lt;/Box&gt;&#10;  &lt;Box style={{ height: 46, background: '#0E3F8C', padding: '0 40px', flexDirection: 'row', alignItems: 'center', justifyContent: 'center' }}&gt;&#10;    &lt;Text style={{ fontSize: 15.5, color: '#FFFFFF', fontWeight: '600' }}&gt;Two more from the pack: Suspend Restaurant (Administrator) and Close the Day (the 23:00 clock) — both goal level.&lt;/Text&gt;&#10;  &lt;/Box&gt;&#10;&lt;/Slide&gt;"/>
+        <p:cNvPr id="629" name=""/>
         <p:cNvGrpSpPr/>
         <p:nvPr/>
       </p:nvGrpSpPr>
@@ -27077,7 +27764,10 @@
         </p:spPr>
         <p:txBody>
           <a:bodyPr/>
-          <a:p/>
+          <a:p>
+            <a:pPr/>
+            <a:endParaRPr/>
+          </a:p>
         </p:txBody>
       </p:sp>
       <p:sp>
@@ -27101,7 +27791,10 @@
         </p:spPr>
         <p:txBody>
           <a:bodyPr/>
-          <a:p/>
+          <a:p>
+            <a:pPr/>
+            <a:endParaRPr/>
+          </a:p>
         </p:txBody>
       </p:sp>
       <p:sp>
@@ -29014,7 +29707,10 @@
         </p:spPr>
         <p:txBody>
           <a:bodyPr/>
-          <a:p/>
+          <a:p>
+            <a:pPr/>
+            <a:endParaRPr/>
+          </a:p>
         </p:txBody>
       </p:sp>
       <p:sp>
@@ -29062,7 +29758,7 @@
   <p:cSld>
     <p:spTree>
       <p:nvGrpSpPr>
-        <p:cNvPr id="639" name="" descr="&lt;Slide style={{ background: '#FFFFFF', padding: 0 }}&gt;&#10;  &lt;Box style={{ height: 72, background: '#1E4FA8', padding: '0 40px', flexDirection: 'row', alignItems: 'center', justifyContent: 'space-between' }}&gt;&#10;    &lt;Text style={{ fontSize: 15, color: '#B9CDF0', letterSpacing: 1 }}&gt;ISAD · INFORMATION SYSTEMS ANALYSIS &amp;amp; DESIGN&lt;/Text&gt;&#10;    &lt;Text style={{ fontSize: 15, color: '#B9CDF0' }}&gt;W04 · LAB · EXERCISE 4.2&lt;/Text&gt;&#10;  &lt;/Box&gt;&#10;  &lt;Box style={{ padding: '14px 40px 0 40px', flexDirection: 'row', alignItems: 'center', justifyContent: 'space-between' }}&gt;&#10;    &lt;Text style={{ fontSize: 29, fontWeight: 'bold', color: '#0E3F8C' }}&gt;Exercise 4.2 — Draw the Diagram&lt;/Text&gt;&#10;    &lt;Text style={{ fontSize: 14, color: '#1E4FA8', fontWeight: 'bold' }}&gt;35 / 38&lt;/Text&gt;&#10;  &lt;/Box&gt;&#10;  &lt;Box style={{ flex: 1, padding: '12px 40px 0 40px', flexDirection: 'row', gap: 24 }}&gt;&#10;    &lt;Box style={{ flex: 5, flexDirection: 'column', gap: 12 }}&gt;&#10;      &lt;Box style={{ padding: '18px 18px', background: '#F0F5FC', borderRadius: 10, borderLeft: '4px solid #1E4FA8' }}&gt;&#10;        &lt;Text style={{ fontSize: 17, fontWeight: 'bold', color: '#0E3F8C' }}&gt;The task&lt;/Text&gt;&#10;        &lt;Text style={{ fontSize: 13.5, color: '#4A5568', lineHeight: 1.65, marginTop: 6 }}&gt;&#10;          Draw one use case diagram for CampusBites from the Exercise 4.1 narrative. Six to ten use cases, the actors you listed, one &lt;Text style={{ fontWeight: 'bold', color: '#0E3F8C' }}&gt;&amp;lt;&amp;lt;include&amp;gt;&amp;gt;&lt;/Text&gt; and one &lt;Text style={{ fontWeight: 'bold', color: '#0E3F8C' }}&gt;&amp;lt;&amp;lt;extend&amp;gt;&amp;gt;&lt;/Text&gt;. Put the external systems outside the boundary box.&#10;        &lt;/Text&gt;&#10;      &lt;/Box&gt;&#10;      &lt;Box style={{ padding: '16px 18px', background: '#FFFFFF', borderRadius: 10, border: '1px solid #D6DCE5' }}&gt;&#10;        &lt;Text style={{ fontSize: 15.5, fontWeight: 'bold', color: '#0E3F8C' }}&gt;For each dashed arrow, write one sentence&lt;/Text&gt;&#10;        &lt;Text style={{ fontSize: 13, color: '#4A5568', lineHeight: 1.6, marginTop: 5 }}&gt;&#10;          State in words what the relationship means and why the arrow points that way. A diagram without the sentence is a drawing; with it, it is a model.&#10;        &lt;/Text&gt;&#10;      &lt;/Box&gt;&#10;      &lt;Box style={{ padding: '16px 18px', background: '#F7F9FC', borderRadius: 10, border: '1px dashed #D6DCE5' }}&gt;&#10;        &lt;Text style={{ fontSize: 13, color: '#8B97A8', lineHeight: 1.6 }}&gt;&#10;          Deliverable: &lt;Text style={{ color: '#0E3F8C', fontWeight: 'bold' }}&gt;docs/diagrams/use-case-v1.drawio&lt;/Text&gt; plus an exported PNG, committed before you leave. Source file and picture — both, as agreed in Week 03.&#10;        &lt;/Text&gt;&#10;      &lt;/Box&gt;&#10;    &lt;/Box&gt;&#10;    &lt;Box style={{ flex: 4, flexDirection: 'column', justifyContent: 'center' }}&gt;&#10;      &lt;Box style={{ padding: '16px 18px', background: '#FFF6E0', borderRadius: 10, borderLeft: '4px solid #FFC107', marginBottom: 10 }}&gt;&#10;        &lt;Text style={{ fontSize: 16, fontWeight: 'bold', color: '#996F00' }}&gt;Self-check before you hand it in&lt;/Text&gt;&#10;      &lt;/Box&gt;&#10;      {[&#10;        'Every ellipse is named verb plus object, in business words',&#10;        'Every use case belongs to exactly one primary actor',&#10;        'The boundary box is drawn, and its name is at the top',&#10;        'External systems sit outside the box and are drawn as boxes',&#10;        'No “Manage X” and no create-read-update-delete quartet',&#10;        'The include arrow leaves the base and arrives at what it needs',&#10;        'The extend arrow comes back from the extra to the base',&#10;        'Each dashed arrow carries a condition or a reason in words',&#10;      ].map((t) =&gt; (&#10;        &lt;Box key={t} style={{ flexDirection: 'row', alignItems: 'flex-start', gap: 9, marginBottom: 7 }}&gt;&#10;          &lt;Box style={{ width: 13, height: 13, borderRadius: 7, borderWidth: 1.4, borderColor: '#1E4FA8', marginTop: 3 }} /&gt;&#10;          &lt;Box style={{ flex: 1 }}&gt;&#10;            &lt;Text style={{ fontSize: 12.5, color: '#1A2230', lineHeight: 1.5 }}&gt;{t}&lt;/Text&gt;&#10;          &lt;/Box&gt;&#10;        &lt;/Box&gt;&#10;      ))}&#10;    &lt;/Box&gt;&#10;  &lt;/Box&gt;&#10;  &lt;Box style={{ height: 46, background: '#0E3F8C', padding: '0 40px', flexDirection: 'row', alignItems: 'center', justifyContent: 'center' }}&gt;&#10;    &lt;Text style={{ fontSize: 16, color: '#FFFFFF', fontWeight: '600' }}&gt;Thirty minutes to draw, fifteen to defend it to the instructor, who is playing the client today. Answers on the next page.&lt;/Text&gt;&#10;  &lt;/Box&gt;&#10;&lt;/Slide&gt;"/>
+        <p:cNvPr id="639" name=""/>
         <p:cNvGrpSpPr/>
         <p:nvPr/>
       </p:nvGrpSpPr>
@@ -29095,7 +29791,10 @@
         </p:spPr>
         <p:txBody>
           <a:bodyPr/>
-          <a:p/>
+          <a:p>
+            <a:pPr/>
+            <a:endParaRPr/>
+          </a:p>
         </p:txBody>
       </p:sp>
       <p:sp>
@@ -29119,7 +29818,10 @@
         </p:spPr>
         <p:txBody>
           <a:bodyPr/>
-          <a:p/>
+          <a:p>
+            <a:pPr/>
+            <a:endParaRPr/>
+          </a:p>
         </p:txBody>
       </p:sp>
       <p:sp>
@@ -29285,7 +29987,10 @@
         </p:spPr>
         <p:txBody>
           <a:bodyPr/>
-          <a:p/>
+          <a:p>
+            <a:pPr/>
+            <a:endParaRPr/>
+          </a:p>
         </p:txBody>
       </p:sp>
       <p:sp>
@@ -29342,7 +30047,10 @@
         </p:spPr>
         <p:txBody>
           <a:bodyPr/>
-          <a:p/>
+          <a:p>
+            <a:pPr/>
+            <a:endParaRPr/>
+          </a:p>
         </p:txBody>
       </p:sp>
       <p:sp>
@@ -29485,7 +30193,10 @@
         </p:spPr>
         <p:txBody>
           <a:bodyPr/>
-          <a:p/>
+          <a:p>
+            <a:pPr/>
+            <a:endParaRPr/>
+          </a:p>
         </p:txBody>
       </p:sp>
       <p:sp>
@@ -29588,7 +30299,10 @@
         </p:spPr>
         <p:txBody>
           <a:bodyPr/>
-          <a:p/>
+          <a:p>
+            <a:pPr/>
+            <a:endParaRPr/>
+          </a:p>
         </p:txBody>
       </p:sp>
       <p:sp>
@@ -29671,7 +30385,10 @@
         </p:spPr>
         <p:txBody>
           <a:bodyPr/>
-          <a:p/>
+          <a:p>
+            <a:pPr/>
+            <a:endParaRPr/>
+          </a:p>
         </p:txBody>
       </p:sp>
       <p:sp>
@@ -29728,7 +30445,10 @@
         </p:spPr>
         <p:txBody>
           <a:bodyPr/>
-          <a:p/>
+          <a:p>
+            <a:pPr/>
+            <a:endParaRPr/>
+          </a:p>
         </p:txBody>
       </p:sp>
       <p:sp>
@@ -29791,7 +30511,10 @@
         </p:spPr>
         <p:txBody>
           <a:bodyPr/>
-          <a:p/>
+          <a:p>
+            <a:pPr/>
+            <a:endParaRPr/>
+          </a:p>
         </p:txBody>
       </p:sp>
       <p:sp>
@@ -29854,7 +30577,10 @@
         </p:spPr>
         <p:txBody>
           <a:bodyPr/>
-          <a:p/>
+          <a:p>
+            <a:pPr/>
+            <a:endParaRPr/>
+          </a:p>
         </p:txBody>
       </p:sp>
       <p:sp>
@@ -29917,7 +30643,10 @@
         </p:spPr>
         <p:txBody>
           <a:bodyPr/>
-          <a:p/>
+          <a:p>
+            <a:pPr/>
+            <a:endParaRPr/>
+          </a:p>
         </p:txBody>
       </p:sp>
       <p:sp>
@@ -29980,7 +30709,10 @@
         </p:spPr>
         <p:txBody>
           <a:bodyPr/>
-          <a:p/>
+          <a:p>
+            <a:pPr/>
+            <a:endParaRPr/>
+          </a:p>
         </p:txBody>
       </p:sp>
       <p:sp>
@@ -30043,7 +30775,10 @@
         </p:spPr>
         <p:txBody>
           <a:bodyPr/>
-          <a:p/>
+          <a:p>
+            <a:pPr/>
+            <a:endParaRPr/>
+          </a:p>
         </p:txBody>
       </p:sp>
       <p:sp>
@@ -30106,7 +30841,10 @@
         </p:spPr>
         <p:txBody>
           <a:bodyPr/>
-          <a:p/>
+          <a:p>
+            <a:pPr/>
+            <a:endParaRPr/>
+          </a:p>
         </p:txBody>
       </p:sp>
       <p:sp>
@@ -30169,7 +30907,10 @@
         </p:spPr>
         <p:txBody>
           <a:bodyPr/>
-          <a:p/>
+          <a:p>
+            <a:pPr/>
+            <a:endParaRPr/>
+          </a:p>
         </p:txBody>
       </p:sp>
       <p:sp>
@@ -30232,7 +30973,10 @@
         </p:spPr>
         <p:txBody>
           <a:bodyPr/>
-          <a:p/>
+          <a:p>
+            <a:pPr/>
+            <a:endParaRPr/>
+          </a:p>
         </p:txBody>
       </p:sp>
       <p:sp>
@@ -30291,7 +31035,10 @@
         </p:spPr>
         <p:txBody>
           <a:bodyPr/>
-          <a:p/>
+          <a:p>
+            <a:pPr/>
+            <a:endParaRPr/>
+          </a:p>
         </p:txBody>
       </p:sp>
       <p:sp>
@@ -30339,7 +31086,7 @@
   <p:cSld>
     <p:spTree>
       <p:nvGrpSpPr>
-        <p:cNvPr id="676" name="" descr="&lt;Slide style={{ background: '#FFFFFF', padding: 0 }}&gt;&#10;  &lt;Box style={{ height: 72, background: '#1E4FA8', padding: '0 40px', flexDirection: 'row', alignItems: 'center', justifyContent: 'space-between' }}&gt;&#10;    &lt;Text style={{ fontSize: 15, color: '#B9CDF0', letterSpacing: 1 }}&gt;ISAD · INFORMATION SYSTEMS ANALYSIS &amp;amp; DESIGN&lt;/Text&gt;&#10;    &lt;Text style={{ fontSize: 15, color: '#B9CDF0' }}&gt;W04 · LAB · EXERCISE 4.2&lt;/Text&gt;&#10;  &lt;/Box&gt;&#10;  &lt;Box style={{ padding: '12px 40px 0 40px', flexDirection: 'row', alignItems: 'center', justifyContent: 'space-between' }}&gt;&#10;    &lt;Text style={{ fontSize: 29, fontWeight: 'bold', color: '#0E3F8C' }}&gt;Exercise 4.2 — Reference Solution&lt;/Text&gt;&#10;    &lt;Text style={{ fontSize: 14, color: '#1E4FA8', fontWeight: 'bold' }}&gt;36 / 38&lt;/Text&gt;&#10;  &lt;/Box&gt;&#10;  &lt;Box style={{ flex: 1, padding: '2px 40px 0 40px', justifyContent: 'center', alignItems: 'center' }}&gt;&#10;    &lt;svg width={1180} height={386} viewBox='0 0 1180 386'&gt;&#10;      &lt;text x='10' y='14' fill='#8B97A8' fontSize='12.5'&gt;One answer of several defensible ones — check the arrows before you copy the shapes&lt;/text&gt;&#10;&#10;      &lt;rect x='470' y='30' width='260' height='306' rx='6' fill='#FFFFFF' stroke='#1E4FA8' strokeWidth='2' /&gt;&#10;      &lt;text x='600' y='48' textAnchor='middle' fill='#0E3F8C' fontSize='12.5' fontWeight='bold'&gt;CampusBites&lt;/text&gt;&#10;&#10;      &lt;ellipse cx='600' cy='55' rx='112' ry='15' fill='#F0F5FC' stroke='#1E4FA8' strokeWidth='1.4' /&gt;&#10;      &lt;text x='600' y='59' textAnchor='middle' fill='#1A2230' fontSize='11.5'&gt;Browse Menu&lt;/text&gt;&#10;&#10;      &lt;ellipse cx='600' cy='86' rx='112' ry='15' fill='#FFFFFF' stroke='#3D7BD9' strokeWidth='1.4' /&gt;&#10;      &lt;text x='600' y='90' textAnchor='middle' fill='#1A2230' fontSize='11.5'&gt;Apply Coupon&lt;/text&gt;&#10;&#10;      &lt;ellipse cx='600' cy='117' rx='112' ry='15' fill='#F0F5FC' stroke='#1E4FA8' strokeWidth='1.6' /&gt;&#10;      &lt;text x='600' y='121' textAnchor='middle' fill='#1A2230' fontSize='11.5' fontWeight='bold'&gt;Place Order&lt;/text&gt;&#10;&#10;      &lt;ellipse cx='600' cy='148' rx='112' ry='15' fill='#FFFFFF' stroke='#1E4FA8' strokeWidth='1.4' /&gt;&#10;      &lt;text x='600' y='152' textAnchor='middle' fill='#1A2230' fontSize='11.5'&gt;Authenticate&lt;/text&gt;&#10;&#10;      &lt;ellipse cx='600' cy='179' rx='112' ry='15' fill='#F0F5FC' stroke='#1E4FA8' strokeWidth='1.4' /&gt;&#10;      &lt;text x='600' y='183' textAnchor='middle' fill='#1A2230' fontSize='11.5'&gt;Pay for Order&lt;/text&gt;&#10;&#10;      &lt;ellipse cx='600' cy='210' rx='112' ry='15' fill='#F0F5FC' stroke='#1E4FA8' strokeWidth='1.4' /&gt;&#10;      &lt;text x='600' y='214' textAnchor='middle' fill='#1A2230' fontSize='11.5'&gt;Rate Restaurant&lt;/text&gt;&#10;&#10;      &lt;ellipse cx='600' cy='241' rx='112' ry='15' fill='#F0F5FC' stroke='#1E4FA8' strokeWidth='1.4' /&gt;&#10;      &lt;text x='600' y='245' textAnchor='middle' fill='#1A2230' fontSize='11.5'&gt;Manage Today’s Menu&lt;/text&gt;&#10;&#10;      &lt;ellipse cx='600' cy='272' rx='112' ry='15' fill='#F0F5FC' stroke='#1E4FA8' strokeWidth='1.4' /&gt;&#10;      &lt;text x='600' y='276' textAnchor='middle' fill='#1A2230' fontSize='11.5'&gt;Receive Order&lt;/text&gt;&#10;&#10;      &lt;ellipse cx='600' cy='303' rx='112' ry='15' fill='#F0F5FC' stroke='#1E4FA8' strokeWidth='1.4' /&gt;&#10;      &lt;text x='600' y='307' textAnchor='middle' fill='#1A2230' fontSize='11.5'&gt;Dispatch Courier&lt;/text&gt;&#10;&#10;      &lt;line x1='600' y1='102' x2='600' y2='130' stroke='#1E4FA8' strokeWidth='1.6' strokeDasharray='6 4' /&gt;&#10;      &lt;polygon points='600,134 595,122 605,122' fill='#1E4FA8' /&gt;&#10;      &lt;text x='612' y='124' fill='#1E4FA8' fontSize='10.5' fontWeight='bold'&gt;«include»&lt;/text&gt;&#10;&#10;      &lt;line x1='588' y1='71' x2='588' y2='97' stroke='#3D7BD9' strokeWidth='1.6' strokeDasharray='6 4' /&gt;&#10;      &lt;polygon points='588,101 583,89 593,89' fill='#3D7BD9' /&gt;&#10;      &lt;text x='470' y='80' fill='#3D7BD9' fontSize='10.5' fontWeight='bold'&gt;«extend»&lt;/text&gt;&#10;&#10;      &lt;g transform='translate(20,44)'&gt;&#10;        &lt;circle cx='40' cy='0' r='9' fill='none' stroke='#0E3F8C' strokeWidth='2' /&gt;&#10;        &lt;line x1='40' y1='9' x2='40' y2='32' stroke='#0E3F8C' strokeWidth='2' /&gt;&#10;        &lt;line x1='40' y1='17' x2='28' y2='29' stroke='#0E3F8C' strokeWidth='2' /&gt;&#10;        &lt;line x1='40' y1='17' x2='52' y2='29' stroke='#0E3F8C' strokeWidth='2' /&gt;&#10;        &lt;line x1='40' y1='32' x2='29' y2='48' stroke='#0E3F8C' strokeWidth='2' /&gt;&#10;        &lt;line x1='40' y1='32' x2='51' y2='48' stroke='#0E3F8C' strokeWidth='2' /&gt;&#10;        &lt;text x='40' y='64' textAnchor='middle' fill='#0E3F8C' fontSize='12' fontWeight='bold'&gt;Student&lt;/text&gt;&#10;      &lt;/g&gt;&#10;      &lt;g transform='translate(20,148)'&gt;&#10;        &lt;circle cx='40' cy='0' r='9' fill='none' stroke='#0E3F8C' strokeWidth='2' /&gt;&#10;        &lt;line x1='40' y1='9' x2='40' y2='32' stroke='#0E3F8C' strokeWidth='2' /&gt;&#10;        &lt;line x1='40' y1='17' x2='28' y2='29' stroke='#0E3F8C' strokeWidth='2' /&gt;&#10;        &lt;line x1='40' y1='17' x2='52' y2='29' stroke='#0E3F8C' strokeWidth='2' /&gt;&#10;        &lt;line x1='40' y1='32' x2='29' y2='48' stroke='#0E3F8C' strokeWidth='2' /&gt;&#10;        &lt;line x1='40' y1='32' x2='51' y2='48' stroke='#0E3F8C' strokeWidth='2' /&gt;&#10;        &lt;text x='40' y='64' textAnchor='middle' fill='#0E3F8C' fontSize='11.5' fontWeight='bold'&gt;Restaurant&lt;/text&gt;&#10;        &lt;text x='40' y='78' textAnchor='middle' fill='#0E3F8C' fontSize='11.5' fontWeight='bold'&gt;Manager&lt;/text&gt;&#10;      &lt;/g&gt;&#10;      &lt;g transform='translate(20,250)'&gt;&#10;        &lt;circle cx='40' cy='0' r='9' fill='none' stroke='#0E3F8C' strokeWidth='2' /&gt;&#10;        &lt;line x1='40' y1='9' x2='40' y2='32' stroke='#0E3F8C' strokeWidth='2' /&gt;&#10;        &lt;line x1='40' y1='17' x2='28' y2='29' stroke='#0E3F8C' strokeWidth='2' /&gt;&#10;        &lt;line x1='40' y1='17' x2='52' y2='29' stroke='#0E3F8C' strokeWidth='2' /&gt;&#10;        &lt;line x1='40' y1='32' x2='29' y2='48' stroke='#0E3F8C' strokeWidth='2' /&gt;&#10;        &lt;line x1='40' y1='32' x2='51' y2='48' stroke='#0E3F8C' strokeWidth='2' /&gt;&#10;        &lt;text x='40' y='64' textAnchor='middle' fill='#0E3F8C' fontSize='11.5' fontWeight='bold'&gt;Kitchen&lt;/text&gt;&#10;        &lt;text x='40' y='78' textAnchor='middle' fill='#0E3F8C' fontSize='11.5' fontWeight='bold'&gt;Staff&lt;/text&gt;&#10;      &lt;/g&gt;&#10;&#10;      &lt;g transform='translate(770,44)'&gt;&#10;        &lt;circle cx='40' cy='0' r='9' fill='none' stroke='#0E3F8C' strokeWidth='2' /&gt;&#10;        &lt;line x1='40' y1='9' x2='40' y2='32' stroke='#0E3F8C' strokeWidth='2' /&gt;&#10;        &lt;line x1='40' y1='17' x2='28' y2='29' stroke='#0E3F8C' strokeWidth='2' /&gt;&#10;        &lt;line x1='40' y1='17' x2='52' y2='29' stroke='#0E3F8C' strokeWidth='2' /&gt;&#10;        &lt;line x1='40' y1='32' x2='29' y2='48' stroke='#0E3F8C' strokeWidth='2' /&gt;&#10;        &lt;line x1='40' y1='32' x2='51' y2='48' stroke='#0E3F8C' strokeWidth='2' /&gt;&#10;        &lt;text x='40' y='64' textAnchor='middle' fill='#0E3F8C' fontSize='11.5' fontWeight='bold'&gt;Dispatcher&lt;/text&gt;&#10;      &lt;/g&gt;&#10;      &lt;g transform='translate(770,148)'&gt;&#10;        &lt;circle cx='40' cy='0' r='9' fill='none' stroke='#0E3F8C' strokeWidth='2' /&gt;&#10;        &lt;line x1='40' y1='9' x2='40' y2='32' stroke='#0E3F8C' strokeWidth='2' /&gt;&#10;        &lt;line x1='40' y1='17' x2='28' y2='29' stroke='#0E3F8C' strokeWidth='2' /&gt;&#10;        &lt;line x1='40' y1='17' x2='52' y2='29' stroke='#0E3F8C' strokeWidth='2' /&gt;&#10;        &lt;line x1='40' y1='32' x2='29' y2='48' stroke='#0E3F8C' strokeWidth='2' /&gt;&#10;        &lt;line x1='40' y1='32' x2='51' y2='48' stroke='#0E3F8C' strokeWidth='2' /&gt;&#10;        &lt;text x='40' y='64' textAnchor='middle' fill='#0E3F8C' fontSize='11.5' fontWeight='bold'&gt;Courier&lt;/text&gt;&#10;      &lt;/g&gt;&#10;&#10;      &lt;g transform='translate(940,196)'&gt;&#10;        &lt;rect x='0' y='0' width='192' height='32' rx='4' fill='#F7F9FC' stroke='#8B97A8' strokeWidth='1.4' /&gt;&#10;        &lt;text x='96' y='21' textAnchor='middle' fill='#4A5568' fontSize='11.5' fontWeight='bold'&gt;Campus Card Centre&lt;/text&gt;&#10;      &lt;/g&gt;&#10;      &lt;g transform='translate(940,238)'&gt;&#10;        &lt;rect x='0' y='0' width='192' height='32' rx='4' fill='#F7F9FC' stroke='#8B97A8' strokeWidth='1.4' /&gt;&#10;        &lt;text x='96' y='21' textAnchor='middle' fill='#4A5568' fontSize='11.5' fontWeight='bold'&gt;Payment Provider&lt;/text&gt;&#10;      &lt;/g&gt;&#10;&#10;      &lt;line x1='72' y1='100' x2='488' y2='58' stroke='#1E4FA8' strokeWidth='1.2' /&gt;&#10;      &lt;line x1='72' y1='106' x2='488' y2='114' stroke='#1E4FA8' strokeWidth='1.2' /&gt;&#10;      &lt;line x1='72' y1='112' x2='488' y2='176' stroke='#1E4FA8' strokeWidth='1.2' /&gt;&#10;      &lt;line x1='72' y1='118' x2='488' y2='208' stroke='#1E4FA8' strokeWidth='1.2' /&gt;&#10;      &lt;line x1='72' y1='200' x2='488' y2='242' stroke='#1E4FA8' strokeWidth='1.2' /&gt;&#10;      &lt;line x1='72' y1='292' x2='488' y2='273' stroke='#1E4FA8' strokeWidth='1.2' /&gt;&#10;      &lt;line x1='790' y1='100' x2='712' y2='300' stroke='#1E4FA8' strokeWidth='1.2' /&gt;&#10;      &lt;line x1='790' y1='190' x2='712' y2='306' stroke='#1E4FA8' strokeWidth='1.2' /&gt;&#10;&#10;      &lt;line x1='712' y1='182' x2='938' y2='208' stroke='#8B97A8' strokeWidth='1.2' strokeDasharray='5 3' /&gt;&#10;      &lt;line x1='712' y1='188' x2='938' y2='250' stroke='#8B97A8' strokeWidth='1.2' strokeDasharray='5 3' /&gt;&#10;&#10;      &lt;text x='10' y='360' fill='#8B97A8' fontSize='11'&gt;Dashed include leaves Place Order and arrives at Authenticate. Dashed extend leaves Apply Coupon and returns to Place Order. Both arrows point the way the dependency runs.&lt;/text&gt;&#10;      &lt;text x='10' y='376' fill='#8B97A8' fontSize='11'&gt;External systems stay outside the box: we call the card centre and the provider; we do not design them.&lt;/text&gt;&#10;    &lt;/svg&gt;&#10;  &lt;/Box&gt;&#10;  &lt;Box style={{ height: 30, padding: '0 40px', flexDirection: 'row', alignItems: 'center', justifyContent: 'space-between' }}&gt;&#10;    &lt;Text style={{ fontSize: 12.5, color: '#8B97A8' }}&gt;ISAD · Fall 2026 · Your diagram may differ and still be right — but every difference needs a sentence&lt;/Text&gt;&#10;    &lt;Text style={{ fontSize: 14, color: '#1E4FA8', fontWeight: 'bold' }}&gt;36 / 38&lt;/Text&gt;&#10;  &lt;/Box&gt;&#10;&lt;/Slide&gt;"/>
+        <p:cNvPr id="676" name=""/>
         <p:cNvGrpSpPr/>
         <p:nvPr/>
       </p:nvGrpSpPr>
@@ -30372,7 +31119,10 @@
         </p:spPr>
         <p:txBody>
           <a:bodyPr/>
-          <a:p/>
+          <a:p>
+            <a:pPr/>
+            <a:endParaRPr/>
+          </a:p>
         </p:txBody>
       </p:sp>
       <p:sp>
@@ -30396,7 +31146,10 @@
         </p:spPr>
         <p:txBody>
           <a:bodyPr/>
-          <a:p/>
+          <a:p>
+            <a:pPr/>
+            <a:endParaRPr/>
+          </a:p>
         </p:txBody>
       </p:sp>
       <p:sp>
@@ -30650,7 +31403,7 @@
   <p:cSld>
     <p:spTree>
       <p:nvGrpSpPr>
-        <p:cNvPr id="686" name="" descr="&lt;Slide style={{ background: '#FFFFFF', padding: 0 }}&gt;&#10;  &lt;Box style={{ height: 72, background: '#1E4FA8', padding: '0 40px', flexDirection: 'row', alignItems: 'center', justifyContent: 'space-between' }}&gt;&#10;    &lt;Text style={{ fontSize: 15, color: '#B9CDF0', letterSpacing: 1 }}&gt;ISAD · INFORMATION SYSTEMS ANALYSIS &amp;amp; DESIGN&lt;/Text&gt;&#10;    &lt;Text style={{ fontSize: 15, color: '#B9CDF0' }}&gt;W04 · HOMEWORK &amp;amp; M1&lt;/Text&gt;&#10;  &lt;/Box&gt;&#10;  &lt;Box style={{ padding: '14px 40px 0 40px', flexDirection: 'row', alignItems: 'center', justifyContent: 'space-between' }}&gt;&#10;    &lt;Text style={{ fontSize: 29, fontWeight: 'bold', color: '#0E3F8C' }}&gt;Homework &amp;amp; Project M1&lt;/Text&gt;&#10;    &lt;Text style={{ fontSize: 14, color: '#1E4FA8', fontWeight: 'bold' }}&gt;37 / 38&lt;/Text&gt;&#10;  &lt;/Box&gt;&#10;  &lt;Box style={{ flex: 1, padding: '12px 40px 0 40px', flexDirection: 'row', gap: 20 }}&gt;&#10;    &lt;Box style={{ flex: 1, flexDirection: 'column', gap: 10 }}&gt;&#10;      &lt;Box style={{ flexDirection: 'row', alignItems: 'center', gap: 9, marginBottom: 2 }}&gt;&#10;        &lt;FAIcon name='pen-fancy' style={{ fill: '#1E4FA8', width: 18, height: 18 }} /&gt;&#10;        &lt;Text style={{ fontSize: 16.5, fontWeight: 'bold', color: '#0E3F8C' }}&gt;Before next Monday&lt;/Text&gt;&#10;      &lt;/Box&gt;&#10;      {[&#10;        'Finish the diagram — source file and PNG, in docs/diagrams/, pushed',&#10;        'Write two use case briefs: Place Order and one you choose',&#10;        'Read Larman Chapter 6 (use cases) — twenty pages, not all of it',&#10;        'Bring one question the narrative could not answer',&#10;      ].map((t) =&gt; (&#10;        &lt;Box key={t} style={{ flexDirection: 'row', alignItems: 'flex-start', gap: 9 }}&gt;&#10;          &lt;Box style={{ width: 13, height: 13, borderRadius: 7, borderWidth: 1.4, borderColor: '#1E4FA8', marginTop: 3 }} /&gt;&#10;          &lt;Box style={{ flex: 1 }}&gt;&#10;            &lt;Text style={{ fontSize: 13, color: '#1A2230', lineHeight: 1.55 }}&gt;{t}&lt;/Text&gt;&#10;          &lt;/Box&gt;&#10;        &lt;/Box&gt;&#10;      ))}&#10;      &lt;Box style={{ padding: '12px 14px', background: '#FFF6E0', borderRadius: 8, borderLeft: '3px solid #FFC107', marginTop: 4 }}&gt;&#10;        &lt;Text style={{ fontSize: 12.2, color: '#4A5568', lineHeight: 1.55 }}&gt;&#10;          A brief is half a page: the goal in one sentence, the primary actor, and the one thing that can go wrong. Full specifications are Week 05.&#10;        &lt;/Text&gt;&#10;      &lt;/Box&gt;&#10;    &lt;/Box&gt;&#10;    &lt;Box style={{ width: 20 }} /&gt;&#10;    &lt;Box style={{ flex: 1, flexDirection: 'column', gap: 10 }}&gt;&#10;      &lt;Box style={{ flexDirection: 'row', alignItems: 'center', gap: 9, marginBottom: 2 }}&gt;&#10;        &lt;FAIcon name='folder' style={{ fill: '#1E4FA8', width: 18, height: 18 }} /&gt;&#10;        &lt;Text style={{ fontSize: 16.5, fontWeight: 'bold', color: '#0E3F8C' }}&gt;Milestone M1 — due Sunday 4 October&lt;/Text&gt;&#10;      &lt;/Box&gt;&#10;      {[&#10;        'A requirements list: functional and non-functional, each testable',&#10;        'The use case diagram — source file, PNG, and one sentence per dashed arrow',&#10;        'Two use case briefs, written in your own words',&#10;      ].map((t) =&gt; (&#10;        &lt;Box key={t} style={{ padding: '13px 15px', background: '#F0F5FC', borderRadius: 8, borderLeft: '3px solid #1E4FA8' }}&gt;&#10;          &lt;Text style={{ fontSize: 13, color: '#1A2230', lineHeight: 1.55 }}&gt;{t}&lt;/Text&gt;&#10;        &lt;/Box&gt;&#10;      ))}&#10;      &lt;Box style={{ flexDirection: 'row', alignItems: 'center', gap: 9, marginTop: 6, marginBottom: 2 }}&gt;&#10;        &lt;FAIcon name='exclamation-triangle' style={{ fill: '#D9534F', width: 17, height: 17 }} /&gt;&#10;        &lt;Text style={{ fontSize: 16.5, fontWeight: 'bold', color: '#D9534F' }}&gt;How it is submitted&lt;/Text&gt;&#10;      &lt;/Box&gt;&#10;      &lt;Box style={{ padding: '14px 16px', background: '#FDF3F3', borderRadius: 9, border: '1px solid #D9534F' }}&gt;&#10;        &lt;Text style={{ fontSize: 13, color: '#1A2230', lineHeight: 1.6 }}&gt;&#10;          Push to GitHub, then tag it &lt;Text style={{ fontWeight: 'bold', color: '#D9534F' }}&gt;m1&lt;/Text&gt;. A push without a tag is not a submission — the tag is the snapshot that gets graded.&#10;        &lt;/Text&gt;&#10;        &lt;Text style={{ fontSize: 12, color: '#8B97A8', lineHeight: 1.55, marginTop: 6 }}&gt;&#10;          git tag -a m1 -m &quot;M1: requirements, use case diagram, two briefs&quot; &amp;amp;&amp;amp; git push origin m1&#10;        &lt;/Text&gt;&#10;        &lt;Text style={{ fontSize: 12, color: '#8B97A8', lineHeight: 1.55, marginTop: 4 }}&gt;&#10;          Check it landed: git ls-remote --tags origin&#10;        &lt;/Text&gt;&#10;      &lt;/Box&gt;&#10;    &lt;/Box&gt;&#10;  &lt;/Box&gt;&#10;  &lt;Box style={{ height: 46, background: '#0E3F8C', padding: '0 40px', flexDirection: 'row', alignItems: 'center', justifyContent: 'center' }}&gt;&#10;    &lt;Text style={{ fontSize: 16, color: '#FFFFFF', fontWeight: '600' }}&gt;M1 closes on Sunday 4 October. The diagram is due next week; the briefs and the requirements list follow.&lt;/Text&gt;&#10;  &lt;/Box&gt;&#10;&lt;/Slide&gt;"/>
+        <p:cNvPr id="686" name=""/>
         <p:cNvGrpSpPr/>
         <p:nvPr/>
       </p:nvGrpSpPr>
@@ -30683,7 +31436,10 @@
         </p:spPr>
         <p:txBody>
           <a:bodyPr/>
-          <a:p/>
+          <a:p>
+            <a:pPr/>
+            <a:endParaRPr/>
+          </a:p>
         </p:txBody>
       </p:sp>
       <p:sp>
@@ -30707,7 +31463,10 @@
         </p:spPr>
         <p:txBody>
           <a:bodyPr/>
-          <a:p/>
+          <a:p>
+            <a:pPr/>
+            <a:endParaRPr/>
+          </a:p>
         </p:txBody>
       </p:sp>
       <p:sp>
@@ -30941,7 +31700,10 @@
         </p:spPr>
         <p:txBody>
           <a:bodyPr/>
-          <a:p/>
+          <a:p>
+            <a:pPr/>
+            <a:endParaRPr/>
+          </a:p>
         </p:txBody>
       </p:sp>
       <p:sp>
@@ -31004,7 +31766,10 @@
         </p:spPr>
         <p:txBody>
           <a:bodyPr/>
-          <a:p/>
+          <a:p>
+            <a:pPr/>
+            <a:endParaRPr/>
+          </a:p>
         </p:txBody>
       </p:sp>
       <p:sp>
@@ -31067,7 +31832,10 @@
         </p:spPr>
         <p:txBody>
           <a:bodyPr/>
-          <a:p/>
+          <a:p>
+            <a:pPr/>
+            <a:endParaRPr/>
+          </a:p>
         </p:txBody>
       </p:sp>
       <p:sp>
@@ -31130,7 +31898,10 @@
         </p:spPr>
         <p:txBody>
           <a:bodyPr/>
-          <a:p/>
+          <a:p>
+            <a:pPr/>
+            <a:endParaRPr/>
+          </a:p>
         </p:txBody>
       </p:sp>
       <p:sp>
@@ -31191,7 +31962,10 @@
         </p:spPr>
         <p:txBody>
           <a:bodyPr/>
-          <a:p/>
+          <a:p>
+            <a:pPr/>
+            <a:endParaRPr/>
+          </a:p>
         </p:txBody>
       </p:sp>
       <p:sp>
@@ -31248,7 +32022,10 @@
         </p:spPr>
         <p:txBody>
           <a:bodyPr/>
-          <a:p/>
+          <a:p>
+            <a:pPr/>
+            <a:endParaRPr/>
+          </a:p>
         </p:txBody>
       </p:sp>
       <p:sp>
@@ -31377,7 +32154,10 @@
         </p:spPr>
         <p:txBody>
           <a:bodyPr/>
-          <a:p/>
+          <a:p>
+            <a:pPr/>
+            <a:endParaRPr/>
+          </a:p>
         </p:txBody>
       </p:sp>
       <p:sp>
@@ -31434,7 +32214,10 @@
         </p:spPr>
         <p:txBody>
           <a:bodyPr/>
-          <a:p/>
+          <a:p>
+            <a:pPr/>
+            <a:endParaRPr/>
+          </a:p>
         </p:txBody>
       </p:sp>
       <p:sp>
@@ -31495,7 +32278,10 @@
         </p:spPr>
         <p:txBody>
           <a:bodyPr/>
-          <a:p/>
+          <a:p>
+            <a:pPr/>
+            <a:endParaRPr/>
+          </a:p>
         </p:txBody>
       </p:sp>
       <p:sp>
@@ -31552,7 +32338,10 @@
         </p:spPr>
         <p:txBody>
           <a:bodyPr/>
-          <a:p/>
+          <a:p>
+            <a:pPr/>
+            <a:endParaRPr/>
+          </a:p>
         </p:txBody>
       </p:sp>
       <p:sp>
@@ -31613,7 +32402,10 @@
         </p:spPr>
         <p:txBody>
           <a:bodyPr/>
-          <a:p/>
+          <a:p>
+            <a:pPr/>
+            <a:endParaRPr/>
+          </a:p>
         </p:txBody>
       </p:sp>
       <p:sp>
@@ -31670,7 +32462,10 @@
         </p:spPr>
         <p:txBody>
           <a:bodyPr/>
-          <a:p/>
+          <a:p>
+            <a:pPr/>
+            <a:endParaRPr/>
+          </a:p>
         </p:txBody>
       </p:sp>
       <p:sp>
@@ -31802,7 +32597,10 @@
         </p:spPr>
         <p:txBody>
           <a:bodyPr/>
-          <a:p/>
+          <a:p>
+            <a:pPr/>
+            <a:endParaRPr/>
+          </a:p>
         </p:txBody>
       </p:sp>
       <p:sp>
@@ -31953,7 +32751,10 @@
         </p:spPr>
         <p:txBody>
           <a:bodyPr/>
-          <a:p/>
+          <a:p>
+            <a:pPr/>
+            <a:endParaRPr/>
+          </a:p>
         </p:txBody>
       </p:sp>
       <p:sp>
@@ -32001,7 +32802,7 @@
   <p:cSld>
     <p:spTree>
       <p:nvGrpSpPr>
-        <p:cNvPr id="725" name="" descr="&lt;Slide style={{ background: '#0E3F8C', padding: 0 }}&gt;&#10;  &lt;Box style={{ flexDirection: 'column', height: '100%', position: 'relative', padding: '0 80px', justifyContent: 'center' }}&gt;&#10;    &lt;Box style={{ position: 'absolute', top: 0, left: 0, right: 0, height: 8, background: '#1E4FA8' }} /&gt;&#10;    &lt;Text style={{ fontSize: 15, color: '#7FA2D6', letterSpacing: 2, marginBottom: 16 }}&gt;WEEK 04 · WHAT YOU TAKE AWAY&lt;/Text&gt;&#10;    &lt;Text style={{ fontSize: 44, fontWeight: 'bold', color: '#FFFFFF', fontFamily: 'Georgia, serif', lineHeight: 1.15 }}&gt;&#10;      Goals first.&#10;      &lt;br /&gt;&#10;      Notation second.&#10;    &lt;/Text&gt;&#10;    &lt;Box style={{ width: 88, height: 5, background: '#FFC107', marginTop: 24, marginBottom: 26 }} /&gt;&#10;    &lt;Box style={{ flexDirection: 'row', flexWrap: 'wrap', gap: '12px 28px', marginBottom: 30 }}&gt;&#10;      {[&#10;        '01 · Functional says what, non-functional says how well',&#10;        '02 · An actor is a role; a use case is a goal',&#10;        '03 · Six symbols, and the boundary is one of them',&#10;        '04 · include is inevitable, extend is conditional',&#10;        '05 · Events and the noun-verb scan find the goals',&#10;        '06 · M1 opened today — tag it m1 by 4 October',&#10;      ].map((t) =&gt; (&#10;        &lt;Box key={t} style={{ flexDirection: 'row', alignItems: 'center', gap: 10, width: '48%' }}&gt;&#10;          &lt;Box style={{ width: 7, height: 7, borderRadius: 4, background: '#3D7BD9' }} /&gt;&#10;          &lt;Text style={{ fontSize: 15.5, color: '#C5D4EA' }}&gt;{t}&lt;/Text&gt;&#10;        &lt;/Box&gt;&#10;      ))}&#10;    &lt;/Box&gt;&#10;    &lt;Box style={{ borderTop: '1px solid #2B5793', paddingTop: 20, flexDirection: 'row', justifyContent: 'space-between', alignItems: 'center' }}&gt;&#10;      &lt;Box style={{ flex: 1 }}&gt;&#10;        &lt;Text style={{ fontSize: 14, color: '#7FA2D6', letterSpacing: 1, marginBottom: 6 }}&gt;NEXT WEEK — W05&lt;/Text&gt;&#10;        &lt;Text style={{ fontSize: 19, color: '#FFFFFF', fontWeight: '600' }}&gt;&#10;          Writing the Use Case — and being reviewed by the client&#10;        &lt;/Text&gt;&#10;      &lt;/Box&gt;&#10;      &lt;Box style={{ padding: '10px 22px', background: '#1E4FA8', borderRadius: 22 }}&gt;&#10;        &lt;Text style={{ fontSize: 15, color: '#FFFFFF', fontWeight: 'bold' }}&gt;Questions?&lt;/Text&gt;&#10;      &lt;/Box&gt;&#10;    &lt;/Box&gt;&#10;  &lt;/Box&gt;&#10;&lt;/Slide&gt;"/>
+        <p:cNvPr id="725" name=""/>
         <p:cNvGrpSpPr/>
         <p:nvPr/>
       </p:nvGrpSpPr>
@@ -32034,7 +32835,10 @@
         </p:spPr>
         <p:txBody>
           <a:bodyPr/>
-          <a:p/>
+          <a:p>
+            <a:pPr/>
+            <a:endParaRPr/>
+          </a:p>
         </p:txBody>
       </p:sp>
       <p:sp>
@@ -32146,7 +32950,10 @@
         </p:spPr>
         <p:txBody>
           <a:bodyPr/>
-          <a:p/>
+          <a:p>
+            <a:pPr/>
+            <a:endParaRPr/>
+          </a:p>
         </p:txBody>
       </p:sp>
       <p:sp>
@@ -32172,7 +32979,10 @@
         </p:spPr>
         <p:txBody>
           <a:bodyPr/>
-          <a:p/>
+          <a:p>
+            <a:pPr/>
+            <a:endParaRPr/>
+          </a:p>
         </p:txBody>
       </p:sp>
       <p:sp>
@@ -32233,7 +33043,10 @@
         </p:spPr>
         <p:txBody>
           <a:bodyPr/>
-          <a:p/>
+          <a:p>
+            <a:pPr/>
+            <a:endParaRPr/>
+          </a:p>
         </p:txBody>
       </p:sp>
       <p:sp>
@@ -32294,7 +33107,10 @@
         </p:spPr>
         <p:txBody>
           <a:bodyPr/>
-          <a:p/>
+          <a:p>
+            <a:pPr/>
+            <a:endParaRPr/>
+          </a:p>
         </p:txBody>
       </p:sp>
       <p:sp>
@@ -32355,7 +33171,10 @@
         </p:spPr>
         <p:txBody>
           <a:bodyPr/>
-          <a:p/>
+          <a:p>
+            <a:pPr/>
+            <a:endParaRPr/>
+          </a:p>
         </p:txBody>
       </p:sp>
       <p:sp>
@@ -32416,7 +33235,10 @@
         </p:spPr>
         <p:txBody>
           <a:bodyPr/>
-          <a:p/>
+          <a:p>
+            <a:pPr/>
+            <a:endParaRPr/>
+          </a:p>
         </p:txBody>
       </p:sp>
       <p:sp>
@@ -32477,7 +33299,10 @@
         </p:spPr>
         <p:txBody>
           <a:bodyPr/>
-          <a:p/>
+          <a:p>
+            <a:pPr/>
+            <a:endParaRPr/>
+          </a:p>
         </p:txBody>
       </p:sp>
       <p:sp>
@@ -32552,7 +33377,10 @@
         </p:spPr>
         <p:txBody>
           <a:bodyPr/>
-          <a:p/>
+          <a:p>
+            <a:pPr/>
+            <a:endParaRPr/>
+          </a:p>
         </p:txBody>
       </p:sp>
       <p:sp>
@@ -32648,7 +33476,10 @@
         </p:spPr>
         <p:txBody>
           <a:bodyPr/>
-          <a:p/>
+          <a:p>
+            <a:pPr/>
+            <a:endParaRPr/>
+          </a:p>
         </p:txBody>
       </p:sp>
       <p:sp>
@@ -32707,7 +33538,10 @@
         </p:spPr>
         <p:txBody>
           <a:bodyPr/>
-          <a:p/>
+          <a:p>
+            <a:pPr/>
+            <a:endParaRPr/>
+          </a:p>
         </p:txBody>
       </p:sp>
     </p:spTree>
@@ -32720,7 +33554,7 @@
   <p:cSld>
     <p:spTree>
       <p:nvGrpSpPr>
-        <p:cNvPr id="748" name="" descr="&lt;Slide style={{ background: '#FFFFFF', padding: 0 }}&gt;&#10;  &lt;Box style={{ height: 72, background: '#1E4FA8', padding: '0 40px', flexDirection: 'row', alignItems: 'center', justifyContent: 'space-between' }}&gt;&#10;    &lt;Text style={{ fontSize: 15, color: '#B9CDF0', letterSpacing: 1 }}&gt;ISAD · INFORMATION SYSTEMS ANALYSIS &amp;amp; DESIGN&lt;/Text&gt;&#10;    &lt;Text style={{ fontSize: 15, color: '#B9CDF0' }}&gt;W04 · REQUIREMENTS&lt;/Text&gt;&#10;  &lt;/Box&gt;&#10;  &lt;Box style={{ padding: '14px 40px 0 40px', flexDirection: 'row', alignItems: 'center', justifyContent: 'space-between' }}&gt;&#10;    &lt;Text style={{ fontSize: 30, fontWeight: 'bold', color: '#0E3F8C' }}&gt;The Requirements Pack Arrives&lt;/Text&gt;&#10;    &lt;Text style={{ fontSize: 14, color: '#1E4FA8', fontWeight: 'bold' }}&gt;04 / 38&lt;/Text&gt;&#10;  &lt;/Box&gt;&#10;  &lt;Box style={{ flex: 1, padding: '10px 40px 0 40px', flexDirection: 'row', gap: 26 }}&gt;&#10;    &lt;Box style={{ flex: 3, flexDirection: 'column', gap: 10 }}&gt;&#10;      &lt;Text style={{ fontSize: 16, color: '#0E3F8C', fontWeight: 'bold', marginBottom: 2 }}&gt;What is in the pack&lt;/Text&gt;&#10;      {[&#10;        ['file-lines', 'Vision', 'One paragraph: who this is for, what problem it solves, and why it is worth building.'],&#10;        ['users', 'Stakeholder list', 'Six kinds of people and systems with a stake in CampusBites — you met them in Week 01.'],&#10;        ['list-check', 'About 20 functional requirements', 'The things the system must do, written as short statements.'],&#10;        ['gauge-high', 'Non-functional requirements', 'How well it must do them: speed, scale, availability, usability.'],&#10;        ['lock', 'Constraints', 'Things you cannot change: the campus card API, the network, the devices.'],&#10;      ].map(([icon, t, d]) =&gt; (&#10;        &lt;Box key={t} style={{ flexDirection: 'row', gap: 12, alignItems: 'flex-start', padding: '11px 14px', background: '#F7F9FC', borderRadius: 9, borderLeft: '3px solid #1E4FA8' }}&gt;&#10;          &lt;Box style={{ width: 32, height: 32, borderRadius: 8, background: '#E8EFF8', justifyContent: 'center', alignItems: 'center' }}&gt;&#10;            &lt;FAIcon name={icon} style={{ fill: '#1E4FA8', width: 15, height: 15 }} /&gt;&#10;          &lt;/Box&gt;&#10;          &lt;Box style={{ flex: 1, flexDirection: 'column', gap: 2 }}&gt;&#10;            &lt;Text style={{ fontSize: 15, fontWeight: 'bold', color: '#0E3F8C' }}&gt;{t}&lt;/Text&gt;&#10;            &lt;Text style={{ fontSize: 12.5, color: '#4A5568', lineHeight: 1.45 }}&gt;{d}&lt;/Text&gt;&#10;          &lt;/Box&gt;&#10;        &lt;/Box&gt;&#10;      ))}&#10;    &lt;/Box&gt;&#10;    &lt;Box style={{ flex: 2, flexDirection: 'column', gap: 12 }}&gt;&#10;      &lt;Box style={{ padding: '16px 18px', background: '#0E3F8C', borderRadius: 10 }}&gt;&#10;        &lt;Text style={{ fontSize: 15, fontWeight: 'bold', color: '#FFC107', marginBottom: 8 }}&gt;Your job this week&lt;/Text&gt;&#10;        &lt;Text style={{ fontSize: 14, color: '#FFFFFF', lineHeight: 1.55 }}&gt;&#10;          Turn twenty sentences of prose into a picture that shows &lt;Text style={{ fontWeight: 'bold' }}&gt;who wants what&lt;/Text&gt; from this system.&#10;        &lt;/Text&gt;&#10;      &lt;/Box&gt;&#10;      {[&#10;        ['1', 'Read the pack', 'Today, in the lab.'],&#10;        ['2', 'Find the actors', 'Who or what touches this system?'],&#10;        ['3', 'Find the use cases', 'What goal does each one reach?'],&#10;        ['4', 'Draw the diagram', 'Boundary, ellipses, lines, two dashed arrows.'],&#10;      ].map(([n, t, d]) =&gt; (&#10;        &lt;Box key={n} style={{ flexDirection: 'row', gap: 12, alignItems: 'flex-start' }}&gt;&#10;          &lt;Box style={{ width: 26, height: 26, borderRadius: 13, background: '#1E4FA8', justifyContent: 'center', alignItems: 'center' }}&gt;&#10;            &lt;Text style={{ fontSize: 13, fontWeight: 'bold', color: '#FFFFFF' }}&gt;{n}&lt;/Text&gt;&#10;          &lt;/Box&gt;&#10;          &lt;Box style={{ flex: 1, flexDirection: 'column' }}&gt;&#10;            &lt;Text style={{ fontSize: 14, fontWeight: 'bold', color: '#1A2230' }}&gt;{t}&lt;/Text&gt;&#10;            &lt;Text style={{ fontSize: 12, color: '#8B97A8' }}&gt;{d}&lt;/Text&gt;&#10;          &lt;/Box&gt;&#10;        &lt;/Box&gt;&#10;      ))}&#10;      &lt;Box style={{ padding: '12px 14px', background: '#F0F5FC', borderRadius: 9, border: '1px dashed #3D7BD9' }}&gt;&#10;        &lt;Text style={{ fontSize: 12.5, color: '#0E3F8C', lineHeight: 1.5 }}&gt;&#10;          &lt;Text style={{ fontWeight: 'bold' }}&gt;Heads up:&lt;/Text&gt; three requirement changes will be injected later this term. Your model must absorb them — that is part of the design grade.&#10;        &lt;/Text&gt;&#10;      &lt;/Box&gt;&#10;    &lt;/Box&gt;&#10;  &lt;/Box&gt;&#10;  &lt;Box style={{ height: 34, padding: '0 40px', flexDirection: 'row', alignItems: 'center', justifyContent: 'space-between' }}&gt;&#10;    &lt;Text style={{ fontSize: 13, color: '#8B97A8' }}&gt;ISAD · Fall 2026 · the pack is also in 04-项目实践 on the course drive&lt;/Text&gt;&#10;    &lt;Text style={{ fontSize: 14, color: '#1E4FA8', fontWeight: 'bold' }}&gt;04 / 38&lt;/Text&gt;&#10;  &lt;/Box&gt;&#10;&lt;/Slide&gt;"/>
+        <p:cNvPr id="748" name=""/>
         <p:cNvGrpSpPr/>
         <p:nvPr/>
       </p:nvGrpSpPr>
@@ -32753,7 +33587,10 @@
         </p:spPr>
         <p:txBody>
           <a:bodyPr/>
-          <a:p/>
+          <a:p>
+            <a:pPr/>
+            <a:endParaRPr/>
+          </a:p>
         </p:txBody>
       </p:sp>
       <p:sp>
@@ -32777,7 +33614,10 @@
         </p:spPr>
         <p:txBody>
           <a:bodyPr/>
-          <a:p/>
+          <a:p>
+            <a:pPr/>
+            <a:endParaRPr/>
+          </a:p>
         </p:txBody>
       </p:sp>
       <p:sp>
@@ -32978,7 +33818,10 @@
         </p:spPr>
         <p:txBody>
           <a:bodyPr/>
-          <a:p/>
+          <a:p>
+            <a:pPr/>
+            <a:endParaRPr/>
+          </a:p>
         </p:txBody>
       </p:sp>
       <p:sp>
@@ -33035,7 +33878,10 @@
         </p:spPr>
         <p:txBody>
           <a:bodyPr/>
-          <a:p/>
+          <a:p>
+            <a:pPr/>
+            <a:endParaRPr/>
+          </a:p>
         </p:txBody>
       </p:sp>
       <p:sp>
@@ -33061,7 +33907,10 @@
         </p:spPr>
         <p:txBody>
           <a:bodyPr/>
-          <a:p/>
+          <a:p>
+            <a:pPr/>
+            <a:endParaRPr/>
+          </a:p>
         </p:txBody>
       </p:sp>
       <p:pic>
@@ -33188,7 +34037,10 @@
         </p:spPr>
         <p:txBody>
           <a:bodyPr/>
-          <a:p/>
+          <a:p>
+            <a:pPr/>
+            <a:endParaRPr/>
+          </a:p>
         </p:txBody>
       </p:sp>
       <p:sp>
@@ -33245,7 +34097,10 @@
         </p:spPr>
         <p:txBody>
           <a:bodyPr/>
-          <a:p/>
+          <a:p>
+            <a:pPr/>
+            <a:endParaRPr/>
+          </a:p>
         </p:txBody>
       </p:sp>
       <p:sp>
@@ -33271,7 +34126,10 @@
         </p:spPr>
         <p:txBody>
           <a:bodyPr/>
-          <a:p/>
+          <a:p>
+            <a:pPr/>
+            <a:endParaRPr/>
+          </a:p>
         </p:txBody>
       </p:sp>
       <p:pic>
@@ -33398,7 +34256,10 @@
         </p:spPr>
         <p:txBody>
           <a:bodyPr/>
-          <a:p/>
+          <a:p>
+            <a:pPr/>
+            <a:endParaRPr/>
+          </a:p>
         </p:txBody>
       </p:sp>
       <p:sp>
@@ -33455,7 +34316,10 @@
         </p:spPr>
         <p:txBody>
           <a:bodyPr/>
-          <a:p/>
+          <a:p>
+            <a:pPr/>
+            <a:endParaRPr/>
+          </a:p>
         </p:txBody>
       </p:sp>
       <p:sp>
@@ -33481,7 +34345,10 @@
         </p:spPr>
         <p:txBody>
           <a:bodyPr/>
-          <a:p/>
+          <a:p>
+            <a:pPr/>
+            <a:endParaRPr/>
+          </a:p>
         </p:txBody>
       </p:sp>
       <p:pic>
@@ -33608,7 +34475,10 @@
         </p:spPr>
         <p:txBody>
           <a:bodyPr/>
-          <a:p/>
+          <a:p>
+            <a:pPr/>
+            <a:endParaRPr/>
+          </a:p>
         </p:txBody>
       </p:sp>
       <p:sp>
@@ -33665,7 +34535,10 @@
         </p:spPr>
         <p:txBody>
           <a:bodyPr/>
-          <a:p/>
+          <a:p>
+            <a:pPr/>
+            <a:endParaRPr/>
+          </a:p>
         </p:txBody>
       </p:sp>
       <p:sp>
@@ -33691,7 +34564,10 @@
         </p:spPr>
         <p:txBody>
           <a:bodyPr/>
-          <a:p/>
+          <a:p>
+            <a:pPr/>
+            <a:endParaRPr/>
+          </a:p>
         </p:txBody>
       </p:sp>
       <p:pic>
@@ -33818,7 +34694,10 @@
         </p:spPr>
         <p:txBody>
           <a:bodyPr/>
-          <a:p/>
+          <a:p>
+            <a:pPr/>
+            <a:endParaRPr/>
+          </a:p>
         </p:txBody>
       </p:sp>
       <p:sp>
@@ -33875,7 +34754,10 @@
         </p:spPr>
         <p:txBody>
           <a:bodyPr/>
-          <a:p/>
+          <a:p>
+            <a:pPr/>
+            <a:endParaRPr/>
+          </a:p>
         </p:txBody>
       </p:sp>
       <p:sp>
@@ -33901,7 +34783,10 @@
         </p:spPr>
         <p:txBody>
           <a:bodyPr/>
-          <a:p/>
+          <a:p>
+            <a:pPr/>
+            <a:endParaRPr/>
+          </a:p>
         </p:txBody>
       </p:sp>
       <p:pic>
@@ -34028,7 +34913,10 @@
         </p:spPr>
         <p:txBody>
           <a:bodyPr/>
-          <a:p/>
+          <a:p>
+            <a:pPr/>
+            <a:endParaRPr/>
+          </a:p>
         </p:txBody>
       </p:sp>
       <p:sp>
@@ -34146,7 +35034,10 @@
         </p:spPr>
         <p:txBody>
           <a:bodyPr/>
-          <a:p/>
+          <a:p>
+            <a:pPr/>
+            <a:endParaRPr/>
+          </a:p>
         </p:txBody>
       </p:sp>
       <p:sp>
@@ -34277,7 +35168,10 @@
         </p:spPr>
         <p:txBody>
           <a:bodyPr/>
-          <a:p/>
+          <a:p>
+            <a:pPr/>
+            <a:endParaRPr/>
+          </a:p>
         </p:txBody>
       </p:sp>
       <p:sp>
@@ -34408,7 +35302,10 @@
         </p:spPr>
         <p:txBody>
           <a:bodyPr/>
-          <a:p/>
+          <a:p>
+            <a:pPr/>
+            <a:endParaRPr/>
+          </a:p>
         </p:txBody>
       </p:sp>
       <p:sp>
@@ -34539,7 +35436,10 @@
         </p:spPr>
         <p:txBody>
           <a:bodyPr/>
-          <a:p/>
+          <a:p>
+            <a:pPr/>
+            <a:endParaRPr/>
+          </a:p>
         </p:txBody>
       </p:sp>
       <p:sp>
@@ -34675,7 +35575,10 @@
         </p:spPr>
         <p:txBody>
           <a:bodyPr/>
-          <a:p/>
+          <a:p>
+            <a:pPr/>
+            <a:endParaRPr/>
+          </a:p>
         </p:txBody>
       </p:sp>
       <p:sp>
@@ -34825,7 +35728,7 @@
   <p:cSld>
     <p:spTree>
       <p:nvGrpSpPr>
-        <p:cNvPr id="809" name="" descr="&lt;Slide style={{ background: '#FFFFFF', padding: 0 }}&gt;&#10;  &lt;Box style={{ height: 72, background: '#1E4FA8', padding: '0 40px', flexDirection: 'row', alignItems: 'center', justifyContent: 'space-between' }}&gt;&#10;    &lt;Text style={{ fontSize: 15, color: '#B9CDF0', letterSpacing: 1 }}&gt;ISAD · INFORMATION SYSTEMS ANALYSIS &amp;amp; DESIGN&lt;/Text&gt;&#10;    &lt;Text style={{ fontSize: 15, color: '#B9CDF0' }}&gt;W04 · REQUIREMENTS&lt;/Text&gt;&#10;  &lt;/Box&gt;&#10;  &lt;Box style={{ padding: '14px 40px 0 40px', flexDirection: 'row', alignItems: 'center', justifyContent: 'space-between' }}&gt;&#10;    &lt;Text style={{ fontSize: 30, fontWeight: 'bold', color: '#0E3F8C' }}&gt;Functional vs. Non-Functional&lt;/Text&gt;&#10;    &lt;Text style={{ fontSize: 14, color: '#1E4FA8', fontWeight: 'bold' }}&gt;05 / 38&lt;/Text&gt;&#10;  &lt;/Box&gt;&#10;  &lt;Box style={{ flex: 1, padding: '10px 40px 6px 40px' }}&gt;&#10;    &lt;Table&#10;      style={{ width: '100%', height: '100%' }}&#10;      defaultTextStyle={{ fontSize: 14, textAlign: 'left', color: '#1A2230' }}&#10;      defaultCellStyle={{&#10;        border: {&#10;          left: { width: 1, color: '#E5E7EB' },&#10;          right: { width: 1, color: '#E5E7EB' },&#10;          top: { width: 1, color: '#E5E7EB' },&#10;          bottom: { width: 1, color: '#E5E7EB' },&#10;        },&#10;      }}&#10;      cells={[&#10;        [&#10;          { text: '', textStyle: { bold: true, color: '#FFFFFF' }, cellStyle: { background: { color: '#0E3F8C' } } },&#10;          { text: 'Functional', textStyle: { bold: true, color: '#FFFFFF', fontSize: 16 }, cellStyle: { background: { color: '#1E4FA8' } } },&#10;          { text: 'Non-functional', textStyle: { bold: true, color: '#FFFFFF', fontSize: 16 }, cellStyle: { background: { color: '#3D7BD9' } } },&#10;        ],&#10;        [&#10;          { text: 'What it says', textStyle: { bold: true, color: '#0E3F8C' }, cellStyle: { background: { color: '#F7F9FC' } } },&#10;          { text: 'What the system does', textStyle: { color: '#4A5568' }, cellStyle: { background: { color: '#F7F9FC' } } },&#10;          { text: 'How well it does it', textStyle: { color: '#4A5568' }, cellStyle: { background: { color: '#F7F9FC' } } },&#10;        ],&#10;        [&#10;          { text: 'CampusBites example', textStyle: { bold: true, color: '#0E3F8C' } },&#10;          { text: 'A student shall pay for an order with a campus card, a wallet, or cash on delivery.', textStyle: { color: '#4A5568' } },&#10;          { text: 'The order status screen shall refresh within 2 seconds for 5 000 concurrent users.', textStyle: { color: '#4A5568' } },&#10;        ],&#10;        [&#10;          { text: 'How you test it', textStyle: { bold: true, color: '#0E3F8C' }, cellStyle: { background: { color: '#F7F9FC' } } },&#10;          { text: 'Give it an input, check the output. One pass, one fail.', textStyle: { color: '#4A5568' }, cellStyle: { background: { color: '#F7F9FC' } } },&#10;          { text: 'Put it under load and measure. There is no single pass — there is a curve.', textStyle: { color: '#4A5568' }, cellStyle: { background: { color: '#F7F9FC' } } },&#10;        ],&#10;        [&#10;          { text: 'Typical failure', textStyle: { bold: true, color: '#0E3F8C' } },&#10;          { text: 'A feature is missing. The client notices at the demo.', textStyle: { color: '#4A5568' } },&#10;          { text: 'It works for one user and dies for five thousand. Nobody notices until launch.', textStyle: { color: '#4A5568' } },&#10;        ],&#10;        [&#10;          { text: 'Who complains', textStyle: { bold: true, color: '#0E3F8C' }, cellStyle: { background: { color: '#F7F9FC' } } },&#10;          { text: 'The client — &quot;where is my button?&quot;', textStyle: { color: '#4A5568' }, cellStyle: { background: { color: '#F7F9FC' } } },&#10;          { text: 'Operations — at 12:05 on a Monday, with a queue out the door.', textStyle: { color: '#4A5568' }, cellStyle: { background: { color: '#F7F9FC' } } },&#10;        ],&#10;      ]}&#10;    /&gt;&#10;  &lt;/Box&gt;&#10;  &lt;Box style={{ height: 46, background: '#0E3F8C', padding: '0 40px', flexDirection: 'row', alignItems: 'center', justifyContent: 'center' }}&gt;&#10;    &lt;Text style={{ fontSize: 16.5, color: '#FFFFFF', fontWeight: '600' }}&gt;Functional requirements get you the demo. Non-functional requirements get you the deployment.&lt;/Text&gt;&#10;  &lt;/Box&gt;&#10;&lt;/Slide&gt;"/>
+        <p:cNvPr id="809" name=""/>
         <p:cNvGrpSpPr/>
         <p:nvPr/>
       </p:nvGrpSpPr>
@@ -34858,7 +35761,10 @@
         </p:spPr>
         <p:txBody>
           <a:bodyPr/>
-          <a:p/>
+          <a:p>
+            <a:pPr/>
+            <a:endParaRPr/>
+          </a:p>
         </p:txBody>
       </p:sp>
       <p:sp>
@@ -34882,7 +35788,10 @@
         </p:spPr>
         <p:txBody>
           <a:bodyPr/>
-          <a:p/>
+          <a:p>
+            <a:pPr/>
+            <a:endParaRPr/>
+          </a:p>
         </p:txBody>
       </p:sp>
       <p:sp>
@@ -35856,7 +36765,10 @@
         </p:spPr>
         <p:txBody>
           <a:bodyPr/>
-          <a:p/>
+          <a:p>
+            <a:pPr/>
+            <a:endParaRPr/>
+          </a:p>
         </p:txBody>
       </p:sp>
       <p:sp>
@@ -35904,7 +36816,7 @@
   <p:cSld>
     <p:spTree>
       <p:nvGrpSpPr>
-        <p:cNvPr id="819" name="" descr="&lt;Slide style={{ background: '#FFFFFF', padding: 0 }}&gt;&#10;  &lt;Box style={{ height: 72, background: '#1E4FA8', padding: '0 40px', flexDirection: 'row', alignItems: 'center', justifyContent: 'space-between' }}&gt;&#10;    &lt;Text style={{ fontSize: 15, color: '#B9CDF0', letterSpacing: 1 }}&gt;ISAD · INFORMATION SYSTEMS ANALYSIS &amp;amp; DESIGN&lt;/Text&gt;&#10;    &lt;Text style={{ fontSize: 15, color: '#B9CDF0' }}&gt;W04 · REQUIREMENTS&lt;/Text&gt;&#10;  &lt;/Box&gt;&#10;  &lt;Box style={{ padding: '12px 40px 0 40px', flexDirection: 'row', alignItems: 'center', justifyContent: 'space-between' }}&gt;&#10;    &lt;Text style={{ fontSize: 30, fontWeight: 'bold', color: '#0E3F8C' }}&gt;FURPS+ at a Glance&lt;/Text&gt;&#10;    &lt;Text style={{ fontSize: 14, color: '#1E4FA8', fontWeight: 'bold' }}&gt;06 / 38&lt;/Text&gt;&#10;  &lt;/Box&gt;&#10;  &lt;Box style={{ flex: 1, padding: '4px 40px 0 40px', justifyContent: 'center', alignItems: 'center' }}&gt;&#10;    &lt;svg width={1180} height={382} viewBox='0 0 1180 382'&gt;&#10;      &lt;text x='10' y='16' fill='#8B97A8' fontSize='13'&gt;FURPS — five lenses for non-functional and functional requirements&lt;/text&gt;&#10;&#10;      &lt;g transform='translate(10,30)'&gt;&#10;        &lt;rect x='0' y='0' width='220' height='156' rx='8' fill='#F0F5FC' stroke='#1E4FA8' strokeWidth='2' /&gt;&#10;        &lt;circle cx='25' cy='26' r='14' fill='#1E4FA8' /&gt;&#10;        &lt;text x='25' y='32' textAnchor='middle' fill='#FFFFFF' fontSize='15' fontWeight='bold'&gt;F&lt;/text&gt;&#10;        &lt;text x='48' y='31' fill='#0E3F8C' fontSize='15' fontWeight='bold'&gt;Functionality&lt;/text&gt;&#10;        &lt;text x='14' y='60' fill='#4A5568' fontSize='12'&gt;Features, capabilities,&lt;/text&gt;&#10;        &lt;text x='14' y='78' fill='#4A5568' fontSize='12'&gt;and security.&lt;/text&gt;&#10;        &lt;line x1='14' y1='92' x2='206' y2='92' stroke='#D6DCE5' strokeWidth='1' /&gt;&#10;        &lt;text x='14' y='112' fill='#1E4FA8' fontSize='11.5' fontWeight='bold'&gt;CampusBites:&lt;/text&gt;&#10;        &lt;text x='14' y='130' fill='#1E4FA8' fontSize='11.5'&gt;place an order, pay,&lt;/text&gt;&#10;        &lt;text x='14' y='146' fill='#1E4FA8' fontSize='11.5'&gt;track it, rate the rider&lt;/text&gt;&#10;      &lt;/g&gt;&#10;&#10;      &lt;g transform='translate(242,30)'&gt;&#10;        &lt;rect x='0' y='0' width='220' height='156' rx='8' fill='#F0F5FC' stroke='#1E4FA8' strokeWidth='2' /&gt;&#10;        &lt;circle cx='25' cy='26' r='14' fill='#1E4FA8' /&gt;&#10;        &lt;text x='25' y='32' textAnchor='middle' fill='#FFFFFF' fontSize='15' fontWeight='bold'&gt;U&lt;/text&gt;&#10;        &lt;text x='48' y='31' fill='#0E3F8C' fontSize='15' fontWeight='bold'&gt;Usability&lt;/text&gt;&#10;        &lt;text x='14' y='60' fill='#4A5568' fontSize='12'&gt;Learnability, efficiency,&lt;/text&gt;&#10;        &lt;text x='14' y='78' fill='#4A5568' fontSize='12'&gt;error handling.&lt;/text&gt;&#10;        &lt;line x1='14' y1='92' x2='206' y2='92' stroke='#D6DCE5' strokeWidth='1' /&gt;&#10;        &lt;text x='14' y='112' fill='#1E4FA8' fontSize='11.5' fontWeight='bold'&gt;CampusBites:&lt;/text&gt;&#10;        &lt;text x='14' y='130' fill='#1E4FA8' fontSize='11.5'&gt;a first-time user orders&lt;/text&gt;&#10;        &lt;text x='14' y='146' fill='#1E4FA8' fontSize='11.5'&gt;in under 90 seconds&lt;/text&gt;&#10;      &lt;/g&gt;&#10;&#10;      &lt;g transform='translate(474,30)'&gt;&#10;        &lt;rect x='0' y='0' width='220' height='156' rx='8' fill='#F0F5FC' stroke='#1E4FA8' strokeWidth='2' /&gt;&#10;        &lt;circle cx='25' cy='26' r='14' fill='#1E4FA8' /&gt;&#10;        &lt;text x='25' y='32' textAnchor='middle' fill='#FFFFFF' fontSize='15' fontWeight='bold'&gt;R&lt;/text&gt;&#10;        &lt;text x='48' y='31' fill='#0E3F8C' fontSize='15' fontWeight='bold'&gt;Reliability&lt;/text&gt;&#10;        &lt;text x='14' y='60' fill='#4A5568' fontSize='12'&gt;Availability, fault&lt;/text&gt;&#10;        &lt;text x='14' y='78' fill='#4A5568' fontSize='12'&gt;tolerance, recovery.&lt;/text&gt;&#10;        &lt;line x1='14' y1='92' x2='206' y2='92' stroke='#D6DCE5' strokeWidth='1' /&gt;&#10;        &lt;text x='14' y='112' fill='#1E4FA8' fontSize='11.5' fontWeight='bold'&gt;CampusBites:&lt;/text&gt;&#10;        &lt;text x='14' y='130' fill='#1E4FA8' fontSize='11.5'&gt;99.5% available during&lt;/text&gt;&#10;        &lt;text x='14' y='146' fill='#1E4FA8' fontSize='11.5'&gt;term; no lost orders&lt;/text&gt;&#10;      &lt;/g&gt;&#10;&#10;      &lt;g transform='translate(706,30)'&gt;&#10;        &lt;rect x='0' y='0' width='220' height='156' rx='8' fill='#F0F5FC' stroke='#1E4FA8' strokeWidth='2' /&gt;&#10;        &lt;circle cx='25' cy='26' r='14' fill='#1E4FA8' /&gt;&#10;        &lt;text x='25' y='32' textAnchor='middle' fill='#FFFFFF' fontSize='15' fontWeight='bold'&gt;P&lt;/text&gt;&#10;        &lt;text x='48' y='31' fill='#0E3F8C' fontSize='15' fontWeight='bold'&gt;Performance&lt;/text&gt;&#10;        &lt;text x='14' y='60' fill='#4A5568' fontSize='12'&gt;Throughput, response&lt;/text&gt;&#10;        &lt;text x='14' y='78' fill='#4A5568' fontSize='12'&gt;time, resource use.&lt;/text&gt;&#10;        &lt;line x1='14' y1='92' x2='206' y2='92' stroke='#D6DCE5' strokeWidth='1' /&gt;&#10;        &lt;text x='14' y='112' fill='#1E4FA8' fontSize='11.5' fontWeight='bold'&gt;CampusBites:&lt;/text&gt;&#10;        &lt;text x='14' y='130' fill='#1E4FA8' fontSize='11.5'&gt;5 000 students at the&lt;/text&gt;&#10;        &lt;text x='14' y='146' fill='#1E4FA8' fontSize='11.5'&gt;12:00 lunch peak&lt;/text&gt;&#10;      &lt;/g&gt;&#10;&#10;      &lt;g transform='translate(938,30)'&gt;&#10;        &lt;rect x='0' y='0' width='220' height='156' rx='8' fill='#F0F5FC' stroke='#1E4FA8' strokeWidth='2' /&gt;&#10;        &lt;circle cx='25' cy='26' r='14' fill='#1E4FA8' /&gt;&#10;        &lt;text x='25' y='32' textAnchor='middle' fill='#FFFFFF' fontSize='15' fontWeight='bold'&gt;S&lt;/text&gt;&#10;        &lt;text x='48' y='31' fill='#0E3F8C' fontSize='15' fontWeight='bold'&gt;Supportability&lt;/text&gt;&#10;        &lt;text x='14' y='60' fill='#4A5568' fontSize='12'&gt;Testability, changeability,&lt;/text&gt;&#10;        &lt;text x='14' y='78' fill='#4A5568' fontSize='12'&gt;configurability.&lt;/text&gt;&#10;        &lt;line x1='14' y1='92' x2='206' y2='92' stroke='#D6DCE5' strokeWidth='1' /&gt;&#10;        &lt;text x='14' y='112' fill='#1E4FA8' fontSize='11.5' fontWeight='bold'&gt;CampusBites:&lt;/text&gt;&#10;        &lt;text x='14' y='130' fill='#1E4FA8' fontSize='11.5'&gt;a new payment method&lt;/text&gt;&#10;        &lt;text x='14' y='146' fill='#1E4FA8' fontSize='11.5'&gt;added without a rewrite&lt;/text&gt;&#10;      &lt;/g&gt;&#10;&#10;      &lt;g transform='translate(10,204)'&gt;&#10;        &lt;rect x='0' y='0' width='1148' height='164' rx='8' fill='#FFFFFF' stroke='#D6DCE5' strokeWidth='1' /&gt;&#10;        &lt;circle cx='34' cy='34' r='17' fill='#FFC107' /&gt;&#10;        &lt;text x='34' y='41' textAnchor='middle' fill='#1A2230' fontSize='17' fontWeight='bold'&gt;+&lt;/text&gt;&#10;        &lt;text x='60' y='39' fill='#0E3F8C' fontSize='16' fontWeight='bold'&gt;The “+” — constraints you did not choose&lt;/text&gt;&#10;        &lt;text x='60' y='58' fill='#8B97A8' fontSize='12'&gt;These are not wishes. They are the walls of the room you are building in.&lt;/text&gt;&#10;&#10;        &lt;g transform='translate(24,74)'&gt;&#10;          &lt;rect x='0' y='0' width='266' height='72' rx='6' fill='#F7F9FC' stroke='#E5E7EB' strokeWidth='1' /&gt;&#10;          &lt;text x='14' y='22' fill='#0E3F8C' fontSize='13' fontWeight='bold'&gt;Design constraints&lt;/text&gt;&#10;          &lt;text x='14' y='42' fill='#4A5568' fontSize='11.5'&gt;Must run on the campus&lt;/text&gt;&#10;          &lt;text x='14' y='58' fill='#4A5568' fontSize='11.5'&gt;network; Android and iOS.&lt;/text&gt;&#10;        &lt;/g&gt;&#10;        &lt;g transform='translate(302,74)'&gt;&#10;          &lt;rect x='0' y='0' width='266' height='72' rx='6' fill='#F7F9FC' stroke='#E5E7EB' strokeWidth='1' /&gt;&#10;          &lt;text x='14' y='22' fill='#0E3F8C' fontSize='13' fontWeight='bold'&gt;Implementation constraints&lt;/text&gt;&#10;          &lt;text x='14' y='42' fill='#4A5568' fontSize='11.5'&gt;Web app on campus servers;&lt;/text&gt;&#10;          &lt;text x='14' y='58' fill='#4A5568' fontSize='11.5'&gt;Git and GitHub for delivery.&lt;/text&gt;&#10;        &lt;/g&gt;&#10;        &lt;g transform='translate(580,74)'&gt;&#10;          &lt;rect x='0' y='0' width='266' height='72' rx='6' fill='#F7F9FC' stroke='#E5E7EB' strokeWidth='1' /&gt;&#10;          &lt;text x='14' y='22' fill='#0E3F8C' fontSize='13' fontWeight='bold'&gt;Interface constraints&lt;/text&gt;&#10;          &lt;text x='14' y='42' fill='#4A5568' fontSize='11.5'&gt;Campus card centre legacy&lt;/text&gt;&#10;          &lt;text x='14' y='58' fill='#4A5568' fontSize='11.5'&gt;API; external SMS gateway.&lt;/text&gt;&#10;        &lt;/g&gt;&#10;        &lt;g transform='translate(858,74)'&gt;&#10;          &lt;rect x='0' y='0' width='266' height='72' rx='6' fill='#F7F9FC' stroke='#E5E7EB' strokeWidth='1' /&gt;&#10;          &lt;text x='14' y='22' fill='#0E3F8C' fontSize='13' fontWeight='bold'&gt;Physical constraints&lt;/text&gt;&#10;          &lt;text x='14' y='42' fill='#4A5568' fontSize='11.5'&gt;Phones in a courier’s pocket;&lt;/text&gt;&#10;          &lt;text x='14' y='58' fill='#4A5568' fontSize='11.5'&gt;kitchen tablets on the wall.&lt;/text&gt;&#10;        &lt;/g&gt;&#10;      &lt;/g&gt;&#10;    &lt;/svg&gt;&#10;  &lt;/Box&gt;&#10;  &lt;Box style={{ height: 34, padding: '0 40px', flexDirection: 'row', alignItems: 'center', justifyContent: 'space-between' }}&gt;&#10;    &lt;Text style={{ fontSize: 13, color: '#8B97A8' }}&gt;ISAD · Fall 2026 · FURPS+ is a checklist, not a procedure — use it to notice what you forgot&lt;/Text&gt;&#10;    &lt;Text style={{ fontSize: 14, color: '#1E4FA8', fontWeight: 'bold' }}&gt;06 / 38&lt;/Text&gt;&#10;  &lt;/Box&gt;&#10;&lt;/Slide&gt;"/>
+        <p:cNvPr id="819" name=""/>
         <p:cNvGrpSpPr/>
         <p:nvPr/>
       </p:nvGrpSpPr>
@@ -35937,7 +36849,10 @@
         </p:spPr>
         <p:txBody>
           <a:bodyPr/>
-          <a:p/>
+          <a:p>
+            <a:pPr/>
+            <a:endParaRPr/>
+          </a:p>
         </p:txBody>
       </p:sp>
       <p:sp>
@@ -35961,7 +36876,10 @@
         </p:spPr>
         <p:txBody>
           <a:bodyPr/>
-          <a:p/>
+          <a:p>
+            <a:pPr/>
+            <a:endParaRPr/>
+          </a:p>
         </p:txBody>
       </p:sp>
       <p:sp>
@@ -36215,7 +37133,7 @@
   <p:cSld>
     <p:spTree>
       <p:nvGrpSpPr>
-        <p:cNvPr id="829" name="" descr="&lt;Slide style={{ background: '#FFFFFF', padding: 0 }}&gt;&#10;  &lt;Box style={{ height: 72, background: '#1E4FA8', padding: '0 40px', flexDirection: 'row', alignItems: 'center', justifyContent: 'space-between' }}&gt;&#10;    &lt;Text style={{ fontSize: 15, color: '#B9CDF0', letterSpacing: 1 }}&gt;ISAD · INFORMATION SYSTEMS ANALYSIS &amp;amp; DESIGN&lt;/Text&gt;&#10;    &lt;Text style={{ fontSize: 15, color: '#B9CDF0' }}&gt;W04 · REQUIREMENTS&lt;/Text&gt;&#10;  &lt;/Box&gt;&#10;  &lt;Box style={{ padding: '14px 40px 0 40px', flexDirection: 'row', alignItems: 'center', justifyContent: 'space-between' }}&gt;&#10;    &lt;Text style={{ fontSize: 27, fontWeight: 'bold', color: '#0E3F8C' }}&gt;“The system shall…” — Testable or Not&lt;/Text&gt;&#10;    &lt;Text style={{ fontSize: 14, color: '#1E4FA8', fontWeight: 'bold' }}&gt;07 / 38&lt;/Text&gt;&#10;  &lt;/Box&gt;&#10;  &lt;Box style={{ flex: 1, padding: '10px 40px 0 40px', flexDirection: 'row', gap: 22 }}&gt;&#10;    &lt;Box style={{ flex: 1, flexDirection: 'column', gap: 9 }}&gt;&#10;      &lt;Box style={{ flexDirection: 'row', alignItems: 'center', gap: 9, marginBottom: 2 }}&gt;&#10;        &lt;Box style={{ width: 26, height: 26, borderRadius: 13, background: '#D9534F', justifyContent: 'center', alignItems: 'center' }}&gt;&#10;          &lt;FAIcon name='xmark' style={{ fill: '#FFFFFF', width: 12, height: 12 }} /&gt;&#10;        &lt;/Box&gt;&#10;        &lt;Text style={{ fontSize: 16, fontWeight: 'bold', color: '#D9534F' }}&gt;Untestable — a wish&lt;/Text&gt;&#10;      &lt;/Box&gt;&#10;      {[&#10;        'The system shall be user-friendly.',&#10;        'The system shall be fast and reliable.',&#10;        'The system shall handle payments securely.',&#10;        'The system shall have a good menu page.',&#10;      ].map((t) =&gt; (&#10;        &lt;Box key={t} style={{ padding: '13px 15px', background: '#FDF3F3', borderRadius: 9, borderLeft: '3px solid #D9534F' }}&gt;&#10;          &lt;Text style={{ fontSize: 13.5, color: '#4A5568', lineHeight: 1.5 }}&gt;{t}&lt;/Text&gt;&#10;        &lt;/Box&gt;&#10;      ))}&#10;      &lt;Box style={{ padding: '12px 15px', background: '#F7F9FC', borderRadius: 9, marginTop: 2 }}&gt;&#10;        &lt;Text style={{ fontSize: 12.5, color: '#8B97A8', lineHeight: 1.5 }}&gt;&#10;          Every one of these is an opinion wearing a requirement’s clothes. You cannot fail a test you cannot write.&#10;        &lt;/Text&gt;&#10;      &lt;/Box&gt;&#10;    &lt;/Box&gt;&#10;    &lt;Box style={{ width: 34, justifyContent: 'center', alignItems: 'center' }}&gt;&#10;      &lt;Box style={{ padding: '8px 0', justifyContent: 'center', alignItems: 'center' }}&gt;&#10;        &lt;FAIcon name='arrow-right-long' style={{ fill: '#3D7BD9', width: 22, height: 22 }} /&gt;&#10;      &lt;/Box&gt;&#10;    &lt;/Box&gt;&#10;    &lt;Box style={{ flex: 1, flexDirection: 'column', gap: 9 }}&gt;&#10;      &lt;Box style={{ flexDirection: 'row', alignItems: 'center', gap: 9, marginBottom: 2 }}&gt;&#10;        &lt;Box style={{ width: 26, height: 26, borderRadius: 13, background: '#1E4FA8', justifyContent: 'center', alignItems: 'center' }}&gt;&#10;          &lt;FAIcon name='check' style={{ fill: '#FFFFFF', width: 12, height: 12 }} /&gt;&#10;        &lt;/Box&gt;&#10;        &lt;Text style={{ fontSize: 16, fontWeight: 'bold', color: '#1E4FA8' }}&gt;Testable — a promise&lt;/Text&gt;&#10;      &lt;/Box&gt;&#10;      {[&#10;        'A first-time user shall complete an order in under 90 seconds without help.',&#10;        'The status screen shall refresh within 2 s at 5 000 concurrent users; 99.5% uptime in term.',&#10;        'The system shall store only the provider token — never a full card number.',&#10;        'A manager shall mark an item sold out in no more than three taps.',&#10;      ].map((t) =&gt; (&#10;        &lt;Box key={t} style={{ padding: '13px 15px', background: '#F0F5FC', borderRadius: 9, borderLeft: '3px solid #1E4FA8' }}&gt;&#10;          &lt;Text style={{ fontSize: 13.5, color: '#1A2230', lineHeight: 1.5 }}&gt;{t}&lt;/Text&gt;&#10;        &lt;/Box&gt;&#10;      ))}&#10;      &lt;Box style={{ padding: '12px 15px', background: '#F0F5FC', borderRadius: 9, marginTop: 2 }}&gt;&#10;        &lt;Text style={{ fontSize: 12.5, color: '#0E3F8C', lineHeight: 1.5, fontWeight: 'bold' }}&gt;&#10;          Each one names a number, a threshold, or a forbidden thing. That is what makes it testable.&#10;        &lt;/Text&gt;&#10;      &lt;/Box&gt;&#10;    &lt;/Box&gt;&#10;  &lt;/Box&gt;&#10;  &lt;Box style={{ height: 46, background: '#0E3F8C', padding: '0 40px', flexDirection: 'row', alignItems: 'center', justifyContent: 'center' }}&gt;&#10;    &lt;Text style={{ fontSize: 16, color: '#FFFFFF', fontWeight: '600' }}&gt;If you cannot describe how you would test it, you have not finished writing it.&lt;/Text&gt;&#10;  &lt;/Box&gt;&#10;&lt;/Slide&gt;"/>
+        <p:cNvPr id="829" name=""/>
         <p:cNvGrpSpPr/>
         <p:nvPr/>
       </p:nvGrpSpPr>
@@ -36248,7 +37166,10 @@
         </p:spPr>
         <p:txBody>
           <a:bodyPr/>
-          <a:p/>
+          <a:p>
+            <a:pPr/>
+            <a:endParaRPr/>
+          </a:p>
         </p:txBody>
       </p:sp>
       <p:sp>
@@ -36272,7 +37193,10 @@
         </p:spPr>
         <p:txBody>
           <a:bodyPr/>
-          <a:p/>
+          <a:p>
+            <a:pPr/>
+            <a:endParaRPr/>
+          </a:p>
         </p:txBody>
       </p:sp>
       <p:sp>
@@ -36438,7 +37362,10 @@
         </p:spPr>
         <p:txBody>
           <a:bodyPr/>
-          <a:p/>
+          <a:p>
+            <a:pPr/>
+            <a:endParaRPr/>
+          </a:p>
         </p:txBody>
       </p:sp>
       <p:pic>
@@ -36530,7 +37457,10 @@
         </p:spPr>
         <p:txBody>
           <a:bodyPr/>
-          <a:p/>
+          <a:p>
+            <a:pPr/>
+            <a:endParaRPr/>
+          </a:p>
         </p:txBody>
       </p:sp>
       <p:sp>
@@ -36587,7 +37517,10 @@
         </p:spPr>
         <p:txBody>
           <a:bodyPr/>
-          <a:p/>
+          <a:p>
+            <a:pPr/>
+            <a:endParaRPr/>
+          </a:p>
         </p:txBody>
       </p:sp>
       <p:sp>
@@ -36648,7 +37581,10 @@
         </p:spPr>
         <p:txBody>
           <a:bodyPr/>
-          <a:p/>
+          <a:p>
+            <a:pPr/>
+            <a:endParaRPr/>
+          </a:p>
         </p:txBody>
       </p:sp>
       <p:sp>
@@ -36705,7 +37641,10 @@
         </p:spPr>
         <p:txBody>
           <a:bodyPr/>
-          <a:p/>
+          <a:p>
+            <a:pPr/>
+            <a:endParaRPr/>
+          </a:p>
         </p:txBody>
       </p:sp>
       <p:sp>
@@ -36766,7 +37705,10 @@
         </p:spPr>
         <p:txBody>
           <a:bodyPr/>
-          <a:p/>
+          <a:p>
+            <a:pPr/>
+            <a:endParaRPr/>
+          </a:p>
         </p:txBody>
       </p:sp>
       <p:sp>
@@ -36823,7 +37765,10 @@
         </p:spPr>
         <p:txBody>
           <a:bodyPr/>
-          <a:p/>
+          <a:p>
+            <a:pPr/>
+            <a:endParaRPr/>
+          </a:p>
         </p:txBody>
       </p:sp>
       <p:sp>
@@ -36884,7 +37829,10 @@
         </p:spPr>
         <p:txBody>
           <a:bodyPr/>
-          <a:p/>
+          <a:p>
+            <a:pPr/>
+            <a:endParaRPr/>
+          </a:p>
         </p:txBody>
       </p:sp>
       <p:sp>
@@ -36941,7 +37889,10 @@
         </p:spPr>
         <p:txBody>
           <a:bodyPr/>
-          <a:p/>
+          <a:p>
+            <a:pPr/>
+            <a:endParaRPr/>
+          </a:p>
         </p:txBody>
       </p:sp>
       <p:sp>
@@ -37002,7 +37953,10 @@
         </p:spPr>
         <p:txBody>
           <a:bodyPr/>
-          <a:p/>
+          <a:p>
+            <a:pPr/>
+            <a:endParaRPr/>
+          </a:p>
         </p:txBody>
       </p:sp>
       <p:sp>
@@ -37096,7 +38050,10 @@
         </p:spPr>
         <p:txBody>
           <a:bodyPr/>
-          <a:p/>
+          <a:p>
+            <a:pPr/>
+            <a:endParaRPr/>
+          </a:p>
         </p:txBody>
       </p:sp>
       <p:pic>
@@ -37188,7 +38145,10 @@
         </p:spPr>
         <p:txBody>
           <a:bodyPr/>
-          <a:p/>
+          <a:p>
+            <a:pPr/>
+            <a:endParaRPr/>
+          </a:p>
         </p:txBody>
       </p:sp>
       <p:sp>
@@ -37245,7 +38205,10 @@
         </p:spPr>
         <p:txBody>
           <a:bodyPr/>
-          <a:p/>
+          <a:p>
+            <a:pPr/>
+            <a:endParaRPr/>
+          </a:p>
         </p:txBody>
       </p:sp>
       <p:sp>
@@ -37306,7 +38269,10 @@
         </p:spPr>
         <p:txBody>
           <a:bodyPr/>
-          <a:p/>
+          <a:p>
+            <a:pPr/>
+            <a:endParaRPr/>
+          </a:p>
         </p:txBody>
       </p:sp>
       <p:sp>
@@ -37363,7 +38329,10 @@
         </p:spPr>
         <p:txBody>
           <a:bodyPr/>
-          <a:p/>
+          <a:p>
+            <a:pPr/>
+            <a:endParaRPr/>
+          </a:p>
         </p:txBody>
       </p:sp>
       <p:sp>
@@ -37426,7 +38395,10 @@
         </p:spPr>
         <p:txBody>
           <a:bodyPr/>
-          <a:p/>
+          <a:p>
+            <a:pPr/>
+            <a:endParaRPr/>
+          </a:p>
         </p:txBody>
       </p:sp>
       <p:sp>
@@ -37483,7 +38455,10 @@
         </p:spPr>
         <p:txBody>
           <a:bodyPr/>
-          <a:p/>
+          <a:p>
+            <a:pPr/>
+            <a:endParaRPr/>
+          </a:p>
         </p:txBody>
       </p:sp>
       <p:sp>
@@ -37544,7 +38519,10 @@
         </p:spPr>
         <p:txBody>
           <a:bodyPr/>
-          <a:p/>
+          <a:p>
+            <a:pPr/>
+            <a:endParaRPr/>
+          </a:p>
         </p:txBody>
       </p:sp>
       <p:sp>
@@ -37601,7 +38579,10 @@
         </p:spPr>
         <p:txBody>
           <a:bodyPr/>
-          <a:p/>
+          <a:p>
+            <a:pPr/>
+            <a:endParaRPr/>
+          </a:p>
         </p:txBody>
       </p:sp>
       <p:sp>
@@ -37662,7 +38643,10 @@
         </p:spPr>
         <p:txBody>
           <a:bodyPr/>
-          <a:p/>
+          <a:p>
+            <a:pPr/>
+            <a:endParaRPr/>
+          </a:p>
         </p:txBody>
       </p:sp>
       <p:sp>
@@ -37723,7 +38707,10 @@
         </p:spPr>
         <p:txBody>
           <a:bodyPr/>
-          <a:p/>
+          <a:p>
+            <a:pPr/>
+            <a:endParaRPr/>
+          </a:p>
         </p:txBody>
       </p:sp>
       <p:sp>
@@ -37771,7 +38758,7 @@
   <p:cSld>
     <p:spTree>
       <p:nvGrpSpPr>
-        <p:cNvPr id="873" name="" descr="&lt;Slide style={{ background: '#0E3F8C', padding: 0 }}&gt;&#10;  &lt;Box style={{ flexDirection: 'row', height: '100%', position: 'relative' }}&gt;&#10;    &lt;Box style={{ position: 'absolute', top: 0, left: 0, right: 0, height: 8, background: '#1E4FA8' }} /&gt;&#10;    &lt;Box style={{ width: 300, justifyContent: 'center', alignItems: 'center', borderRight: '1px solid #2B5793' }}&gt;&#10;      &lt;Text style={{ fontSize: 220, fontWeight: 'bold', color: '#3D7BD9', fontFamily: 'Georgia, serif', lineHeight: 1 }}&gt;02&lt;/Text&gt;&#10;    &lt;/Box&gt;&#10;    &lt;Box style={{ flex: 1, padding: '70px 64px', flexDirection: 'column', justifyContent: 'center' }}&gt;&#10;      &lt;Text style={{ fontSize: 15, color: '#7FA2D6', letterSpacing: 2, marginBottom: 18 }}&gt;PART 1 · LECTURE&lt;/Text&gt;&#10;      &lt;Text style={{ fontSize: 46, fontWeight: 'bold', color: '#FFFFFF', lineHeight: 1.18 }}&gt;Actors&lt;br /&gt;&amp;amp; Goals&lt;/Text&gt;&#10;      &lt;Box style={{ width: 64, height: 4, background: '#FFC107', marginTop: 26, marginBottom: 26 }} /&gt;&#10;      &lt;Box style={{ flexDirection: 'column', gap: 12 }}&gt;&#10;        {[&#10;          'An actor is a role, not a person',&#10;          'A use case is a goal, not a function',&#10;          'Beware the CRUD trap — Manage X is not a use case',&#10;        ].map((t) =&gt; (&#10;          &lt;Box key={t} style={{ flexDirection: 'row', alignItems: 'center', gap: 12 }}&gt;&#10;            &lt;Box style={{ width: 8, height: 8, borderRadius: 4, background: '#3D7BD9' }} /&gt;&#10;            &lt;Text style={{ fontSize: 20, color: '#C5D4EA' }}&gt;{t}&lt;/Text&gt;&#10;          &lt;/Box&gt;&#10;        ))}&#10;      &lt;/Box&gt;&#10;    &lt;/Box&gt;&#10;  &lt;/Box&gt;&#10;&lt;/Slide&gt;"/>
+        <p:cNvPr id="873" name=""/>
         <p:cNvGrpSpPr/>
         <p:nvPr/>
       </p:nvGrpSpPr>
@@ -37804,7 +38791,10 @@
         </p:spPr>
         <p:txBody>
           <a:bodyPr/>
-          <a:p/>
+          <a:p>
+            <a:pPr/>
+            <a:endParaRPr/>
+          </a:p>
         </p:txBody>
       </p:sp>
       <p:sp>
@@ -37844,7 +38834,10 @@
         </p:spPr>
         <p:txBody>
           <a:bodyPr/>
-          <a:p/>
+          <a:p>
+            <a:pPr/>
+            <a:endParaRPr/>
+          </a:p>
         </p:txBody>
       </p:sp>
       <p:sp>
@@ -37991,7 +38984,10 @@
         </p:spPr>
         <p:txBody>
           <a:bodyPr/>
-          <a:p/>
+          <a:p>
+            <a:pPr/>
+            <a:endParaRPr/>
+          </a:p>
         </p:txBody>
       </p:sp>
       <p:sp>
@@ -38017,7 +39013,10 @@
         </p:spPr>
         <p:txBody>
           <a:bodyPr/>
-          <a:p/>
+          <a:p>
+            <a:pPr/>
+            <a:endParaRPr/>
+          </a:p>
         </p:txBody>
       </p:sp>
       <p:sp>
@@ -38078,7 +39077,10 @@
         </p:spPr>
         <p:txBody>
           <a:bodyPr/>
-          <a:p/>
+          <a:p>
+            <a:pPr/>
+            <a:endParaRPr/>
+          </a:p>
         </p:txBody>
       </p:sp>
       <p:sp>
@@ -38139,7 +39141,10 @@
         </p:spPr>
         <p:txBody>
           <a:bodyPr/>
-          <a:p/>
+          <a:p>
+            <a:pPr/>
+            <a:endParaRPr/>
+          </a:p>
         </p:txBody>
       </p:sp>
       <p:sp>
@@ -38198,7 +39203,10 @@
         </p:spPr>
         <p:txBody>
           <a:bodyPr/>
-          <a:p/>
+          <a:p>
+            <a:pPr/>
+            <a:endParaRPr/>
+          </a:p>
         </p:txBody>
       </p:sp>
     </p:spTree>
@@ -38211,7 +39219,7 @@
   <p:cSld>
     <p:spTree>
       <p:nvGrpSpPr>
-        <p:cNvPr id="887" name="" descr="&lt;Slide style={{ background: '#FFFFFF', padding: 0 }}&gt;&#10;  &lt;Box style={{ height: 72, background: '#1E4FA8', padding: '0 40px', flexDirection: 'row', alignItems: 'center', justifyContent: 'space-between' }}&gt;&#10;    &lt;Text style={{ fontSize: 15, color: '#B9CDF0', letterSpacing: 1 }}&gt;ISAD · INFORMATION SYSTEMS ANALYSIS &amp;amp; DESIGN&lt;/Text&gt;&#10;    &lt;Text style={{ fontSize: 15, color: '#B9CDF0' }}&gt;W04 · ACTORS &amp;amp; GOALS&lt;/Text&gt;&#10;  &lt;/Box&gt;&#10;  &lt;Box style={{ padding: '12px 40px 0 40px', flexDirection: 'row', alignItems: 'center', justifyContent: 'space-between' }}&gt;&#10;    &lt;Text style={{ fontSize: 30, fontWeight: 'bold', color: '#0E3F8C' }}&gt;What Is an Actor?&lt;/Text&gt;&#10;    &lt;Text style={{ fontSize: 14, color: '#1E4FA8', fontWeight: 'bold' }}&gt;09 / 38&lt;/Text&gt;&#10;  &lt;/Box&gt;&#10;  &lt;Box style={{ flex: 1, padding: '4px 40px 0 40px', justifyContent: 'center', alignItems: 'center' }}&gt;&#10;    &lt;svg width={1180} height={384} viewBox='0 0 1180 384'&gt;&#10;      &lt;text x='10' y='16' fill='#8B97A8' fontSize='13'&gt;An actor is a ROLE played toward the system — not a job title, and not a person&lt;/text&gt;&#10;&#10;      &lt;g transform='translate(10,32)'&gt;&#10;        &lt;rect x='0' y='0' width='372' height='172' rx='8' fill='#F0F5FC' stroke='#1E4FA8' strokeWidth='2' /&gt;&#10;        &lt;circle cx='30' cy='28' r='15' fill='#1E4FA8' /&gt;&#10;        &lt;text x='30' y='34' textAnchor='middle' fill='#FFFFFF' fontSize='13' fontWeight='bold'&gt;1&lt;/text&gt;&#10;        &lt;text x='54' y='33' fill='#0E3F8C' fontSize='16' fontWeight='bold'&gt;Primary actor&lt;/text&gt;&#10;        &lt;text x='18' y='60' fill='#4A5568' fontSize='12'&gt;Starts the use case. Has a goal&lt;/text&gt;&#10;        &lt;text x='18' y='78' fill='#4A5568' fontSize='12'&gt;the system must satisfy.&lt;/text&gt;&#10;        &lt;line x1='18' y1='92' x2='354' y2='92' stroke='#D6DCE5' strokeWidth='1' /&gt;&#10;        &lt;text x='18' y='112' fill='#1E4FA8' fontSize='11.5' fontWeight='bold'&gt;CampusBites:&lt;/text&gt;&#10;        &lt;text x='18' y='130' fill='#1E4FA8' fontSize='11.5'&gt;Student, Restaurant Manager,&lt;/text&gt;&#10;        &lt;text x='18' y='148' fill='#1E4FA8' fontSize='11.5'&gt;Courier&lt;/text&gt;&#10;        &lt;text x='18' y='166' fill='#8B97A8' fontSize='10.5'&gt;Test: does the use case exist for them?&lt;/text&gt;&#10;      &lt;/g&gt;&#10;&#10;      &lt;g transform='translate(404,32)'&gt;&#10;        &lt;rect x='0' y='0' width='372' height='172' rx='8' fill='#FFFFFF' stroke='#D6DCE5' strokeWidth='1.5' /&gt;&#10;        &lt;circle cx='30' cy='28' r='15' fill='#3D7BD9' /&gt;&#10;        &lt;text x='30' y='34' textAnchor='middle' fill='#FFFFFF' fontSize='13' fontWeight='bold'&gt;2&lt;/text&gt;&#10;        &lt;text x='54' y='33' fill='#0E3F8C' fontSize='16' fontWeight='bold'&gt;Secondary actor&lt;/text&gt;&#10;        &lt;text x='18' y='60' fill='#4A5568' fontSize='12'&gt;Serves the system. The system&lt;/text&gt;&#10;        &lt;text x='18' y='78' fill='#4A5568' fontSize='12'&gt;calls them; they never start it.&lt;/text&gt;&#10;        &lt;line x1='18' y1='92' x2='354' y2='92' stroke='#D6DCE5' strokeWidth='1' /&gt;&#10;        &lt;text x='18' y='112' fill='#1E4FA8' fontSize='11.5' fontWeight='bold'&gt;CampusBites:&lt;/text&gt;&#10;        &lt;text x='18' y='130' fill='#1E4FA8' fontSize='11.5'&gt;Payment Provider, SMS Gateway,&lt;/text&gt;&#10;        &lt;text x='18' y='148' fill='#1E4FA8' fontSize='11.5'&gt;Campus Card Centre&lt;/text&gt;&#10;        &lt;text x='18' y='166' fill='#8B97A8' fontSize='10.5'&gt;Test: who waits, and who is called?&lt;/text&gt;&#10;      &lt;/g&gt;&#10;&#10;      &lt;g transform='translate(798,32)'&gt;&#10;        &lt;rect x='0' y='0' width='372' height='172' rx='8' fill='#FFFFFF' stroke='#D6DCE5' strokeWidth='1.5' /&gt;&#10;        &lt;circle cx='30' cy='28' r='15' fill='#3D7BD9' /&gt;&#10;        &lt;text x='30' y='34' textAnchor='middle' fill='#FFFFFF' fontSize='13' fontWeight='bold'&gt;3&lt;/text&gt;&#10;        &lt;text x='54' y='33' fill='#0E3F8C' fontSize='16' fontWeight='bold'&gt;Another system&lt;/text&gt;&#10;        &lt;text x='18' y='60' fill='#4A5568' fontSize='12'&gt;Software can be an actor.&lt;/text&gt;&#10;        &lt;text x='18' y='78' fill='#4A5568' fontSize='12'&gt;It sits outside your boundary.&lt;/text&gt;&#10;        &lt;line x1='18' y1='92' x2='354' y2='92' stroke='#D6DCE5' strokeWidth='1' /&gt;&#10;        &lt;text x='18' y='112' fill='#1E4FA8' fontSize='11.5' fontWeight='bold'&gt;CampusBites:&lt;/text&gt;&#10;        &lt;text x='18' y='130' fill='#1E4FA8' fontSize='11.5'&gt;the card centre that must&lt;/text&gt;&#10;        &lt;text x='18' y='148' fill='#1E4FA8' fontSize='11.5'&gt;approve a student payment&lt;/text&gt;&#10;        &lt;text x='18' y='166' fill='#8B97A8' fontSize='10.5'&gt;Drawn as a box, or as an actor&lt;/text&gt;&#10;      &lt;/g&gt;&#10;&#10;      &lt;g transform='translate(10,220)'&gt;&#10;        &lt;rect x='0' y='0' width='1160' height='150' rx='8' fill='#FFFFFF' stroke='#D9534F' strokeWidth='1.5' /&gt;&#10;        &lt;circle cx='30' cy='30' r='16' fill='#D9534F' /&gt;&#10;        &lt;text x='30' y='36' textAnchor='middle' fill='#FFFFFF' fontSize='15' fontWeight='bold'&gt;!&lt;/text&gt;&#10;        &lt;text x='56' y='35' fill='#D9534F' fontSize='16' fontWeight='bold'&gt;A role is not a person — the same human can be three actors&lt;/text&gt;&#10;        &lt;line x1='20' y1='56' x2='1140' y2='56' stroke='#E5E7EB' strokeWidth='1' /&gt;&#10;&#10;        &lt;g transform='translate(30,72)'&gt;&#10;          &lt;circle cx='18' cy='18' r='14' fill='none' stroke='#1E4FA8' strokeWidth='2' /&gt;&#10;          &lt;line x1='18' y1='32' x2='18' y2='56' stroke='#1E4FA8' strokeWidth='2' /&gt;&#10;          &lt;line x1='18' y1='40' x2='4' y2='52' stroke='#1E4FA8' strokeWidth='2' /&gt;&#10;          &lt;line x1='18' y1='40' x2='32' y2='52' stroke='#1E4FA8' strokeWidth='2' /&gt;&#10;          &lt;line x1='18' y1='56' x2='6' y2='72' stroke='#1E4FA8' strokeWidth='2' /&gt;&#10;          &lt;line x1='18' y1='56' x2='30' y2='72' stroke='#1E4FA8' strokeWidth='2' /&gt;&#10;          &lt;text x='44' y='26' fill='#1A2230' fontSize='13' fontWeight='bold'&gt;Li Wei&lt;/text&gt;&#10;          &lt;text x='44' y='44' fill='#4A5568' fontSize='11.5'&gt;one human being&lt;/text&gt;&#10;        &lt;/g&gt;&#10;&#10;        &lt;g transform='translate(300,72)'&gt;&#10;          &lt;rect x='0' y='0' width='230' height='60' rx='6' fill='#F0F5FC' stroke='#1E4FA8' strokeWidth='1' /&gt;&#10;          &lt;text x='14' y='24' fill='#0E3F8C' fontSize='12.5' fontWeight='bold'&gt;Student&lt;/text&gt;&#10;          &lt;text x='14' y='44' fill='#4A5568' fontSize='11'&gt;orders lunch at 12:00&lt;/text&gt;&#10;        &lt;/g&gt;&#10;        &lt;g transform='translate(548,72)'&gt;&#10;          &lt;rect x='0' y='0' width='230' height='60' rx='6' fill='#F0F5FC' stroke='#1E4FA8' strokeWidth='1' /&gt;&#10;          &lt;text x='14' y='24' fill='#0E3F8C' fontSize='12.5' fontWeight='bold'&gt;Courier&lt;/text&gt;&#10;          &lt;text x='14' y='44' fill='#4A5568' fontSize='11'&gt;delivers orders at 18:00&lt;/text&gt;&#10;        &lt;/g&gt;&#10;        &lt;g transform='translate(796,72)'&gt;&#10;          &lt;rect x='0' y='0' width='230' height='60' rx='6' fill='#F0F5FC' stroke='#1E4FA8' strokeWidth='1' /&gt;&#10;          &lt;text x='14' y='24' fill='#0E3F8C' fontSize='12.5' fontWeight='bold'&gt;Reviewer&lt;/text&gt;&#10;          &lt;text x='14' y='44' fill='#4A5568' fontSize='11'&gt;rates the restaurant later&lt;/text&gt;&#10;        &lt;/g&gt;&#10;&#10;        &lt;text x='1050' y='98' fill='#8B97A8' fontSize='11'&gt;Three actors.&lt;/text&gt;&#10;        &lt;text x='1050' y='116' fill='#8B97A8' fontSize='11'&gt;One person.&lt;/text&gt;&#10;      &lt;/g&gt;&#10;    &lt;/svg&gt;&#10;  &lt;/Box&gt;&#10;  &lt;Box style={{ height: 34, padding: '0 40px', flexDirection: 'row', alignItems: 'center', justifyContent: 'space-between' }}&gt;&#10;    &lt;Text style={{ fontSize: 13, color: '#8B97A8' }}&gt;ISAD · Fall 2026 · Name the role, not the person — the role is what the system has to serve&lt;/Text&gt;&#10;    &lt;Text style={{ fontSize: 14, color: '#1E4FA8', fontWeight: 'bold' }}&gt;09 / 38&lt;/Text&gt;&#10;  &lt;/Box&gt;&#10;&lt;/Slide&gt;"/>
+        <p:cNvPr id="887" name=""/>
         <p:cNvGrpSpPr/>
         <p:nvPr/>
       </p:nvGrpSpPr>
@@ -38244,7 +39252,10 @@
         </p:spPr>
         <p:txBody>
           <a:bodyPr/>
-          <a:p/>
+          <a:p>
+            <a:pPr/>
+            <a:endParaRPr/>
+          </a:p>
         </p:txBody>
       </p:sp>
       <p:sp>
@@ -38268,7 +39279,10 @@
         </p:spPr>
         <p:txBody>
           <a:bodyPr/>
-          <a:p/>
+          <a:p>
+            <a:pPr/>
+            <a:endParaRPr/>
+          </a:p>
         </p:txBody>
       </p:sp>
       <p:sp>
